--- a/slides/CPC-Hub-構成設計.pptx
+++ b/slides/CPC-Hub-構成設計.pptx
@@ -2116,7 +2116,7 @@
                 <a:ea typeface="Meiryo" pitchFamily="34" charset="-122"/>
                 <a:cs typeface="Meiryo" pitchFamily="34" charset="-120"/>
               </a:rPr>
-              <a:t>PoC 設計レビュー  /  2026-05</a:t>
+              <a:t>実装レビュー  /  2026-05</a:t>
             </a:r>
             <a:endParaRPr lang="en-US" sz="1100" dirty="0"/>
           </a:p>
@@ -2280,7 +2280,7 @@
               <a:buNone/>
             </a:pPr>
             <a:r>
-              <a:rPr lang="en-US" sz="1300" i="1" dirty="0">
+              <a:rPr lang="en-US" sz="1200" i="1" dirty="0">
                 <a:solidFill>
                   <a:srgbClr val="888888"/>
                 </a:solidFill>
@@ -2288,9 +2288,9 @@
                 <a:ea typeface="Meiryo" pitchFamily="34" charset="-122"/>
                 <a:cs typeface="Meiryo" pitchFamily="34" charset="-120"/>
               </a:rPr>
-              <a:t>3 系統の入力 → 単一の Markdown ストア → Astro でレンダリング</a:t>
-            </a:r>
-            <a:endParaRPr lang="en-US" sz="1300" dirty="0"/>
+              <a:t>3 系統の入力 → 一次データ → Astro でレンダリング</a:t>
+            </a:r>
+            <a:endParaRPr lang="en-US" sz="1200" dirty="0"/>
           </a:p>
         </p:txBody>
       </p:sp>
@@ -2346,34 +2346,34 @@
               <a:buNone/>
             </a:pPr>
             <a:r>
-              <a:rPr lang="en-US" sz="1100" dirty="0">
-                <a:solidFill>
-                  <a:srgbClr val="333333"/>
-                </a:solidFill>
-                <a:latin typeface="Meiryo" pitchFamily="34" charset="0"/>
-                <a:ea typeface="Meiryo" pitchFamily="34" charset="-122"/>
-                <a:cs typeface="Meiryo" pitchFamily="34" charset="-120"/>
-              </a:rPr>
-              <a:t>Notion DB</a:t>
-            </a:r>
-            <a:endParaRPr lang="en-US" sz="1100" dirty="0"/>
+              <a:rPr lang="en-US" sz="1000" dirty="0">
+                <a:solidFill>
+                  <a:srgbClr val="333333"/>
+                </a:solidFill>
+                <a:latin typeface="Meiryo" pitchFamily="34" charset="0"/>
+                <a:ea typeface="Meiryo" pitchFamily="34" charset="-122"/>
+                <a:cs typeface="Meiryo" pitchFamily="34" charset="-120"/>
+              </a:rPr>
+              <a:t>Markdown 編集（手動）</a:t>
+            </a:r>
+            <a:endParaRPr lang="en-US" sz="1000" dirty="0"/>
           </a:p>
           <a:p>
             <a:pPr algn="ctr" indent="0" marL="0">
               <a:buNone/>
             </a:pPr>
             <a:r>
-              <a:rPr lang="en-US" sz="1100" dirty="0">
-                <a:solidFill>
-                  <a:srgbClr val="333333"/>
-                </a:solidFill>
-                <a:latin typeface="Meiryo" pitchFamily="34" charset="0"/>
-                <a:ea typeface="Meiryo" pitchFamily="34" charset="-122"/>
-                <a:cs typeface="Meiryo" pitchFamily="34" charset="-120"/>
-              </a:rPr>
-              <a:t>(編集者が日常的に追加)</a:t>
-            </a:r>
-            <a:endParaRPr lang="en-US" sz="1100" dirty="0"/>
+              <a:rPr lang="en-US" sz="1000" dirty="0">
+                <a:solidFill>
+                  <a:srgbClr val="333333"/>
+                </a:solidFill>
+                <a:latin typeface="Meiryo" pitchFamily="34" charset="0"/>
+                <a:ea typeface="Meiryo" pitchFamily="34" charset="-122"/>
+                <a:cs typeface="Meiryo" pitchFamily="34" charset="-120"/>
+              </a:rPr>
+              <a:t>papers / labs / events</a:t>
+            </a:r>
+            <a:endParaRPr lang="en-US" sz="1000" dirty="0"/>
           </a:p>
         </p:txBody>
       </p:sp>
@@ -2427,7 +2427,7 @@
               <a:buNone/>
             </a:pPr>
             <a:r>
-              <a:rPr lang="en-US" sz="1000" b="1" dirty="0">
+              <a:rPr lang="en-US" sz="900" b="1" dirty="0">
                 <a:solidFill>
                   <a:srgbClr val="FFFFFF"/>
                 </a:solidFill>
@@ -2435,16 +2435,16 @@
                 <a:ea typeface="Meiryo" pitchFamily="34" charset="-122"/>
                 <a:cs typeface="Meiryo" pitchFamily="34" charset="-120"/>
               </a:rPr>
-              <a:t>notion_sync.py</a:t>
-            </a:r>
-            <a:endParaRPr lang="en-US" sz="1000" dirty="0"/>
+              <a:t>Zod スキーマ検証</a:t>
+            </a:r>
+            <a:endParaRPr lang="en-US" sz="900" dirty="0"/>
           </a:p>
           <a:p>
             <a:pPr algn="ctr" indent="0" marL="0">
               <a:buNone/>
             </a:pPr>
             <a:r>
-              <a:rPr lang="en-US" sz="1000" b="1" dirty="0">
+              <a:rPr lang="en-US" sz="900" b="1" dirty="0">
                 <a:solidFill>
                   <a:srgbClr val="FFFFFF"/>
                 </a:solidFill>
@@ -2452,9 +2452,9 @@
                 <a:ea typeface="Meiryo" pitchFamily="34" charset="-122"/>
                 <a:cs typeface="Meiryo" pitchFamily="34" charset="-120"/>
               </a:rPr>
-              <a:t>(GitHub Actions cron)</a:t>
-            </a:r>
-            <a:endParaRPr lang="en-US" sz="1000" dirty="0"/>
+              <a:t>+ git commit</a:t>
+            </a:r>
+            <a:endParaRPr lang="en-US" sz="900" dirty="0"/>
           </a:p>
         </p:txBody>
       </p:sp>
@@ -2479,7 +2479,7 @@
           </a:solidFill>
           <a:ln w="19050">
             <a:solidFill>
-              <a:srgbClr val="888888"/>
+              <a:srgbClr val="C0392B"/>
             </a:solidFill>
             <a:prstDash val="solid"/>
           </a:ln>
@@ -2510,34 +2510,34 @@
               <a:buNone/>
             </a:pPr>
             <a:r>
-              <a:rPr lang="en-US" sz="1100" dirty="0">
-                <a:solidFill>
-                  <a:srgbClr val="333333"/>
-                </a:solidFill>
-                <a:latin typeface="Meiryo" pitchFamily="34" charset="0"/>
-                <a:ea typeface="Meiryo" pitchFamily="34" charset="-122"/>
-                <a:cs typeface="Meiryo" pitchFamily="34" charset="-120"/>
-              </a:rPr>
-              <a:t>arXiv API</a:t>
-            </a:r>
-            <a:endParaRPr lang="en-US" sz="1100" dirty="0"/>
+              <a:rPr lang="en-US" sz="1000" dirty="0">
+                <a:solidFill>
+                  <a:srgbClr val="333333"/>
+                </a:solidFill>
+                <a:latin typeface="Meiryo" pitchFamily="34" charset="0"/>
+                <a:ea typeface="Meiryo" pitchFamily="34" charset="-122"/>
+                <a:cs typeface="Meiryo" pitchFamily="34" charset="-120"/>
+              </a:rPr>
+              <a:t>YouTube Data API v3</a:t>
+            </a:r>
+            <a:endParaRPr lang="en-US" sz="1000" dirty="0"/>
           </a:p>
           <a:p>
             <a:pPr algn="ctr" indent="0" marL="0">
               <a:buNone/>
             </a:pPr>
             <a:r>
-              <a:rPr lang="en-US" sz="1100" dirty="0">
-                <a:solidFill>
-                  <a:srgbClr val="333333"/>
-                </a:solidFill>
-                <a:latin typeface="Meiryo" pitchFamily="34" charset="0"/>
-                <a:ea typeface="Meiryo" pitchFamily="34" charset="-122"/>
-                <a:cs typeface="Meiryo" pitchFamily="34" charset="-120"/>
-              </a:rPr>
-              <a:t>(自動キャプチャ)</a:t>
-            </a:r>
-            <a:endParaRPr lang="en-US" sz="1100" dirty="0"/>
+              <a:rPr lang="en-US" sz="1000" dirty="0">
+                <a:solidFill>
+                  <a:srgbClr val="333333"/>
+                </a:solidFill>
+                <a:latin typeface="Meiryo" pitchFamily="34" charset="0"/>
+                <a:ea typeface="Meiryo" pitchFamily="34" charset="-122"/>
+                <a:cs typeface="Meiryo" pitchFamily="34" charset="-120"/>
+              </a:rPr>
+              <a:t>3 キーワード検索</a:t>
+            </a:r>
+            <a:endParaRPr lang="en-US" sz="1000" dirty="0"/>
           </a:p>
         </p:txBody>
       </p:sp>
@@ -2556,11 +2556,11 @@
             <a:avLst/>
           </a:prstGeom>
           <a:solidFill>
-            <a:srgbClr val="888888"/>
+            <a:srgbClr val="C0392B"/>
           </a:solidFill>
           <a:ln w="12700">
             <a:solidFill>
-              <a:srgbClr val="888888"/>
+              <a:srgbClr val="C0392B"/>
             </a:solidFill>
             <a:prstDash val="solid"/>
           </a:ln>
@@ -2591,7 +2591,7 @@
               <a:buNone/>
             </a:pPr>
             <a:r>
-              <a:rPr lang="en-US" sz="1000" b="1" dirty="0">
+              <a:rPr lang="en-US" sz="900" b="1" dirty="0">
                 <a:solidFill>
                   <a:srgbClr val="FFFFFF"/>
                 </a:solidFill>
@@ -2599,16 +2599,16 @@
                 <a:ea typeface="Meiryo" pitchFamily="34" charset="-122"/>
                 <a:cs typeface="Meiryo" pitchFamily="34" charset="-120"/>
               </a:rPr>
-              <a:t>arxiv_monitor.py</a:t>
-            </a:r>
-            <a:endParaRPr lang="en-US" sz="1000" dirty="0"/>
+              <a:t>fetch-youtube.mjs</a:t>
+            </a:r>
+            <a:endParaRPr lang="en-US" sz="900" dirty="0"/>
           </a:p>
           <a:p>
             <a:pPr algn="ctr" indent="0" marL="0">
               <a:buNone/>
             </a:pPr>
             <a:r>
-              <a:rPr lang="en-US" sz="1000" b="1" dirty="0">
+              <a:rPr lang="en-US" sz="900" b="1" dirty="0">
                 <a:solidFill>
                   <a:srgbClr val="FFFFFF"/>
                 </a:solidFill>
@@ -2616,9 +2616,9 @@
                 <a:ea typeface="Meiryo" pitchFamily="34" charset="-122"/>
                 <a:cs typeface="Meiryo" pitchFamily="34" charset="-120"/>
               </a:rPr>
-              <a:t>→ Issue 起票 → 人レビュー</a:t>
-            </a:r>
-            <a:endParaRPr lang="en-US" sz="1000" dirty="0"/>
+              <a:t>launchd 1 時間毎</a:t>
+            </a:r>
+            <a:endParaRPr lang="en-US" sz="900" dirty="0"/>
           </a:p>
         </p:txBody>
       </p:sp>
@@ -2643,7 +2643,7 @@
           </a:solidFill>
           <a:ln w="19050">
             <a:solidFill>
-              <a:srgbClr val="888888"/>
+              <a:srgbClr val="C0392B"/>
             </a:solidFill>
             <a:prstDash val="solid"/>
           </a:ln>
@@ -2674,34 +2674,34 @@
               <a:buNone/>
             </a:pPr>
             <a:r>
-              <a:rPr lang="en-US" sz="1100" dirty="0">
-                <a:solidFill>
-                  <a:srgbClr val="333333"/>
-                </a:solidFill>
-                <a:latin typeface="Meiryo" pitchFamily="34" charset="0"/>
-                <a:ea typeface="Meiryo" pitchFamily="34" charset="-122"/>
-                <a:cs typeface="Meiryo" pitchFamily="34" charset="-120"/>
-              </a:rPr>
-              <a:t>Issue Form</a:t>
-            </a:r>
-            <a:endParaRPr lang="en-US" sz="1100" dirty="0"/>
+              <a:rPr lang="en-US" sz="1000" dirty="0">
+                <a:solidFill>
+                  <a:srgbClr val="333333"/>
+                </a:solidFill>
+                <a:latin typeface="Meiryo" pitchFamily="34" charset="0"/>
+                <a:ea typeface="Meiryo" pitchFamily="34" charset="-122"/>
+                <a:cs typeface="Meiryo" pitchFamily="34" charset="-120"/>
+              </a:rPr>
+              <a:t>note.com RSS</a:t>
+            </a:r>
+            <a:endParaRPr lang="en-US" sz="1000" dirty="0"/>
           </a:p>
           <a:p>
             <a:pPr algn="ctr" indent="0" marL="0">
               <a:buNone/>
             </a:pPr>
             <a:r>
-              <a:rPr lang="en-US" sz="1100" dirty="0">
-                <a:solidFill>
-                  <a:srgbClr val="333333"/>
-                </a:solidFill>
-                <a:latin typeface="Meiryo" pitchFamily="34" charset="0"/>
-                <a:ea typeface="Meiryo" pitchFamily="34" charset="-122"/>
-                <a:cs typeface="Meiryo" pitchFamily="34" charset="-120"/>
-              </a:rPr>
-              <a:t>(外部貢献者)</a:t>
-            </a:r>
-            <a:endParaRPr lang="en-US" sz="1100" dirty="0"/>
+              <a:rPr lang="en-US" sz="1000" dirty="0">
+                <a:solidFill>
+                  <a:srgbClr val="333333"/>
+                </a:solidFill>
+                <a:latin typeface="Meiryo" pitchFamily="34" charset="0"/>
+                <a:ea typeface="Meiryo" pitchFamily="34" charset="-122"/>
+                <a:cs typeface="Meiryo" pitchFamily="34" charset="-120"/>
+              </a:rPr>
+              <a:t>@symbol_emerg</a:t>
+            </a:r>
+            <a:endParaRPr lang="en-US" sz="1000" dirty="0"/>
           </a:p>
         </p:txBody>
       </p:sp>
@@ -2720,11 +2720,11 @@
             <a:avLst/>
           </a:prstGeom>
           <a:solidFill>
-            <a:srgbClr val="888888"/>
+            <a:srgbClr val="C0392B"/>
           </a:solidFill>
           <a:ln w="12700">
             <a:solidFill>
-              <a:srgbClr val="888888"/>
+              <a:srgbClr val="C0392B"/>
             </a:solidFill>
             <a:prstDash val="solid"/>
           </a:ln>
@@ -2755,7 +2755,7 @@
               <a:buNone/>
             </a:pPr>
             <a:r>
-              <a:rPr lang="en-US" sz="1000" b="1" dirty="0">
+              <a:rPr lang="en-US" sz="900" b="1" dirty="0">
                 <a:solidFill>
                   <a:srgbClr val="FFFFFF"/>
                 </a:solidFill>
@@ -2763,16 +2763,16 @@
                 <a:ea typeface="Meiryo" pitchFamily="34" charset="-122"/>
                 <a:cs typeface="Meiryo" pitchFamily="34" charset="-120"/>
               </a:rPr>
-              <a:t>Auto PR</a:t>
-            </a:r>
-            <a:endParaRPr lang="en-US" sz="1000" dirty="0"/>
+              <a:t>fetch-note.mjs</a:t>
+            </a:r>
+            <a:endParaRPr lang="en-US" sz="900" dirty="0"/>
           </a:p>
           <a:p>
             <a:pPr algn="ctr" indent="0" marL="0">
               <a:buNone/>
             </a:pPr>
             <a:r>
-              <a:rPr lang="en-US" sz="1000" b="1" dirty="0">
+              <a:rPr lang="en-US" sz="900" b="1" dirty="0">
                 <a:solidFill>
                   <a:srgbClr val="FFFFFF"/>
                 </a:solidFill>
@@ -2780,9 +2780,9 @@
                 <a:ea typeface="Meiryo" pitchFamily="34" charset="-122"/>
                 <a:cs typeface="Meiryo" pitchFamily="34" charset="-120"/>
               </a:rPr>
-              <a:t>→ レビュー → マージ</a:t>
-            </a:r>
-            <a:endParaRPr lang="en-US" sz="1000" dirty="0"/>
+              <a:t>launchd 1 時間毎</a:t>
+            </a:r>
+            <a:endParaRPr lang="en-US" sz="900" dirty="0"/>
           </a:p>
         </p:txBody>
       </p:sp>
@@ -2910,9 +2910,27 @@
               <a:buNone/>
             </a:pPr>
             <a:r>
-              <a:rPr lang="en-US" sz="1400" b="1" dirty="0">
+              <a:rPr lang="en-US" sz="1300" b="1" dirty="0">
                 <a:solidFill>
                   <a:srgbClr val="FFFFFF"/>
+                </a:solidFill>
+                <a:latin typeface="Meiryo" pitchFamily="34" charset="0"/>
+                <a:ea typeface="Meiryo" pitchFamily="34" charset="-122"/>
+                <a:cs typeface="Meiryo" pitchFamily="34" charset="-120"/>
+              </a:rPr>
+              <a:t>一次データ
+</a:t>
+            </a:r>
+            <a:endParaRPr lang="en-US" sz="1300" dirty="0"/>
+          </a:p>
+          <a:p>
+            <a:pPr algn="ctr" indent="0" marL="0">
+              <a:buNone/>
+            </a:pPr>
+            <a:r>
+              <a:rPr lang="en-US" sz="1000" i="1" dirty="0">
+                <a:solidFill>
+                  <a:srgbClr val="E8EEF7"/>
                 </a:solidFill>
                 <a:latin typeface="Meiryo" pitchFamily="34" charset="0"/>
                 <a:ea typeface="Meiryo" pitchFamily="34" charset="-122"/>
@@ -2921,7 +2939,7 @@
               <a:t>content/*.md
 </a:t>
             </a:r>
-            <a:endParaRPr lang="en-US" sz="1400" dirty="0"/>
+            <a:endParaRPr lang="en-US" sz="1300" dirty="0"/>
           </a:p>
           <a:p>
             <a:pPr algn="ctr" indent="0" marL="0">
@@ -2936,17 +2954,17 @@
                 <a:ea typeface="Meiryo" pitchFamily="34" charset="-122"/>
                 <a:cs typeface="Meiryo" pitchFamily="34" charset="-120"/>
               </a:rPr>
-              <a:t>(一次データ)
+              <a:t>src/data/*.json
 </a:t>
             </a:r>
-            <a:endParaRPr lang="en-US" sz="1400" dirty="0"/>
+            <a:endParaRPr lang="en-US" sz="1300" dirty="0"/>
           </a:p>
           <a:p>
             <a:pPr algn="ctr" indent="0" marL="0">
               <a:buNone/>
             </a:pPr>
             <a:r>
-              <a:rPr lang="en-US" sz="1100" dirty="0">
+              <a:rPr lang="en-US" sz="1000" dirty="0">
                 <a:solidFill>
                   <a:srgbClr val="E8EEF7"/>
                 </a:solidFill>
@@ -2956,14 +2974,14 @@
               </a:rPr>
               <a:t>→ Astro build</a:t>
             </a:r>
-            <a:endParaRPr lang="en-US" sz="1400" dirty="0"/>
+            <a:endParaRPr lang="en-US" sz="1300" dirty="0"/>
           </a:p>
           <a:p>
             <a:pPr algn="ctr" indent="0" marL="0">
               <a:buNone/>
             </a:pPr>
             <a:r>
-              <a:rPr lang="en-US" sz="1100" dirty="0">
+              <a:rPr lang="en-US" sz="1000" dirty="0">
                 <a:solidFill>
                   <a:srgbClr val="E8EEF7"/>
                 </a:solidFill>
@@ -2971,9 +2989,9 @@
                 <a:ea typeface="Meiryo" pitchFamily="34" charset="-122"/>
                 <a:cs typeface="Meiryo" pitchFamily="34" charset="-120"/>
               </a:rPr>
-              <a:t>→ Vercel deploy</a:t>
-            </a:r>
-            <a:endParaRPr lang="en-US" sz="1400" dirty="0"/>
+              <a:t>→ dist/</a:t>
+            </a:r>
+            <a:endParaRPr lang="en-US" sz="1300" dirty="0"/>
           </a:p>
         </p:txBody>
       </p:sp>
@@ -3074,7 +3092,7 @@
               <a:buNone/>
             </a:pPr>
             <a:r>
-              <a:rPr lang="en-US" sz="1100" i="1" dirty="0">
+              <a:rPr lang="en-US" sz="1000" i="1" dirty="0">
                 <a:solidFill>
                   <a:srgbClr val="2B579A"/>
                 </a:solidFill>
@@ -3082,9 +3100,9 @@
                 <a:ea typeface="Meiryo" pitchFamily="34" charset="-122"/>
                 <a:cs typeface="Meiryo" pitchFamily="34" charset="-120"/>
               </a:rPr>
-              <a:t>Notion を主軸とした人手投入。arxiv 自動発見と Issue Form は補助系統。</a:t>
-            </a:r>
-            <a:endParaRPr lang="en-US" sz="1100" dirty="0"/>
+              <a:t>手動編集（青）と自動取り込み（赤）を分離し、運用負荷と更新頻度のバランスを取る。</a:t>
+            </a:r>
+            <a:endParaRPr lang="en-US" sz="1000" dirty="0"/>
           </a:p>
         </p:txBody>
       </p:sp>
@@ -3246,10 +3264,10 @@
               <a:tblGrid>
                 <a:gridCol w="2286000"/>
                 <a:gridCol w="1463040"/>
-                <a:gridCol w="2194560"/>
-                <a:gridCol w="2103120"/>
+                <a:gridCol w="2468880"/>
+                <a:gridCol w="1828800"/>
               </a:tblGrid>
-              <a:tr h="365760">
+              <a:tr h="329184">
                 <a:tc>
                   <a:txBody>
                     <a:bodyPr/>
@@ -3267,7 +3285,7 @@
                           <a:ea typeface="Meiryo" pitchFamily="34" charset="-122"/>
                           <a:cs typeface="Meiryo" pitchFamily="34" charset="-120"/>
                         </a:rPr>
-                        <a:t>スクリプト</a:t>
+                        <a:t>スクリプト / 操作</a:t>
                       </a:r>
                       <a:endParaRPr lang="en-US" sz="1100" dirty="0">
                         <a:latin typeface="Meiryo" charset="0"/>
@@ -3471,7 +3489,7 @@
                           <a:ea typeface="Meiryo" pitchFamily="34" charset="-122"/>
                           <a:cs typeface="Meiryo" pitchFamily="34" charset="-120"/>
                         </a:rPr>
-                        <a:t>承認</a:t>
+                        <a:t>状態</a:t>
                       </a:r>
                       <a:endParaRPr lang="en-US" sz="1100" dirty="0">
                         <a:latin typeface="Meiryo" charset="0"/>
@@ -3523,7 +3541,7 @@
                   </a:tcPr>
                 </a:tc>
               </a:tr>
-              <a:tr h="365760">
+              <a:tr h="329184">
                 <a:tc>
                   <a:txBody>
                     <a:bodyPr/>
@@ -3533,7 +3551,7 @@
                         <a:buNone/>
                       </a:pPr>
                       <a:r>
-                        <a:rPr lang="en-US" sz="1100" dirty="0">
+                        <a:rPr lang="en-US" sz="1000" dirty="0">
                           <a:solidFill>
                             <a:srgbClr val="333333"/>
                           </a:solidFill>
@@ -3541,9 +3559,9 @@
                           <a:ea typeface="Menlo" pitchFamily="34" charset="-122"/>
                           <a:cs typeface="Menlo" pitchFamily="34" charset="-120"/>
                         </a:rPr>
-                        <a:t>arxiv_monitor.py</a:t>
+                        <a:t>fetch-youtube.mjs</a:t>
                       </a:r>
-                      <a:endParaRPr lang="en-US" sz="1100" dirty="0">
+                      <a:endParaRPr lang="en-US" sz="1000" dirty="0">
                         <a:latin typeface="Menlo" charset="0"/>
                         <a:ea typeface="Menlo" charset="0"/>
                         <a:cs typeface="Menlo" charset="0"/>
@@ -3601,20 +3619,20 @@
                         <a:buNone/>
                       </a:pPr>
                       <a:r>
-                        <a:rPr lang="en-US" sz="1100" dirty="0">
+                        <a:rPr lang="en-US" sz="1000" dirty="0">
                           <a:solidFill>
                             <a:srgbClr val="333333"/>
                           </a:solidFill>
-                          <a:latin typeface="Menlo" pitchFamily="34" charset="0"/>
-                          <a:ea typeface="Menlo" pitchFamily="34" charset="-122"/>
-                          <a:cs typeface="Menlo" pitchFamily="34" charset="-120"/>
+                          <a:latin typeface="Meiryo" pitchFamily="34" charset="0"/>
+                          <a:ea typeface="Meiryo" pitchFamily="34" charset="-122"/>
+                          <a:cs typeface="Meiryo" pitchFamily="34" charset="-120"/>
                         </a:rPr>
-                        <a:t>日次 cron</a:t>
+                        <a:t>1 時間 (launchd)</a:t>
                       </a:r>
-                      <a:endParaRPr lang="en-US" sz="1100" dirty="0">
-                        <a:latin typeface="Menlo" charset="0"/>
-                        <a:ea typeface="Menlo" charset="0"/>
-                        <a:cs typeface="Menlo" charset="0"/>
+                      <a:endParaRPr lang="en-US" sz="1000" dirty="0">
+                        <a:latin typeface="Meiryo" charset="0"/>
+                        <a:ea typeface="Meiryo" charset="0"/>
+                        <a:cs typeface="Meiryo" charset="0"/>
                       </a:endParaRPr>
                     </a:p>
                   </a:txBody>
@@ -3669,20 +3687,20 @@
                         <a:buNone/>
                       </a:pPr>
                       <a:r>
-                        <a:rPr lang="en-US" sz="1100" dirty="0">
+                        <a:rPr lang="en-US" sz="1000" dirty="0">
                           <a:solidFill>
                             <a:srgbClr val="333333"/>
                           </a:solidFill>
-                          <a:latin typeface="Menlo" pitchFamily="34" charset="0"/>
-                          <a:ea typeface="Menlo" pitchFamily="34" charset="-122"/>
-                          <a:cs typeface="Menlo" pitchFamily="34" charset="-120"/>
+                          <a:latin typeface="Meiryo" pitchFamily="34" charset="0"/>
+                          <a:ea typeface="Meiryo" pitchFamily="34" charset="-122"/>
+                          <a:cs typeface="Meiryo" pitchFamily="34" charset="-120"/>
                         </a:rPr>
-                        <a:t>GitHub Issue</a:t>
+                        <a:t>src/data/videos.json</a:t>
                       </a:r>
-                      <a:endParaRPr lang="en-US" sz="1100" dirty="0">
-                        <a:latin typeface="Menlo" charset="0"/>
-                        <a:ea typeface="Menlo" charset="0"/>
-                        <a:cs typeface="Menlo" charset="0"/>
+                      <a:endParaRPr lang="en-US" sz="1000" dirty="0">
+                        <a:latin typeface="Meiryo" charset="0"/>
+                        <a:ea typeface="Meiryo" charset="0"/>
+                        <a:cs typeface="Meiryo" charset="0"/>
                       </a:endParaRPr>
                     </a:p>
                   </a:txBody>
@@ -3737,20 +3755,20 @@
                         <a:buNone/>
                       </a:pPr>
                       <a:r>
-                        <a:rPr lang="en-US" sz="1100" dirty="0">
+                        <a:rPr lang="en-US" sz="1000" dirty="0">
                           <a:solidFill>
                             <a:srgbClr val="333333"/>
                           </a:solidFill>
-                          <a:latin typeface="Menlo" pitchFamily="34" charset="0"/>
-                          <a:ea typeface="Menlo" pitchFamily="34" charset="-122"/>
-                          <a:cs typeface="Menlo" pitchFamily="34" charset="-120"/>
+                          <a:latin typeface="Meiryo" pitchFamily="34" charset="0"/>
+                          <a:ea typeface="Meiryo" pitchFamily="34" charset="-122"/>
+                          <a:cs typeface="Meiryo" pitchFamily="34" charset="-120"/>
                         </a:rPr>
-                        <a:t>人レビュー → 採否</a:t>
+                        <a:t>✓ 稼働中</a:t>
                       </a:r>
-                      <a:endParaRPr lang="en-US" sz="1100" dirty="0">
-                        <a:latin typeface="Menlo" charset="0"/>
-                        <a:ea typeface="Menlo" charset="0"/>
-                        <a:cs typeface="Menlo" charset="0"/>
+                      <a:endParaRPr lang="en-US" sz="1000" dirty="0">
+                        <a:latin typeface="Meiryo" charset="0"/>
+                        <a:ea typeface="Meiryo" charset="0"/>
+                        <a:cs typeface="Meiryo" charset="0"/>
                       </a:endParaRPr>
                     </a:p>
                   </a:txBody>
@@ -3797,7 +3815,7 @@
                   </a:tcPr>
                 </a:tc>
               </a:tr>
-              <a:tr h="365760">
+              <a:tr h="329184">
                 <a:tc>
                   <a:txBody>
                     <a:bodyPr/>
@@ -3807,20 +3825,20 @@
                         <a:buNone/>
                       </a:pPr>
                       <a:r>
-                        <a:rPr lang="en-US" sz="1100" dirty="0">
+                        <a:rPr lang="en-US" sz="1000" dirty="0">
                           <a:solidFill>
                             <a:srgbClr val="333333"/>
                           </a:solidFill>
-                          <a:latin typeface="Meiryo" pitchFamily="34" charset="0"/>
-                          <a:ea typeface="Meiryo" pitchFamily="34" charset="-122"/>
-                          <a:cs typeface="Meiryo" pitchFamily="34" charset="-120"/>
+                          <a:latin typeface="Menlo" pitchFamily="34" charset="0"/>
+                          <a:ea typeface="Menlo" pitchFamily="34" charset="-122"/>
+                          <a:cs typeface="Menlo" pitchFamily="34" charset="-120"/>
                         </a:rPr>
-                        <a:t>link_checker.py</a:t>
+                        <a:t>fetch-note.mjs</a:t>
                       </a:r>
-                      <a:endParaRPr lang="en-US" sz="1100" dirty="0">
-                        <a:latin typeface="Meiryo" charset="0"/>
-                        <a:ea typeface="Meiryo" charset="0"/>
-                        <a:cs typeface="Meiryo" charset="0"/>
+                      <a:endParaRPr lang="en-US" sz="1000" dirty="0">
+                        <a:latin typeface="Menlo" charset="0"/>
+                        <a:ea typeface="Menlo" charset="0"/>
+                        <a:cs typeface="Menlo" charset="0"/>
                       </a:endParaRPr>
                     </a:p>
                   </a:txBody>
@@ -3875,7 +3893,7 @@
                         <a:buNone/>
                       </a:pPr>
                       <a:r>
-                        <a:rPr lang="en-US" sz="1100" dirty="0">
+                        <a:rPr lang="en-US" sz="1000" dirty="0">
                           <a:solidFill>
                             <a:srgbClr val="333333"/>
                           </a:solidFill>
@@ -3883,9 +3901,9 @@
                           <a:ea typeface="Meiryo" pitchFamily="34" charset="-122"/>
                           <a:cs typeface="Meiryo" pitchFamily="34" charset="-120"/>
                         </a:rPr>
-                        <a:t>週次 cron</a:t>
+                        <a:t>1 時間 (launchd)</a:t>
                       </a:r>
-                      <a:endParaRPr lang="en-US" sz="1100" dirty="0">
+                      <a:endParaRPr lang="en-US" sz="1000" dirty="0">
                         <a:latin typeface="Meiryo" charset="0"/>
                         <a:ea typeface="Meiryo" charset="0"/>
                         <a:cs typeface="Meiryo" charset="0"/>
@@ -3943,7 +3961,7 @@
                         <a:buNone/>
                       </a:pPr>
                       <a:r>
-                        <a:rPr lang="en-US" sz="1100" dirty="0">
+                        <a:rPr lang="en-US" sz="1000" dirty="0">
                           <a:solidFill>
                             <a:srgbClr val="333333"/>
                           </a:solidFill>
@@ -3951,9 +3969,9 @@
                           <a:ea typeface="Meiryo" pitchFamily="34" charset="-122"/>
                           <a:cs typeface="Meiryo" pitchFamily="34" charset="-120"/>
                         </a:rPr>
-                        <a:t>GitHub Issue</a:t>
+                        <a:t>src/data/notes.json</a:t>
                       </a:r>
-                      <a:endParaRPr lang="en-US" sz="1100" dirty="0">
+                      <a:endParaRPr lang="en-US" sz="1000" dirty="0">
                         <a:latin typeface="Meiryo" charset="0"/>
                         <a:ea typeface="Meiryo" charset="0"/>
                         <a:cs typeface="Meiryo" charset="0"/>
@@ -4011,7 +4029,7 @@
                         <a:buNone/>
                       </a:pPr>
                       <a:r>
-                        <a:rPr lang="en-US" sz="1100" dirty="0">
+                        <a:rPr lang="en-US" sz="1000" dirty="0">
                           <a:solidFill>
                             <a:srgbClr val="333333"/>
                           </a:solidFill>
@@ -4019,9 +4037,9 @@
                           <a:ea typeface="Meiryo" pitchFamily="34" charset="-122"/>
                           <a:cs typeface="Meiryo" pitchFamily="34" charset="-120"/>
                         </a:rPr>
-                        <a:t>メンテナで対応</a:t>
+                        <a:t>✓ 稼働中</a:t>
                       </a:r>
-                      <a:endParaRPr lang="en-US" sz="1100" dirty="0">
+                      <a:endParaRPr lang="en-US" sz="1000" dirty="0">
                         <a:latin typeface="Meiryo" charset="0"/>
                         <a:ea typeface="Meiryo" charset="0"/>
                         <a:cs typeface="Meiryo" charset="0"/>
@@ -4071,7 +4089,7 @@
                   </a:tcPr>
                 </a:tc>
               </a:tr>
-              <a:tr h="365760">
+              <a:tr h="329184">
                 <a:tc>
                   <a:txBody>
                     <a:bodyPr/>
@@ -4081,20 +4099,20 @@
                         <a:buNone/>
                       </a:pPr>
                       <a:r>
-                        <a:rPr lang="en-US" sz="1100" dirty="0">
+                        <a:rPr lang="en-US" sz="1000" dirty="0">
                           <a:solidFill>
                             <a:srgbClr val="333333"/>
                           </a:solidFill>
-                          <a:latin typeface="Meiryo" pitchFamily="34" charset="0"/>
-                          <a:ea typeface="Meiryo" pitchFamily="34" charset="-122"/>
-                          <a:cs typeface="Meiryo" pitchFamily="34" charset="-120"/>
+                          <a:latin typeface="Menlo" pitchFamily="34" charset="0"/>
+                          <a:ea typeface="Menlo" pitchFamily="34" charset="-122"/>
+                          <a:cs typeface="Menlo" pitchFamily="34" charset="-120"/>
                         </a:rPr>
-                        <a:t>newsletter_draft.py</a:t>
+                        <a:t>update:content</a:t>
                       </a:r>
-                      <a:endParaRPr lang="en-US" sz="1100" dirty="0">
-                        <a:latin typeface="Meiryo" charset="0"/>
-                        <a:ea typeface="Meiryo" charset="0"/>
-                        <a:cs typeface="Meiryo" charset="0"/>
+                      <a:endParaRPr lang="en-US" sz="1000" dirty="0">
+                        <a:latin typeface="Menlo" charset="0"/>
+                        <a:ea typeface="Menlo" charset="0"/>
+                        <a:cs typeface="Menlo" charset="0"/>
                       </a:endParaRPr>
                     </a:p>
                   </a:txBody>
@@ -4149,7 +4167,7 @@
                         <a:buNone/>
                       </a:pPr>
                       <a:r>
-                        <a:rPr lang="en-US" sz="1100" dirty="0">
+                        <a:rPr lang="en-US" sz="1000" dirty="0">
                           <a:solidFill>
                             <a:srgbClr val="333333"/>
                           </a:solidFill>
@@ -4157,9 +4175,9 @@
                           <a:ea typeface="Meiryo" pitchFamily="34" charset="-122"/>
                           <a:cs typeface="Meiryo" pitchFamily="34" charset="-120"/>
                         </a:rPr>
-                        <a:t>月次 manual</a:t>
+                        <a:t>1 時間 (launchd)</a:t>
                       </a:r>
-                      <a:endParaRPr lang="en-US" sz="1100" dirty="0">
+                      <a:endParaRPr lang="en-US" sz="1000" dirty="0">
                         <a:latin typeface="Meiryo" charset="0"/>
                         <a:ea typeface="Meiryo" charset="0"/>
                         <a:cs typeface="Meiryo" charset="0"/>
@@ -4217,7 +4235,7 @@
                         <a:buNone/>
                       </a:pPr>
                       <a:r>
-                        <a:rPr lang="en-US" sz="1100" dirty="0">
+                        <a:rPr lang="en-US" sz="1000" dirty="0">
                           <a:solidFill>
                             <a:srgbClr val="333333"/>
                           </a:solidFill>
@@ -4225,9 +4243,9 @@
                           <a:ea typeface="Meiryo" pitchFamily="34" charset="-122"/>
                           <a:cs typeface="Meiryo" pitchFamily="34" charset="-120"/>
                         </a:rPr>
-                        <a:t>drafts/newsletter/*.md</a:t>
+                        <a:t>dist/ 再ビルド</a:t>
                       </a:r>
-                      <a:endParaRPr lang="en-US" sz="1100" dirty="0">
+                      <a:endParaRPr lang="en-US" sz="1000" dirty="0">
                         <a:latin typeface="Meiryo" charset="0"/>
                         <a:ea typeface="Meiryo" charset="0"/>
                         <a:cs typeface="Meiryo" charset="0"/>
@@ -4285,7 +4303,7 @@
                         <a:buNone/>
                       </a:pPr>
                       <a:r>
-                        <a:rPr lang="en-US" sz="1100" dirty="0">
+                        <a:rPr lang="en-US" sz="1000" dirty="0">
                           <a:solidFill>
                             <a:srgbClr val="333333"/>
                           </a:solidFill>
@@ -4293,9 +4311,9 @@
                           <a:ea typeface="Meiryo" pitchFamily="34" charset="-122"/>
                           <a:cs typeface="Meiryo" pitchFamily="34" charset="-120"/>
                         </a:rPr>
-                        <a:t>編集者が編集後配信</a:t>
+                        <a:t>✓ 稼働中</a:t>
                       </a:r>
-                      <a:endParaRPr lang="en-US" sz="1100" dirty="0">
+                      <a:endParaRPr lang="en-US" sz="1000" dirty="0">
                         <a:latin typeface="Meiryo" charset="0"/>
                         <a:ea typeface="Meiryo" charset="0"/>
                         <a:cs typeface="Meiryo" charset="0"/>
@@ -4345,7 +4363,7 @@
                   </a:tcPr>
                 </a:tc>
               </a:tr>
-              <a:tr h="365760">
+              <a:tr h="329184">
                 <a:tc>
                   <a:txBody>
                     <a:bodyPr/>
@@ -4355,20 +4373,20 @@
                         <a:buNone/>
                       </a:pPr>
                       <a:r>
-                        <a:rPr lang="en-US" sz="1100" dirty="0">
+                        <a:rPr lang="en-US" sz="1000" dirty="0">
                           <a:solidFill>
                             <a:srgbClr val="333333"/>
                           </a:solidFill>
-                          <a:latin typeface="Meiryo" pitchFamily="34" charset="0"/>
-                          <a:ea typeface="Meiryo" pitchFamily="34" charset="-122"/>
-                          <a:cs typeface="Meiryo" pitchFamily="34" charset="-120"/>
+                          <a:latin typeface="Menlo" pitchFamily="34" charset="0"/>
+                          <a:ea typeface="Menlo" pitchFamily="34" charset="-122"/>
+                          <a:cs typeface="Menlo" pitchFamily="34" charset="-120"/>
                         </a:rPr>
-                        <a:t>x_post.py</a:t>
+                        <a:t>Markdown 編集</a:t>
                       </a:r>
-                      <a:endParaRPr lang="en-US" sz="1100" dirty="0">
-                        <a:latin typeface="Meiryo" charset="0"/>
-                        <a:ea typeface="Meiryo" charset="0"/>
-                        <a:cs typeface="Meiryo" charset="0"/>
+                      <a:endParaRPr lang="en-US" sz="1000" dirty="0">
+                        <a:latin typeface="Menlo" charset="0"/>
+                        <a:ea typeface="Menlo" charset="0"/>
+                        <a:cs typeface="Menlo" charset="0"/>
                       </a:endParaRPr>
                     </a:p>
                   </a:txBody>
@@ -4423,7 +4441,7 @@
                         <a:buNone/>
                       </a:pPr>
                       <a:r>
-                        <a:rPr lang="en-US" sz="1100" dirty="0">
+                        <a:rPr lang="en-US" sz="1000" dirty="0">
                           <a:solidFill>
                             <a:srgbClr val="333333"/>
                           </a:solidFill>
@@ -4431,9 +4449,9 @@
                           <a:ea typeface="Meiryo" pitchFamily="34" charset="-122"/>
                           <a:cs typeface="Meiryo" pitchFamily="34" charset="-120"/>
                         </a:rPr>
-                        <a:t>週次 cron</a:t>
+                        <a:t>随時 (手動)</a:t>
                       </a:r>
-                      <a:endParaRPr lang="en-US" sz="1100" dirty="0">
+                      <a:endParaRPr lang="en-US" sz="1000" dirty="0">
                         <a:latin typeface="Meiryo" charset="0"/>
                         <a:ea typeface="Meiryo" charset="0"/>
                         <a:cs typeface="Meiryo" charset="0"/>
@@ -4491,7 +4509,7 @@
                         <a:buNone/>
                       </a:pPr>
                       <a:r>
-                        <a:rPr lang="en-US" sz="1100" dirty="0">
+                        <a:rPr lang="en-US" sz="1000" dirty="0">
                           <a:solidFill>
                             <a:srgbClr val="333333"/>
                           </a:solidFill>
@@ -4499,9 +4517,9 @@
                           <a:ea typeface="Meiryo" pitchFamily="34" charset="-122"/>
                           <a:cs typeface="Meiryo" pitchFamily="34" charset="-120"/>
                         </a:rPr>
-                        <a:t>草稿 + (承認後) X 投稿</a:t>
+                        <a:t>papers/labs/events/*.md</a:t>
                       </a:r>
-                      <a:endParaRPr lang="en-US" sz="1100" dirty="0">
+                      <a:endParaRPr lang="en-US" sz="1000" dirty="0">
                         <a:latin typeface="Meiryo" charset="0"/>
                         <a:ea typeface="Meiryo" charset="0"/>
                         <a:cs typeface="Meiryo" charset="0"/>
@@ -4559,7 +4577,7 @@
                         <a:buNone/>
                       </a:pPr>
                       <a:r>
-                        <a:rPr lang="en-US" sz="1100" dirty="0">
+                        <a:rPr lang="en-US" sz="1000" dirty="0">
                           <a:solidFill>
                             <a:srgbClr val="333333"/>
                           </a:solidFill>
@@ -4567,9 +4585,9 @@
                           <a:ea typeface="Meiryo" pitchFamily="34" charset="-122"/>
                           <a:cs typeface="Meiryo" pitchFamily="34" charset="-120"/>
                         </a:rPr>
-                        <a:t>Issue で人が ✓ → 投稿</a:t>
+                        <a:t>✓ 運用中</a:t>
                       </a:r>
-                      <a:endParaRPr lang="en-US" sz="1100" dirty="0">
+                      <a:endParaRPr lang="en-US" sz="1000" dirty="0">
                         <a:latin typeface="Meiryo" charset="0"/>
                         <a:ea typeface="Meiryo" charset="0"/>
                         <a:cs typeface="Meiryo" charset="0"/>
@@ -4619,7 +4637,7 @@
                   </a:tcPr>
                 </a:tc>
               </a:tr>
-              <a:tr h="365760">
+              <a:tr h="329184">
                 <a:tc>
                   <a:txBody>
                     <a:bodyPr/>
@@ -4629,20 +4647,20 @@
                         <a:buNone/>
                       </a:pPr>
                       <a:r>
-                        <a:rPr lang="en-US" sz="1100" dirty="0">
+                        <a:rPr lang="en-US" sz="1000" dirty="0">
                           <a:solidFill>
                             <a:srgbClr val="333333"/>
                           </a:solidFill>
-                          <a:latin typeface="Meiryo" pitchFamily="34" charset="0"/>
-                          <a:ea typeface="Meiryo" pitchFamily="34" charset="-122"/>
-                          <a:cs typeface="Meiryo" pitchFamily="34" charset="-120"/>
+                          <a:latin typeface="Menlo" pitchFamily="34" charset="0"/>
+                          <a:ea typeface="Menlo" pitchFamily="34" charset="-122"/>
+                          <a:cs typeface="Menlo" pitchFamily="34" charset="-120"/>
                         </a:rPr>
                         <a:t>notion_sync.py</a:t>
                       </a:r>
-                      <a:endParaRPr lang="en-US" sz="1100" dirty="0">
-                        <a:latin typeface="Meiryo" charset="0"/>
-                        <a:ea typeface="Meiryo" charset="0"/>
-                        <a:cs typeface="Meiryo" charset="0"/>
+                      <a:endParaRPr lang="en-US" sz="1000" dirty="0">
+                        <a:latin typeface="Menlo" charset="0"/>
+                        <a:ea typeface="Menlo" charset="0"/>
+                        <a:cs typeface="Menlo" charset="0"/>
                       </a:endParaRPr>
                     </a:p>
                   </a:txBody>
@@ -4697,7 +4715,7 @@
                         <a:buNone/>
                       </a:pPr>
                       <a:r>
-                        <a:rPr lang="en-US" sz="1100" dirty="0">
+                        <a:rPr lang="en-US" sz="1000" dirty="0">
                           <a:solidFill>
                             <a:srgbClr val="333333"/>
                           </a:solidFill>
@@ -4705,9 +4723,9 @@
                           <a:ea typeface="Meiryo" pitchFamily="34" charset="-122"/>
                           <a:cs typeface="Meiryo" pitchFamily="34" charset="-120"/>
                         </a:rPr>
-                        <a:t>日次 cron</a:t>
+                        <a:t>将来</a:t>
                       </a:r>
-                      <a:endParaRPr lang="en-US" sz="1100" dirty="0">
+                      <a:endParaRPr lang="en-US" sz="1000" dirty="0">
                         <a:latin typeface="Meiryo" charset="0"/>
                         <a:ea typeface="Meiryo" charset="0"/>
                         <a:cs typeface="Meiryo" charset="0"/>
@@ -4765,7 +4783,7 @@
                         <a:buNone/>
                       </a:pPr>
                       <a:r>
-                        <a:rPr lang="en-US" sz="1100" dirty="0">
+                        <a:rPr lang="en-US" sz="1000" dirty="0">
                           <a:solidFill>
                             <a:srgbClr val="333333"/>
                           </a:solidFill>
@@ -4773,9 +4791,9 @@
                           <a:ea typeface="Meiryo" pitchFamily="34" charset="-122"/>
                           <a:cs typeface="Meiryo" pitchFamily="34" charset="-120"/>
                         </a:rPr>
-                        <a:t>content/*.md</a:t>
+                        <a:t>content/*.md 同期</a:t>
                       </a:r>
-                      <a:endParaRPr lang="en-US" sz="1100" dirty="0">
+                      <a:endParaRPr lang="en-US" sz="1000" dirty="0">
                         <a:latin typeface="Meiryo" charset="0"/>
                         <a:ea typeface="Meiryo" charset="0"/>
                         <a:cs typeface="Meiryo" charset="0"/>
@@ -4833,7 +4851,145 @@
                         <a:buNone/>
                       </a:pPr>
                       <a:r>
-                        <a:rPr lang="en-US" sz="1100" dirty="0">
+                        <a:rPr lang="en-US" sz="1000" dirty="0">
+                          <a:solidFill>
+                            <a:srgbClr val="888888"/>
+                          </a:solidFill>
+                          <a:latin typeface="Meiryo" pitchFamily="34" charset="0"/>
+                          <a:ea typeface="Meiryo" pitchFamily="34" charset="-122"/>
+                          <a:cs typeface="Meiryo" pitchFamily="34" charset="-120"/>
+                        </a:rPr>
+                        <a:t>◯ 未実装</a:t>
+                      </a:r>
+                      <a:endParaRPr lang="en-US" sz="1000" dirty="0">
+                        <a:latin typeface="Meiryo" charset="0"/>
+                        <a:ea typeface="Meiryo" charset="0"/>
+                        <a:cs typeface="Meiryo" charset="0"/>
+                      </a:endParaRPr>
+                    </a:p>
+                  </a:txBody>
+                  <a:tcPr marL="91440" marR="91440" marT="45720" marB="45720" anchor="ctr">
+                    <a:lnL w="6350" cap="flat" cmpd="sng" algn="ctr">
+                      <a:solidFill>
+                        <a:srgbClr val="DDDDDD"/>
+                      </a:solidFill>
+                      <a:prstDash val="solid"/>
+                      <a:round/>
+                      <a:headEnd type="none" w="med" len="med"/>
+                      <a:tailEnd type="none" w="med" len="med"/>
+                    </a:lnL>
+                    <a:lnR w="6350" cap="flat" cmpd="sng" algn="ctr">
+                      <a:solidFill>
+                        <a:srgbClr val="DDDDDD"/>
+                      </a:solidFill>
+                      <a:prstDash val="solid"/>
+                      <a:round/>
+                      <a:headEnd type="none" w="med" len="med"/>
+                      <a:tailEnd type="none" w="med" len="med"/>
+                    </a:lnR>
+                    <a:lnT w="6350" cap="flat" cmpd="sng" algn="ctr">
+                      <a:solidFill>
+                        <a:srgbClr val="DDDDDD"/>
+                      </a:solidFill>
+                      <a:prstDash val="solid"/>
+                      <a:round/>
+                      <a:headEnd type="none" w="med" len="med"/>
+                      <a:tailEnd type="none" w="med" len="med"/>
+                    </a:lnT>
+                    <a:lnB w="6350" cap="flat" cmpd="sng" algn="ctr">
+                      <a:solidFill>
+                        <a:srgbClr val="DDDDDD"/>
+                      </a:solidFill>
+                      <a:prstDash val="solid"/>
+                      <a:round/>
+                      <a:headEnd type="none" w="med" len="med"/>
+                      <a:tailEnd type="none" w="med" len="med"/>
+                    </a:lnB>
+                    <a:solidFill>
+                      <a:srgbClr val="FFFFFF"/>
+                    </a:solidFill>
+                  </a:tcPr>
+                </a:tc>
+              </a:tr>
+              <a:tr h="329184">
+                <a:tc>
+                  <a:txBody>
+                    <a:bodyPr/>
+                    <a:lstStyle/>
+                    <a:p>
+                      <a:pPr algn="l" indent="0" marL="0">
+                        <a:buNone/>
+                      </a:pPr>
+                      <a:r>
+                        <a:rPr lang="en-US" sz="1000" dirty="0">
+                          <a:solidFill>
+                            <a:srgbClr val="333333"/>
+                          </a:solidFill>
+                          <a:latin typeface="Menlo" pitchFamily="34" charset="0"/>
+                          <a:ea typeface="Menlo" pitchFamily="34" charset="-122"/>
+                          <a:cs typeface="Menlo" pitchFamily="34" charset="-120"/>
+                        </a:rPr>
+                        <a:t>arxiv_monitor.py</a:t>
+                      </a:r>
+                      <a:endParaRPr lang="en-US" sz="1000" dirty="0">
+                        <a:latin typeface="Menlo" charset="0"/>
+                        <a:ea typeface="Menlo" charset="0"/>
+                        <a:cs typeface="Menlo" charset="0"/>
+                      </a:endParaRPr>
+                    </a:p>
+                  </a:txBody>
+                  <a:tcPr marL="91440" marR="91440" marT="45720" marB="45720" anchor="ctr">
+                    <a:lnL w="6350" cap="flat" cmpd="sng" algn="ctr">
+                      <a:solidFill>
+                        <a:srgbClr val="DDDDDD"/>
+                      </a:solidFill>
+                      <a:prstDash val="solid"/>
+                      <a:round/>
+                      <a:headEnd type="none" w="med" len="med"/>
+                      <a:tailEnd type="none" w="med" len="med"/>
+                    </a:lnL>
+                    <a:lnR w="6350" cap="flat" cmpd="sng" algn="ctr">
+                      <a:solidFill>
+                        <a:srgbClr val="DDDDDD"/>
+                      </a:solidFill>
+                      <a:prstDash val="solid"/>
+                      <a:round/>
+                      <a:headEnd type="none" w="med" len="med"/>
+                      <a:tailEnd type="none" w="med" len="med"/>
+                    </a:lnR>
+                    <a:lnT w="6350" cap="flat" cmpd="sng" algn="ctr">
+                      <a:solidFill>
+                        <a:srgbClr val="DDDDDD"/>
+                      </a:solidFill>
+                      <a:prstDash val="solid"/>
+                      <a:round/>
+                      <a:headEnd type="none" w="med" len="med"/>
+                      <a:tailEnd type="none" w="med" len="med"/>
+                    </a:lnT>
+                    <a:lnB w="6350" cap="flat" cmpd="sng" algn="ctr">
+                      <a:solidFill>
+                        <a:srgbClr val="DDDDDD"/>
+                      </a:solidFill>
+                      <a:prstDash val="solid"/>
+                      <a:round/>
+                      <a:headEnd type="none" w="med" len="med"/>
+                      <a:tailEnd type="none" w="med" len="med"/>
+                    </a:lnB>
+                    <a:solidFill>
+                      <a:srgbClr val="F8F8F8"/>
+                    </a:solidFill>
+                  </a:tcPr>
+                </a:tc>
+                <a:tc>
+                  <a:txBody>
+                    <a:bodyPr/>
+                    <a:lstStyle/>
+                    <a:p>
+                      <a:pPr algn="l" indent="0" marL="0">
+                        <a:buNone/>
+                      </a:pPr>
+                      <a:r>
+                        <a:rPr lang="en-US" sz="1000" dirty="0">
                           <a:solidFill>
                             <a:srgbClr val="333333"/>
                           </a:solidFill>
@@ -4841,9 +4997,419 @@
                           <a:ea typeface="Meiryo" pitchFamily="34" charset="-122"/>
                           <a:cs typeface="Meiryo" pitchFamily="34" charset="-120"/>
                         </a:rPr>
-                        <a:t>Notion 側 Status=Published</a:t>
+                        <a:t>将来</a:t>
                       </a:r>
-                      <a:endParaRPr lang="en-US" sz="1100" dirty="0">
+                      <a:endParaRPr lang="en-US" sz="1000" dirty="0">
+                        <a:latin typeface="Meiryo" charset="0"/>
+                        <a:ea typeface="Meiryo" charset="0"/>
+                        <a:cs typeface="Meiryo" charset="0"/>
+                      </a:endParaRPr>
+                    </a:p>
+                  </a:txBody>
+                  <a:tcPr marL="91440" marR="91440" marT="45720" marB="45720" anchor="ctr">
+                    <a:lnL w="6350" cap="flat" cmpd="sng" algn="ctr">
+                      <a:solidFill>
+                        <a:srgbClr val="DDDDDD"/>
+                      </a:solidFill>
+                      <a:prstDash val="solid"/>
+                      <a:round/>
+                      <a:headEnd type="none" w="med" len="med"/>
+                      <a:tailEnd type="none" w="med" len="med"/>
+                    </a:lnL>
+                    <a:lnR w="6350" cap="flat" cmpd="sng" algn="ctr">
+                      <a:solidFill>
+                        <a:srgbClr val="DDDDDD"/>
+                      </a:solidFill>
+                      <a:prstDash val="solid"/>
+                      <a:round/>
+                      <a:headEnd type="none" w="med" len="med"/>
+                      <a:tailEnd type="none" w="med" len="med"/>
+                    </a:lnR>
+                    <a:lnT w="6350" cap="flat" cmpd="sng" algn="ctr">
+                      <a:solidFill>
+                        <a:srgbClr val="DDDDDD"/>
+                      </a:solidFill>
+                      <a:prstDash val="solid"/>
+                      <a:round/>
+                      <a:headEnd type="none" w="med" len="med"/>
+                      <a:tailEnd type="none" w="med" len="med"/>
+                    </a:lnT>
+                    <a:lnB w="6350" cap="flat" cmpd="sng" algn="ctr">
+                      <a:solidFill>
+                        <a:srgbClr val="DDDDDD"/>
+                      </a:solidFill>
+                      <a:prstDash val="solid"/>
+                      <a:round/>
+                      <a:headEnd type="none" w="med" len="med"/>
+                      <a:tailEnd type="none" w="med" len="med"/>
+                    </a:lnB>
+                    <a:solidFill>
+                      <a:srgbClr val="F8F8F8"/>
+                    </a:solidFill>
+                  </a:tcPr>
+                </a:tc>
+                <a:tc>
+                  <a:txBody>
+                    <a:bodyPr/>
+                    <a:lstStyle/>
+                    <a:p>
+                      <a:pPr algn="l" indent="0" marL="0">
+                        <a:buNone/>
+                      </a:pPr>
+                      <a:r>
+                        <a:rPr lang="en-US" sz="1000" dirty="0">
+                          <a:solidFill>
+                            <a:srgbClr val="333333"/>
+                          </a:solidFill>
+                          <a:latin typeface="Meiryo" pitchFamily="34" charset="0"/>
+                          <a:ea typeface="Meiryo" pitchFamily="34" charset="-122"/>
+                          <a:cs typeface="Meiryo" pitchFamily="34" charset="-120"/>
+                        </a:rPr>
+                        <a:t>新着論文 → Issue</a:t>
+                      </a:r>
+                      <a:endParaRPr lang="en-US" sz="1000" dirty="0">
+                        <a:latin typeface="Meiryo" charset="0"/>
+                        <a:ea typeface="Meiryo" charset="0"/>
+                        <a:cs typeface="Meiryo" charset="0"/>
+                      </a:endParaRPr>
+                    </a:p>
+                  </a:txBody>
+                  <a:tcPr marL="91440" marR="91440" marT="45720" marB="45720" anchor="ctr">
+                    <a:lnL w="6350" cap="flat" cmpd="sng" algn="ctr">
+                      <a:solidFill>
+                        <a:srgbClr val="DDDDDD"/>
+                      </a:solidFill>
+                      <a:prstDash val="solid"/>
+                      <a:round/>
+                      <a:headEnd type="none" w="med" len="med"/>
+                      <a:tailEnd type="none" w="med" len="med"/>
+                    </a:lnL>
+                    <a:lnR w="6350" cap="flat" cmpd="sng" algn="ctr">
+                      <a:solidFill>
+                        <a:srgbClr val="DDDDDD"/>
+                      </a:solidFill>
+                      <a:prstDash val="solid"/>
+                      <a:round/>
+                      <a:headEnd type="none" w="med" len="med"/>
+                      <a:tailEnd type="none" w="med" len="med"/>
+                    </a:lnR>
+                    <a:lnT w="6350" cap="flat" cmpd="sng" algn="ctr">
+                      <a:solidFill>
+                        <a:srgbClr val="DDDDDD"/>
+                      </a:solidFill>
+                      <a:prstDash val="solid"/>
+                      <a:round/>
+                      <a:headEnd type="none" w="med" len="med"/>
+                      <a:tailEnd type="none" w="med" len="med"/>
+                    </a:lnT>
+                    <a:lnB w="6350" cap="flat" cmpd="sng" algn="ctr">
+                      <a:solidFill>
+                        <a:srgbClr val="DDDDDD"/>
+                      </a:solidFill>
+                      <a:prstDash val="solid"/>
+                      <a:round/>
+                      <a:headEnd type="none" w="med" len="med"/>
+                      <a:tailEnd type="none" w="med" len="med"/>
+                    </a:lnB>
+                    <a:solidFill>
+                      <a:srgbClr val="F8F8F8"/>
+                    </a:solidFill>
+                  </a:tcPr>
+                </a:tc>
+                <a:tc>
+                  <a:txBody>
+                    <a:bodyPr/>
+                    <a:lstStyle/>
+                    <a:p>
+                      <a:pPr algn="l" indent="0" marL="0">
+                        <a:buNone/>
+                      </a:pPr>
+                      <a:r>
+                        <a:rPr lang="en-US" sz="1000" dirty="0">
+                          <a:solidFill>
+                            <a:srgbClr val="888888"/>
+                          </a:solidFill>
+                          <a:latin typeface="Meiryo" pitchFamily="34" charset="0"/>
+                          <a:ea typeface="Meiryo" pitchFamily="34" charset="-122"/>
+                          <a:cs typeface="Meiryo" pitchFamily="34" charset="-120"/>
+                        </a:rPr>
+                        <a:t>◯ 未実装</a:t>
+                      </a:r>
+                      <a:endParaRPr lang="en-US" sz="1000" dirty="0">
+                        <a:latin typeface="Meiryo" charset="0"/>
+                        <a:ea typeface="Meiryo" charset="0"/>
+                        <a:cs typeface="Meiryo" charset="0"/>
+                      </a:endParaRPr>
+                    </a:p>
+                  </a:txBody>
+                  <a:tcPr marL="91440" marR="91440" marT="45720" marB="45720" anchor="ctr">
+                    <a:lnL w="6350" cap="flat" cmpd="sng" algn="ctr">
+                      <a:solidFill>
+                        <a:srgbClr val="DDDDDD"/>
+                      </a:solidFill>
+                      <a:prstDash val="solid"/>
+                      <a:round/>
+                      <a:headEnd type="none" w="med" len="med"/>
+                      <a:tailEnd type="none" w="med" len="med"/>
+                    </a:lnL>
+                    <a:lnR w="6350" cap="flat" cmpd="sng" algn="ctr">
+                      <a:solidFill>
+                        <a:srgbClr val="DDDDDD"/>
+                      </a:solidFill>
+                      <a:prstDash val="solid"/>
+                      <a:round/>
+                      <a:headEnd type="none" w="med" len="med"/>
+                      <a:tailEnd type="none" w="med" len="med"/>
+                    </a:lnR>
+                    <a:lnT w="6350" cap="flat" cmpd="sng" algn="ctr">
+                      <a:solidFill>
+                        <a:srgbClr val="DDDDDD"/>
+                      </a:solidFill>
+                      <a:prstDash val="solid"/>
+                      <a:round/>
+                      <a:headEnd type="none" w="med" len="med"/>
+                      <a:tailEnd type="none" w="med" len="med"/>
+                    </a:lnT>
+                    <a:lnB w="6350" cap="flat" cmpd="sng" algn="ctr">
+                      <a:solidFill>
+                        <a:srgbClr val="DDDDDD"/>
+                      </a:solidFill>
+                      <a:prstDash val="solid"/>
+                      <a:round/>
+                      <a:headEnd type="none" w="med" len="med"/>
+                      <a:tailEnd type="none" w="med" len="med"/>
+                    </a:lnB>
+                    <a:solidFill>
+                      <a:srgbClr val="F8F8F8"/>
+                    </a:solidFill>
+                  </a:tcPr>
+                </a:tc>
+              </a:tr>
+              <a:tr h="329184">
+                <a:tc>
+                  <a:txBody>
+                    <a:bodyPr/>
+                    <a:lstStyle/>
+                    <a:p>
+                      <a:pPr algn="l" indent="0" marL="0">
+                        <a:buNone/>
+                      </a:pPr>
+                      <a:r>
+                        <a:rPr lang="en-US" sz="1000" dirty="0">
+                          <a:solidFill>
+                            <a:srgbClr val="333333"/>
+                          </a:solidFill>
+                          <a:latin typeface="Menlo" pitchFamily="34" charset="0"/>
+                          <a:ea typeface="Menlo" pitchFamily="34" charset="-122"/>
+                          <a:cs typeface="Menlo" pitchFamily="34" charset="-120"/>
+                        </a:rPr>
+                        <a:t>x_post.py</a:t>
+                      </a:r>
+                      <a:endParaRPr lang="en-US" sz="1000" dirty="0">
+                        <a:latin typeface="Menlo" charset="0"/>
+                        <a:ea typeface="Menlo" charset="0"/>
+                        <a:cs typeface="Menlo" charset="0"/>
+                      </a:endParaRPr>
+                    </a:p>
+                  </a:txBody>
+                  <a:tcPr marL="91440" marR="91440" marT="45720" marB="45720" anchor="ctr">
+                    <a:lnL w="6350" cap="flat" cmpd="sng" algn="ctr">
+                      <a:solidFill>
+                        <a:srgbClr val="DDDDDD"/>
+                      </a:solidFill>
+                      <a:prstDash val="solid"/>
+                      <a:round/>
+                      <a:headEnd type="none" w="med" len="med"/>
+                      <a:tailEnd type="none" w="med" len="med"/>
+                    </a:lnL>
+                    <a:lnR w="6350" cap="flat" cmpd="sng" algn="ctr">
+                      <a:solidFill>
+                        <a:srgbClr val="DDDDDD"/>
+                      </a:solidFill>
+                      <a:prstDash val="solid"/>
+                      <a:round/>
+                      <a:headEnd type="none" w="med" len="med"/>
+                      <a:tailEnd type="none" w="med" len="med"/>
+                    </a:lnR>
+                    <a:lnT w="6350" cap="flat" cmpd="sng" algn="ctr">
+                      <a:solidFill>
+                        <a:srgbClr val="DDDDDD"/>
+                      </a:solidFill>
+                      <a:prstDash val="solid"/>
+                      <a:round/>
+                      <a:headEnd type="none" w="med" len="med"/>
+                      <a:tailEnd type="none" w="med" len="med"/>
+                    </a:lnT>
+                    <a:lnB w="6350" cap="flat" cmpd="sng" algn="ctr">
+                      <a:solidFill>
+                        <a:srgbClr val="DDDDDD"/>
+                      </a:solidFill>
+                      <a:prstDash val="solid"/>
+                      <a:round/>
+                      <a:headEnd type="none" w="med" len="med"/>
+                      <a:tailEnd type="none" w="med" len="med"/>
+                    </a:lnB>
+                    <a:solidFill>
+                      <a:srgbClr val="FFFFFF"/>
+                    </a:solidFill>
+                  </a:tcPr>
+                </a:tc>
+                <a:tc>
+                  <a:txBody>
+                    <a:bodyPr/>
+                    <a:lstStyle/>
+                    <a:p>
+                      <a:pPr algn="l" indent="0" marL="0">
+                        <a:buNone/>
+                      </a:pPr>
+                      <a:r>
+                        <a:rPr lang="en-US" sz="1000" dirty="0">
+                          <a:solidFill>
+                            <a:srgbClr val="333333"/>
+                          </a:solidFill>
+                          <a:latin typeface="Meiryo" pitchFamily="34" charset="0"/>
+                          <a:ea typeface="Meiryo" pitchFamily="34" charset="-122"/>
+                          <a:cs typeface="Meiryo" pitchFamily="34" charset="-120"/>
+                        </a:rPr>
+                        <a:t>将来</a:t>
+                      </a:r>
+                      <a:endParaRPr lang="en-US" sz="1000" dirty="0">
+                        <a:latin typeface="Meiryo" charset="0"/>
+                        <a:ea typeface="Meiryo" charset="0"/>
+                        <a:cs typeface="Meiryo" charset="0"/>
+                      </a:endParaRPr>
+                    </a:p>
+                  </a:txBody>
+                  <a:tcPr marL="91440" marR="91440" marT="45720" marB="45720" anchor="ctr">
+                    <a:lnL w="6350" cap="flat" cmpd="sng" algn="ctr">
+                      <a:solidFill>
+                        <a:srgbClr val="DDDDDD"/>
+                      </a:solidFill>
+                      <a:prstDash val="solid"/>
+                      <a:round/>
+                      <a:headEnd type="none" w="med" len="med"/>
+                      <a:tailEnd type="none" w="med" len="med"/>
+                    </a:lnL>
+                    <a:lnR w="6350" cap="flat" cmpd="sng" algn="ctr">
+                      <a:solidFill>
+                        <a:srgbClr val="DDDDDD"/>
+                      </a:solidFill>
+                      <a:prstDash val="solid"/>
+                      <a:round/>
+                      <a:headEnd type="none" w="med" len="med"/>
+                      <a:tailEnd type="none" w="med" len="med"/>
+                    </a:lnR>
+                    <a:lnT w="6350" cap="flat" cmpd="sng" algn="ctr">
+                      <a:solidFill>
+                        <a:srgbClr val="DDDDDD"/>
+                      </a:solidFill>
+                      <a:prstDash val="solid"/>
+                      <a:round/>
+                      <a:headEnd type="none" w="med" len="med"/>
+                      <a:tailEnd type="none" w="med" len="med"/>
+                    </a:lnT>
+                    <a:lnB w="6350" cap="flat" cmpd="sng" algn="ctr">
+                      <a:solidFill>
+                        <a:srgbClr val="DDDDDD"/>
+                      </a:solidFill>
+                      <a:prstDash val="solid"/>
+                      <a:round/>
+                      <a:headEnd type="none" w="med" len="med"/>
+                      <a:tailEnd type="none" w="med" len="med"/>
+                    </a:lnB>
+                    <a:solidFill>
+                      <a:srgbClr val="FFFFFF"/>
+                    </a:solidFill>
+                  </a:tcPr>
+                </a:tc>
+                <a:tc>
+                  <a:txBody>
+                    <a:bodyPr/>
+                    <a:lstStyle/>
+                    <a:p>
+                      <a:pPr algn="l" indent="0" marL="0">
+                        <a:buNone/>
+                      </a:pPr>
+                      <a:r>
+                        <a:rPr lang="en-US" sz="1000" dirty="0">
+                          <a:solidFill>
+                            <a:srgbClr val="333333"/>
+                          </a:solidFill>
+                          <a:latin typeface="Meiryo" pitchFamily="34" charset="0"/>
+                          <a:ea typeface="Meiryo" pitchFamily="34" charset="-122"/>
+                          <a:cs typeface="Meiryo" pitchFamily="34" charset="-120"/>
+                        </a:rPr>
+                        <a:t>X 草稿（人が承認）</a:t>
+                      </a:r>
+                      <a:endParaRPr lang="en-US" sz="1000" dirty="0">
+                        <a:latin typeface="Meiryo" charset="0"/>
+                        <a:ea typeface="Meiryo" charset="0"/>
+                        <a:cs typeface="Meiryo" charset="0"/>
+                      </a:endParaRPr>
+                    </a:p>
+                  </a:txBody>
+                  <a:tcPr marL="91440" marR="91440" marT="45720" marB="45720" anchor="ctr">
+                    <a:lnL w="6350" cap="flat" cmpd="sng" algn="ctr">
+                      <a:solidFill>
+                        <a:srgbClr val="DDDDDD"/>
+                      </a:solidFill>
+                      <a:prstDash val="solid"/>
+                      <a:round/>
+                      <a:headEnd type="none" w="med" len="med"/>
+                      <a:tailEnd type="none" w="med" len="med"/>
+                    </a:lnL>
+                    <a:lnR w="6350" cap="flat" cmpd="sng" algn="ctr">
+                      <a:solidFill>
+                        <a:srgbClr val="DDDDDD"/>
+                      </a:solidFill>
+                      <a:prstDash val="solid"/>
+                      <a:round/>
+                      <a:headEnd type="none" w="med" len="med"/>
+                      <a:tailEnd type="none" w="med" len="med"/>
+                    </a:lnR>
+                    <a:lnT w="6350" cap="flat" cmpd="sng" algn="ctr">
+                      <a:solidFill>
+                        <a:srgbClr val="DDDDDD"/>
+                      </a:solidFill>
+                      <a:prstDash val="solid"/>
+                      <a:round/>
+                      <a:headEnd type="none" w="med" len="med"/>
+                      <a:tailEnd type="none" w="med" len="med"/>
+                    </a:lnT>
+                    <a:lnB w="6350" cap="flat" cmpd="sng" algn="ctr">
+                      <a:solidFill>
+                        <a:srgbClr val="DDDDDD"/>
+                      </a:solidFill>
+                      <a:prstDash val="solid"/>
+                      <a:round/>
+                      <a:headEnd type="none" w="med" len="med"/>
+                      <a:tailEnd type="none" w="med" len="med"/>
+                    </a:lnB>
+                    <a:solidFill>
+                      <a:srgbClr val="FFFFFF"/>
+                    </a:solidFill>
+                  </a:tcPr>
+                </a:tc>
+                <a:tc>
+                  <a:txBody>
+                    <a:bodyPr/>
+                    <a:lstStyle/>
+                    <a:p>
+                      <a:pPr algn="l" indent="0" marL="0">
+                        <a:buNone/>
+                      </a:pPr>
+                      <a:r>
+                        <a:rPr lang="en-US" sz="1000" dirty="0">
+                          <a:solidFill>
+                            <a:srgbClr val="888888"/>
+                          </a:solidFill>
+                          <a:latin typeface="Meiryo" pitchFamily="34" charset="0"/>
+                          <a:ea typeface="Meiryo" pitchFamily="34" charset="-122"/>
+                          <a:cs typeface="Meiryo" pitchFamily="34" charset="-120"/>
+                        </a:rPr>
+                        <a:t>◯ 未実装</a:t>
+                      </a:r>
+                      <a:endParaRPr lang="en-US" sz="1000" dirty="0">
                         <a:latin typeface="Meiryo" charset="0"/>
                         <a:ea typeface="Meiryo" charset="0"/>
                         <a:cs typeface="Meiryo" charset="0"/>
@@ -4905,8 +5471,8 @@
         </p:nvSpPr>
         <p:spPr>
           <a:xfrm>
-            <a:off x="548640" y="3703320"/>
-            <a:ext cx="8046720" cy="320040"/>
+            <a:off x="548640" y="3931920"/>
+            <a:ext cx="8046720" cy="274320"/>
           </a:xfrm>
           <a:prstGeom prst="rect">
             <a:avLst/>
@@ -4930,7 +5496,7 @@
                 <a:ea typeface="Meiryo" pitchFamily="34" charset="-122"/>
                 <a:cs typeface="Meiryo" pitchFamily="34" charset="-120"/>
               </a:rPr>
-              <a:t>承認モデル: ヒューマン・イン・ザ・ループ</a:t>
+              <a:t>承認モデル</a:t>
             </a:r>
             <a:endParaRPr lang="en-US" sz="1300" dirty="0"/>
           </a:p>
@@ -4944,7 +5510,7 @@
         </p:nvSpPr>
         <p:spPr>
           <a:xfrm>
-            <a:off x="640080" y="4023360"/>
+            <a:off x="640080" y="4206240"/>
             <a:ext cx="8046720" cy="914400"/>
           </a:xfrm>
           <a:prstGeom prst="rect">
@@ -4965,17 +5531,17 @@
               <a:buChar char="■"/>
             </a:pPr>
             <a:r>
-              <a:rPr lang="en-US" sz="1200" dirty="0">
-                <a:solidFill>
-                  <a:srgbClr val="333333"/>
-                </a:solidFill>
-                <a:latin typeface="Meiryo" pitchFamily="34" charset="0"/>
-                <a:ea typeface="Meiryo" pitchFamily="34" charset="-122"/>
-                <a:cs typeface="Meiryo" pitchFamily="34" charset="-120"/>
-              </a:rPr>
-              <a:t>完全自動化は採用しない (誤情報リスク)</a:t>
-            </a:r>
-            <a:endParaRPr lang="en-US" sz="1200" dirty="0"/>
+              <a:rPr lang="en-US" sz="1100" dirty="0">
+                <a:solidFill>
+                  <a:srgbClr val="333333"/>
+                </a:solidFill>
+                <a:latin typeface="Meiryo" pitchFamily="34" charset="0"/>
+                <a:ea typeface="Meiryo" pitchFamily="34" charset="-122"/>
+                <a:cs typeface="Meiryo" pitchFamily="34" charset="-120"/>
+              </a:rPr>
+              <a:t>外部 API からの取り込みは自動、人手では介入しない（誤情報リスクは元ソースに帰着）</a:t>
+            </a:r>
+            <a:endParaRPr lang="en-US" sz="1100" dirty="0"/>
           </a:p>
           <a:p>
             <a:pPr marL="342900" indent="-342900">
@@ -4986,17 +5552,17 @@
               <a:buChar char="■"/>
             </a:pPr>
             <a:r>
-              <a:rPr lang="en-US" sz="1200" dirty="0">
-                <a:solidFill>
-                  <a:srgbClr val="333333"/>
-                </a:solidFill>
-                <a:latin typeface="Meiryo" pitchFamily="34" charset="0"/>
-                <a:ea typeface="Meiryo" pitchFamily="34" charset="-122"/>
-                <a:cs typeface="Meiryo" pitchFamily="34" charset="-120"/>
-              </a:rPr>
-              <a:t>発見 / 草稿生成は自動、最終発信は人が承認</a:t>
-            </a:r>
-            <a:endParaRPr lang="en-US" sz="1200" dirty="0"/>
+              <a:rPr lang="en-US" sz="1100" dirty="0">
+                <a:solidFill>
+                  <a:srgbClr val="333333"/>
+                </a:solidFill>
+                <a:latin typeface="Meiryo" pitchFamily="34" charset="0"/>
+                <a:ea typeface="Meiryo" pitchFamily="34" charset="-122"/>
+                <a:cs typeface="Meiryo" pitchFamily="34" charset="-120"/>
+              </a:rPr>
+              <a:t>手動 Markdown は Tier 1 のレビュー後にコミット</a:t>
+            </a:r>
+            <a:endParaRPr lang="en-US" sz="1100" dirty="0"/>
           </a:p>
           <a:p>
             <a:pPr marL="342900" indent="-342900">
@@ -5007,17 +5573,17 @@
               <a:buChar char="■"/>
             </a:pPr>
             <a:r>
-              <a:rPr lang="en-US" sz="1200" dirty="0">
-                <a:solidFill>
-                  <a:srgbClr val="333333"/>
-                </a:solidFill>
-                <a:latin typeface="Meiryo" pitchFamily="34" charset="0"/>
-                <a:ea typeface="Meiryo" pitchFamily="34" charset="-122"/>
-                <a:cs typeface="Meiryo" pitchFamily="34" charset="-120"/>
-              </a:rPr>
-              <a:t>承認 UI は GitHub Issue / Notion Status / Discord リアクション</a:t>
-            </a:r>
-            <a:endParaRPr lang="en-US" sz="1200" dirty="0"/>
+              <a:rPr lang="en-US" sz="1100" dirty="0">
+                <a:solidFill>
+                  <a:srgbClr val="333333"/>
+                </a:solidFill>
+                <a:latin typeface="Meiryo" pitchFamily="34" charset="0"/>
+                <a:ea typeface="Meiryo" pitchFamily="34" charset="-122"/>
+                <a:cs typeface="Meiryo" pitchFamily="34" charset="-120"/>
+              </a:rPr>
+              <a:t>将来：Notion / Issue Form / X 自動投稿を段階的に追加（人手承認は維持）</a:t>
+            </a:r>
+            <a:endParaRPr lang="en-US" sz="1100" dirty="0"/>
           </a:p>
         </p:txBody>
       </p:sp>
@@ -5182,17 +5748,17 @@
               <a:buNone/>
             </a:pPr>
             <a:r>
-              <a:rPr lang="en-US" sz="1600" dirty="0">
-                <a:solidFill>
-                  <a:srgbClr val="333333"/>
-                </a:solidFill>
-                <a:latin typeface="Meiryo" pitchFamily="34" charset="0"/>
-                <a:ea typeface="Meiryo" pitchFamily="34" charset="-122"/>
-                <a:cs typeface="Meiryo" pitchFamily="34" charset="-120"/>
-              </a:rPr>
-              <a:t>1.  Markdown を一次データに据え、複数の入力源と複数の出力先をつなぐ「ハブ構造」を最小実装</a:t>
-            </a:r>
-            <a:endParaRPr lang="en-US" sz="1600" dirty="0"/>
+              <a:rPr lang="en-US" sz="1500" dirty="0">
+                <a:solidFill>
+                  <a:srgbClr val="333333"/>
+                </a:solidFill>
+                <a:latin typeface="Meiryo" pitchFamily="34" charset="0"/>
+                <a:ea typeface="Meiryo" pitchFamily="34" charset="-122"/>
+                <a:cs typeface="Meiryo" pitchFamily="34" charset="-120"/>
+              </a:rPr>
+              <a:t>1.  Markdown + JSON の一次データを Astro でビルドする「ハブ構造」を最小実装で達成</a:t>
+            </a:r>
+            <a:endParaRPr lang="en-US" sz="1500" dirty="0"/>
           </a:p>
           <a:p>
             <a:pPr indent="0" marL="0">
@@ -5202,17 +5768,17 @@
               <a:buNone/>
             </a:pPr>
             <a:r>
-              <a:rPr lang="en-US" sz="1600" dirty="0">
-                <a:solidFill>
-                  <a:srgbClr val="333333"/>
-                </a:solidFill>
-                <a:latin typeface="Meiryo" pitchFamily="34" charset="0"/>
-                <a:ea typeface="Meiryo" pitchFamily="34" charset="-122"/>
-                <a:cs typeface="Meiryo" pitchFamily="34" charset="-120"/>
-              </a:rPr>
-              <a:t>2.  英語一次 + 日本語補助 + フォールバック表示で、執筆コストを抑えつつバイリンガル化</a:t>
-            </a:r>
-            <a:endParaRPr lang="en-US" sz="1600" dirty="0"/>
+              <a:rPr lang="en-US" sz="1500" dirty="0">
+                <a:solidFill>
+                  <a:srgbClr val="333333"/>
+                </a:solidFill>
+                <a:latin typeface="Meiryo" pitchFamily="34" charset="0"/>
+                <a:ea typeface="Meiryo" pitchFamily="34" charset="-122"/>
+                <a:cs typeface="Meiryo" pitchFamily="34" charset="-120"/>
+              </a:rPr>
+              <a:t>2.  5 つのコレクション（papers / labs / events / videos / articles）を横断する全文検索 + バイリンガル</a:t>
+            </a:r>
+            <a:endParaRPr lang="en-US" sz="1500" dirty="0"/>
           </a:p>
           <a:p>
             <a:pPr indent="0" marL="0">
@@ -5222,17 +5788,17 @@
               <a:buNone/>
             </a:pPr>
             <a:r>
-              <a:rPr lang="en-US" sz="1600" dirty="0">
-                <a:solidFill>
-                  <a:srgbClr val="333333"/>
-                </a:solidFill>
-                <a:latin typeface="Meiryo" pitchFamily="34" charset="0"/>
-                <a:ea typeface="Meiryo" pitchFamily="34" charset="-122"/>
-                <a:cs typeface="Meiryo" pitchFamily="34" charset="-120"/>
-              </a:rPr>
-              <a:t>3.  Notion 編集 + arxiv 自動発見 + 半自動 X 投稿で、研究者の発見 → 共有のサイクルを短縮</a:t>
-            </a:r>
-            <a:endParaRPr lang="en-US" sz="1600" dirty="0"/>
+              <a:rPr lang="en-US" sz="1500" dirty="0">
+                <a:solidFill>
+                  <a:srgbClr val="333333"/>
+                </a:solidFill>
+                <a:latin typeface="Meiryo" pitchFamily="34" charset="0"/>
+                <a:ea typeface="Meiryo" pitchFamily="34" charset="-122"/>
+                <a:cs typeface="Meiryo" pitchFamily="34" charset="-120"/>
+              </a:rPr>
+              <a:t>3.  YouTube API と note RSS を 1 時間毎に取り込み、手動編集とのハイブリッドで運用</a:t>
+            </a:r>
+            <a:endParaRPr lang="en-US" sz="1500" dirty="0"/>
           </a:p>
           <a:p>
             <a:pPr indent="0" marL="0">
@@ -5242,17 +5808,17 @@
               <a:buNone/>
             </a:pPr>
             <a:r>
-              <a:rPr lang="en-US" sz="1600" dirty="0">
-                <a:solidFill>
-                  <a:srgbClr val="333333"/>
-                </a:solidFill>
-                <a:latin typeface="Meiryo" pitchFamily="34" charset="0"/>
-                <a:ea typeface="Meiryo" pitchFamily="34" charset="-122"/>
-                <a:cs typeface="Meiryo" pitchFamily="34" charset="-120"/>
-              </a:rPr>
-              <a:t>4.  PoC スコープを明示し、認証 / 検索高度化 / 全文翻訳などは段階的に追加する設計</a:t>
-            </a:r>
-            <a:endParaRPr lang="en-US" sz="1600" dirty="0"/>
+              <a:rPr lang="en-US" sz="1500" dirty="0">
+                <a:solidFill>
+                  <a:srgbClr val="333333"/>
+                </a:solidFill>
+                <a:latin typeface="Meiryo" pitchFamily="34" charset="0"/>
+                <a:ea typeface="Meiryo" pitchFamily="34" charset="-122"/>
+                <a:cs typeface="Meiryo" pitchFamily="34" charset="-120"/>
+              </a:rPr>
+              <a:t>4.  次のフェーズ：Notion 連携、arXiv 監視、X 自動投稿、Cloudflare/Vercel デプロイへ段階的に拡張</a:t>
+            </a:r>
+            <a:endParaRPr lang="en-US" sz="1500" dirty="0"/>
           </a:p>
         </p:txBody>
       </p:sp>
@@ -5560,7 +6126,7 @@
         <p:spPr>
           <a:xfrm>
             <a:off x="731520" y="2743200"/>
-            <a:ext cx="7863840" cy="2011680"/>
+            <a:ext cx="7863840" cy="1828800"/>
           </a:xfrm>
           <a:prstGeom prst="rect">
             <a:avLst/>
@@ -5607,7 +6173,7 @@
                 <a:ea typeface="Meiryo" pitchFamily="34" charset="-122"/>
                 <a:cs typeface="Meiryo" pitchFamily="34" charset="-120"/>
               </a:rPr>
-              <a:t>Astro Content Collections (glob loader) — https://docs.astro.build/en/guides/content-collections/</a:t>
+              <a:t>Astro Content Collections — https://docs.astro.build/en/guides/content-collections/</a:t>
             </a:r>
             <a:endParaRPr lang="en-US" sz="1100" dirty="0"/>
           </a:p>
@@ -5647,7 +6213,7 @@
                 <a:ea typeface="Meiryo" pitchFamily="34" charset="-122"/>
                 <a:cs typeface="Meiryo" pitchFamily="34" charset="-120"/>
               </a:rPr>
-              <a:t>Notion API — https://developers.notion.com/</a:t>
+              <a:t>YouTube Data API v3 — https://developers.google.com/youtube/v3</a:t>
             </a:r>
             <a:endParaRPr lang="en-US" sz="1100" dirty="0"/>
           </a:p>
@@ -5667,7 +6233,7 @@
                 <a:ea typeface="Meiryo" pitchFamily="34" charset="-122"/>
                 <a:cs typeface="Meiryo" pitchFamily="34" charset="-120"/>
               </a:rPr>
-              <a:t>arXiv API — https://info.arxiv.org/help/api/</a:t>
+              <a:t>note RSS — https://note.com/{username}/rss</a:t>
             </a:r>
             <a:endParaRPr lang="en-US" sz="1100" dirty="0"/>
           </a:p>
@@ -5687,7 +6253,7 @@
                 <a:ea typeface="Meiryo" pitchFamily="34" charset="-122"/>
                 <a:cs typeface="Meiryo" pitchFamily="34" charset="-120"/>
               </a:rPr>
-              <a:t>Pagefind (将来の検索) — https://pagefind.app/</a:t>
+              <a:t>launchd (macOS) — https://www.launchd.info/</a:t>
             </a:r>
             <a:endParaRPr lang="en-US" sz="1100" dirty="0"/>
           </a:p>
@@ -5707,7 +6273,7 @@
                 <a:ea typeface="Meiryo" pitchFamily="34" charset="-122"/>
                 <a:cs typeface="Meiryo" pitchFamily="34" charset="-120"/>
               </a:rPr>
-              <a:t>Vercel — https://vercel.com/docs/frameworks/astro</a:t>
+              <a:t>Pagefind（将来の検索）— https://pagefind.app/</a:t>
             </a:r>
             <a:endParaRPr lang="en-US" sz="1100" dirty="0"/>
           </a:p>
@@ -5746,7 +6312,7 @@
                 <a:ea typeface="Meiryo" pitchFamily="34" charset="-122"/>
                 <a:cs typeface="Meiryo" pitchFamily="34" charset="-120"/>
               </a:rPr>
-              <a:t>プロジェクト設計書: DESIGN.md (リポジトリ root)</a:t>
+              <a:t>リポジトリ: github.com/Taiyou/cpc-hub  /  ライセンス: CC BY-NC 4.0</a:t>
             </a:r>
             <a:endParaRPr lang="en-US" sz="1000" dirty="0"/>
           </a:p>
@@ -5921,7 +6487,7 @@
                 <a:ea typeface="Meiryo" pitchFamily="34" charset="-122"/>
                 <a:cs typeface="Meiryo" pitchFamily="34" charset="-120"/>
               </a:rPr>
-              <a:t>1.   背景と PoC のゴール</a:t>
+              <a:t>1.   背景と現状</a:t>
             </a:r>
             <a:endParaRPr lang="en-US" sz="1800" dirty="0"/>
           </a:p>
@@ -5961,7 +6527,7 @@
                 <a:ea typeface="Meiryo" pitchFamily="34" charset="-122"/>
                 <a:cs typeface="Meiryo" pitchFamily="34" charset="-120"/>
               </a:rPr>
-              <a:t>3.   データモデル</a:t>
+              <a:t>3.   データモデル（5 コレクション）</a:t>
             </a:r>
             <a:endParaRPr lang="en-US" sz="1800" dirty="0"/>
           </a:p>
@@ -6001,7 +6567,7 @@
                 <a:ea typeface="Meiryo" pitchFamily="34" charset="-122"/>
                 <a:cs typeface="Meiryo" pitchFamily="34" charset="-120"/>
               </a:rPr>
-              <a:t>5.   コンテンツフロー</a:t>
+              <a:t>5.   コンテンツフロー（手動 + 自動取り込み）</a:t>
             </a:r>
             <a:endParaRPr lang="en-US" sz="1800" dirty="0"/>
           </a:p>
@@ -6021,7 +6587,7 @@
                 <a:ea typeface="Meiryo" pitchFamily="34" charset="-122"/>
                 <a:cs typeface="Meiryo" pitchFamily="34" charset="-120"/>
               </a:rPr>
-              <a:t>6.   自動化と次のステップ</a:t>
+              <a:t>6.   自動化（launchd / fetch スクリプト）</a:t>
             </a:r>
             <a:endParaRPr lang="en-US" sz="1800" dirty="0"/>
           </a:p>
@@ -6376,7 +6942,7 @@
                 <a:ea typeface="Meiryo" pitchFamily="34" charset="-122"/>
                 <a:cs typeface="Meiryo" pitchFamily="34" charset="-120"/>
               </a:rPr>
-              <a:t>Notion DB</a:t>
+              <a:t>Markdown 編集</a:t>
             </a:r>
             <a:endParaRPr lang="en-US" sz="1000" dirty="0"/>
           </a:p>
@@ -6393,7 +6959,7 @@
                 <a:ea typeface="Meiryo" pitchFamily="34" charset="-122"/>
                 <a:cs typeface="Meiryo" pitchFamily="34" charset="-120"/>
               </a:rPr>
-              <a:t>(編集者)</a:t>
+              <a:t>(手動)</a:t>
             </a:r>
             <a:endParaRPr lang="en-US" sz="1000" dirty="0"/>
           </a:p>
@@ -6459,7 +7025,7 @@
                 <a:ea typeface="Meiryo" pitchFamily="34" charset="-122"/>
                 <a:cs typeface="Meiryo" pitchFamily="34" charset="-120"/>
               </a:rPr>
-              <a:t>arxiv_monitor</a:t>
+              <a:t>YouTube API v3</a:t>
             </a:r>
             <a:endParaRPr lang="en-US" sz="1000" dirty="0"/>
           </a:p>
@@ -6476,7 +7042,7 @@
                 <a:ea typeface="Meiryo" pitchFamily="34" charset="-122"/>
                 <a:cs typeface="Meiryo" pitchFamily="34" charset="-120"/>
               </a:rPr>
-              <a:t>(自動発見)</a:t>
+              <a:t>(自動)</a:t>
             </a:r>
             <a:endParaRPr lang="en-US" sz="1000" dirty="0"/>
           </a:p>
@@ -6542,7 +7108,7 @@
                 <a:ea typeface="Meiryo" pitchFamily="34" charset="-122"/>
                 <a:cs typeface="Meiryo" pitchFamily="34" charset="-120"/>
               </a:rPr>
-              <a:t>Issue Form</a:t>
+              <a:t>note RSS</a:t>
             </a:r>
             <a:endParaRPr lang="en-US" sz="1000" dirty="0"/>
           </a:p>
@@ -6559,7 +7125,7 @@
                 <a:ea typeface="Meiryo" pitchFamily="34" charset="-122"/>
                 <a:cs typeface="Meiryo" pitchFamily="34" charset="-120"/>
               </a:rPr>
-              <a:t>(外部貢献)</a:t>
+              <a:t>(自動)</a:t>
             </a:r>
             <a:endParaRPr lang="en-US" sz="1000" dirty="0"/>
           </a:p>
@@ -6617,7 +7183,7 @@
               <a:buNone/>
             </a:pPr>
             <a:r>
-              <a:rPr lang="en-US" sz="1300" b="1" dirty="0">
+              <a:rPr lang="en-US" sz="1200" b="1" dirty="0">
                 <a:solidFill>
                   <a:srgbClr val="FFFFFF"/>
                 </a:solidFill>
@@ -6628,14 +7194,14 @@
               <a:t>content/*.md
 </a:t>
             </a:r>
-            <a:endParaRPr lang="en-US" sz="1300" dirty="0"/>
+            <a:endParaRPr lang="en-US" sz="1200" dirty="0"/>
           </a:p>
           <a:p>
             <a:pPr algn="ctr" indent="0" marL="0">
               <a:buNone/>
             </a:pPr>
             <a:r>
-              <a:rPr lang="en-US" sz="1000" dirty="0">
+              <a:rPr lang="en-US" sz="900" dirty="0">
                 <a:solidFill>
                   <a:srgbClr val="E8EEF7"/>
                 </a:solidFill>
@@ -6646,14 +7212,33 @@
               <a:t>papers / labs / events
 </a:t>
             </a:r>
-            <a:endParaRPr lang="en-US" sz="1300" dirty="0"/>
+            <a:endParaRPr lang="en-US" sz="1200" dirty="0"/>
           </a:p>
           <a:p>
             <a:pPr algn="ctr" indent="0" marL="0">
               <a:buNone/>
             </a:pPr>
             <a:r>
-              <a:rPr lang="en-US" sz="900" i="1" dirty="0">
+              <a:rPr lang="en-US" sz="1200" b="1" dirty="0">
+                <a:solidFill>
+                  <a:srgbClr val="FFFFFF"/>
+                </a:solidFill>
+                <a:latin typeface="Meiryo" pitchFamily="34" charset="0"/>
+                <a:ea typeface="Meiryo" pitchFamily="34" charset="-122"/>
+                <a:cs typeface="Meiryo" pitchFamily="34" charset="-120"/>
+              </a:rPr>
+              <a:t>
+src/data/*.json
+</a:t>
+            </a:r>
+            <a:endParaRPr lang="en-US" sz="1200" dirty="0"/>
+          </a:p>
+          <a:p>
+            <a:pPr algn="ctr" indent="0" marL="0">
+              <a:buNone/>
+            </a:pPr>
+            <a:r>
+              <a:rPr lang="en-US" sz="900" dirty="0">
                 <a:solidFill>
                   <a:srgbClr val="E8EEF7"/>
                 </a:solidFill>
@@ -6661,9 +7246,9 @@
                 <a:ea typeface="Meiryo" pitchFamily="34" charset="-122"/>
                 <a:cs typeface="Meiryo" pitchFamily="34" charset="-120"/>
               </a:rPr>
-              <a:t>(一次データ)</a:t>
-            </a:r>
-            <a:endParaRPr lang="en-US" sz="1300" dirty="0"/>
+              <a:t>videos / notes</a:t>
+            </a:r>
+            <a:endParaRPr lang="en-US" sz="1200" dirty="0"/>
           </a:p>
         </p:txBody>
       </p:sp>
@@ -6993,7 +7578,7 @@
                 <a:ea typeface="Meiryo" pitchFamily="34" charset="-122"/>
                 <a:cs typeface="Meiryo" pitchFamily="34" charset="-120"/>
               </a:rPr>
-              <a:t>(Vercel)</a:t>
+              <a:t>(GitHub Private)</a:t>
             </a:r>
             <a:endParaRPr lang="en-US" sz="1000" dirty="0"/>
           </a:p>
@@ -7142,7 +7727,7 @@
                 <a:ea typeface="Meiryo" pitchFamily="34" charset="-122"/>
                 <a:cs typeface="Meiryo" pitchFamily="34" charset="-120"/>
               </a:rPr>
-              <a:t>X 半自動投稿</a:t>
+              <a:t>X CTA カード</a:t>
             </a:r>
             <a:endParaRPr lang="en-US" sz="1000" dirty="0"/>
           </a:p>
@@ -7159,7 +7744,7 @@
                 <a:ea typeface="Meiryo" pitchFamily="34" charset="-122"/>
                 <a:cs typeface="Meiryo" pitchFamily="34" charset="-120"/>
               </a:rPr>
-              <a:t>(週次)</a:t>
+              <a:t>(タイムライン)</a:t>
             </a:r>
             <a:endParaRPr lang="en-US" sz="1000" dirty="0"/>
           </a:p>
@@ -7366,7 +7951,7 @@
                 <a:ea typeface="Meiryo" pitchFamily="34" charset="-122"/>
                 <a:cs typeface="Meiryo" pitchFamily="34" charset="-120"/>
               </a:rPr>
-              <a:t>Markdown を一次データに据え、複数の入力源と複数の出力先をつなぐ「ハブ」構造</a:t>
+              <a:t>Markdown + JSON を一次データに据え、手動編集と外部 API 取り込みを統合する「ハブ」構造</a:t>
             </a:r>
             <a:endParaRPr lang="en-US" sz="1300" dirty="0"/>
           </a:p>
@@ -7476,7 +8061,7 @@
                 <a:ea typeface="Meiryo" pitchFamily="34" charset="-122"/>
                 <a:cs typeface="Meiryo" pitchFamily="34" charset="-120"/>
               </a:rPr>
-              <a:t>§1  背景と PoC のゴール</a:t>
+              <a:t>§1  背景と現状</a:t>
             </a:r>
             <a:endParaRPr lang="en-US" sz="2600" dirty="0"/>
           </a:p>
@@ -7645,7 +8230,7 @@
                 <a:ea typeface="Meiryo" pitchFamily="34" charset="-122"/>
                 <a:cs typeface="Meiryo" pitchFamily="34" charset="-120"/>
               </a:rPr>
-              <a:t>CPC 関連の論文・ラボ情報が散在</a:t>
+              <a:t>CPC 関連情報が論文・SNS・動画・解説記事に散在</a:t>
             </a:r>
             <a:endParaRPr lang="en-US" sz="1400" dirty="0"/>
           </a:p>
@@ -7666,7 +8251,7 @@
                 <a:ea typeface="Meiryo" pitchFamily="34" charset="-122"/>
                 <a:cs typeface="Meiryo" pitchFamily="34" charset="-120"/>
               </a:rPr>
-              <a:t>arxiv / 個別サイト / blog をまたぐ追跡コスト</a:t>
+              <a:t>arXiv / 個人 blog / YouTube / note をまたぐ追跡コスト</a:t>
             </a:r>
             <a:endParaRPr lang="en-US" sz="1400" dirty="0"/>
           </a:p>
@@ -7772,7 +8357,7 @@
                 <a:ea typeface="Meiryo" pitchFamily="34" charset="-122"/>
                 <a:cs typeface="Meiryo" pitchFamily="34" charset="-120"/>
               </a:rPr>
-              <a:t>PoC のゴール</a:t>
+              <a:t>現状（実装済み）</a:t>
             </a:r>
             <a:endParaRPr lang="en-US" sz="1400" dirty="0"/>
           </a:p>
@@ -7815,7 +8400,7 @@
                 <a:ea typeface="Meiryo" pitchFamily="34" charset="-122"/>
                 <a:cs typeface="Meiryo" pitchFamily="34" charset="-120"/>
               </a:rPr>
-              <a:t>1 箇所に集約された CPC リソース</a:t>
+              <a:t>1 箇所に集約された 5 系統のリソース</a:t>
             </a:r>
             <a:endParaRPr lang="en-US" sz="1400" dirty="0"/>
           </a:p>
@@ -7836,7 +8421,7 @@
                 <a:ea typeface="Meiryo" pitchFamily="34" charset="-122"/>
                 <a:cs typeface="Meiryo" pitchFamily="34" charset="-120"/>
               </a:rPr>
-              <a:t>EN / JA のバイリンガル提供</a:t>
+              <a:t>EN / JA バイリンガル対応</a:t>
             </a:r>
             <a:endParaRPr lang="en-US" sz="1400" dirty="0"/>
           </a:p>
@@ -7857,7 +8442,7 @@
                 <a:ea typeface="Meiryo" pitchFamily="34" charset="-122"/>
                 <a:cs typeface="Meiryo" pitchFamily="34" charset="-120"/>
               </a:rPr>
-              <a:t>新着論文を継続的にキャプチャ</a:t>
+              <a:t>YouTube・note の自動取り込み（1 時間毎）</a:t>
             </a:r>
             <a:endParaRPr lang="en-US" sz="1400" dirty="0"/>
           </a:p>
@@ -7878,7 +8463,7 @@
                 <a:ea typeface="Meiryo" pitchFamily="34" charset="-122"/>
                 <a:cs typeface="Meiryo" pitchFamily="34" charset="-120"/>
               </a:rPr>
-              <a:t>コミュニティ駆動 (OSS、Markdown 一次)</a:t>
+              <a:t>CPC ダイナミクスの SVG アニメーション</a:t>
             </a:r>
             <a:endParaRPr lang="en-US" sz="1400" dirty="0"/>
           </a:p>
@@ -7899,7 +8484,28 @@
                 <a:ea typeface="Meiryo" pitchFamily="34" charset="-122"/>
                 <a:cs typeface="Meiryo" pitchFamily="34" charset="-120"/>
               </a:rPr>
-              <a:t>「最小構成で全体が動く」ことを実証する</a:t>
+              <a:t>5 種すべてを横断する全文検索</a:t>
+            </a:r>
+            <a:endParaRPr lang="en-US" sz="1400" dirty="0"/>
+          </a:p>
+          <a:p>
+            <a:pPr marL="342900" indent="-342900">
+              <a:spcAft>
+                <a:spcPts val="800"/>
+              </a:spcAft>
+              <a:buSzPct val="100000"/>
+              <a:buChar char="■"/>
+            </a:pPr>
+            <a:r>
+              <a:rPr lang="en-US" sz="1400" dirty="0">
+                <a:solidFill>
+                  <a:srgbClr val="333333"/>
+                </a:solidFill>
+                <a:latin typeface="Meiryo" pitchFamily="34" charset="0"/>
+                <a:ea typeface="Meiryo" pitchFamily="34" charset="-122"/>
+                <a:cs typeface="Meiryo" pitchFamily="34" charset="-120"/>
+              </a:rPr>
+              <a:t>GitHub Private で運営、CC BY-NC 4.0</a:t>
             </a:r>
             <a:endParaRPr lang="en-US" sz="1400" dirty="0"/>
           </a:p>
@@ -7970,7 +8576,7 @@
                 <a:ea typeface="Meiryo" pitchFamily="34" charset="-122"/>
                 <a:cs typeface="Meiryo" pitchFamily="34" charset="-120"/>
               </a:rPr>
-              <a:t>§1  PoC のスコープ</a:t>
+              <a:t>§1  実装スコープ</a:t>
             </a:r>
             <a:endParaRPr lang="en-US" sz="2600" dirty="0"/>
           </a:p>
@@ -8096,7 +8702,7 @@
                 <a:ea typeface="Meiryo" pitchFamily="34" charset="-122"/>
                 <a:cs typeface="Meiryo" pitchFamily="34" charset="-120"/>
               </a:rPr>
-              <a:t>✓ やること</a:t>
+              <a:t>✓ 実装済み</a:t>
             </a:r>
             <a:endParaRPr lang="en-US" sz="1400" dirty="0"/>
           </a:p>
@@ -8125,149 +8731,191 @@
           <a:p>
             <a:pPr marL="342900" indent="-342900">
               <a:spcAft>
-                <a:spcPts val="800"/>
+                <a:spcPts val="400"/>
               </a:spcAft>
               <a:buSzPct val="100000"/>
               <a:buChar char="■"/>
             </a:pPr>
             <a:r>
-              <a:rPr lang="en-US" sz="1300" dirty="0">
-                <a:solidFill>
-                  <a:srgbClr val="333333"/>
-                </a:solidFill>
-                <a:latin typeface="Meiryo" pitchFamily="34" charset="0"/>
-                <a:ea typeface="Meiryo" pitchFamily="34" charset="-122"/>
-                <a:cs typeface="Meiryo" pitchFamily="34" charset="-120"/>
-              </a:rPr>
-              <a:t>論文 / ラボ / イベントの一覧 + 詳細ページ</a:t>
-            </a:r>
-            <a:endParaRPr lang="en-US" sz="1300" dirty="0"/>
+              <a:rPr lang="en-US" sz="1200" dirty="0">
+                <a:solidFill>
+                  <a:srgbClr val="333333"/>
+                </a:solidFill>
+                <a:latin typeface="Meiryo" pitchFamily="34" charset="0"/>
+                <a:ea typeface="Meiryo" pitchFamily="34" charset="-122"/>
+                <a:cs typeface="Meiryo" pitchFamily="34" charset="-120"/>
+              </a:rPr>
+              <a:t>5 コレクション一覧 + 詳細ページ</a:t>
+            </a:r>
+            <a:endParaRPr lang="en-US" sz="1200" dirty="0"/>
           </a:p>
           <a:p>
             <a:pPr marL="342900" indent="-342900">
               <a:spcAft>
-                <a:spcPts val="800"/>
+                <a:spcPts val="400"/>
               </a:spcAft>
               <a:buSzPct val="100000"/>
               <a:buChar char="■"/>
             </a:pPr>
             <a:r>
-              <a:rPr lang="en-US" sz="1300" dirty="0">
-                <a:solidFill>
-                  <a:srgbClr val="333333"/>
-                </a:solidFill>
-                <a:latin typeface="Meiryo" pitchFamily="34" charset="0"/>
-                <a:ea typeface="Meiryo" pitchFamily="34" charset="-122"/>
-                <a:cs typeface="Meiryo" pitchFamily="34" charset="-120"/>
-              </a:rPr>
-              <a:t>EN / JA 両言語切替</a:t>
-            </a:r>
-            <a:endParaRPr lang="en-US" sz="1300" dirty="0"/>
+              <a:rPr lang="en-US" sz="1200" dirty="0">
+                <a:solidFill>
+                  <a:srgbClr val="333333"/>
+                </a:solidFill>
+                <a:latin typeface="Meiryo" pitchFamily="34" charset="0"/>
+                <a:ea typeface="Meiryo" pitchFamily="34" charset="-122"/>
+                <a:cs typeface="Meiryo" pitchFamily="34" charset="-120"/>
+              </a:rPr>
+              <a:t>EN / JA 両言語切替（ホームナビ含む）</a:t>
+            </a:r>
+            <a:endParaRPr lang="en-US" sz="1200" dirty="0"/>
           </a:p>
           <a:p>
             <a:pPr marL="342900" indent="-342900">
               <a:spcAft>
-                <a:spcPts val="800"/>
+                <a:spcPts val="400"/>
               </a:spcAft>
               <a:buSzPct val="100000"/>
               <a:buChar char="■"/>
             </a:pPr>
             <a:r>
-              <a:rPr lang="en-US" sz="1300" dirty="0">
-                <a:solidFill>
-                  <a:srgbClr val="333333"/>
-                </a:solidFill>
-                <a:latin typeface="Meiryo" pitchFamily="34" charset="0"/>
-                <a:ea typeface="Meiryo" pitchFamily="34" charset="-122"/>
-                <a:cs typeface="Meiryo" pitchFamily="34" charset="-120"/>
-              </a:rPr>
-              <a:t>クライアントサイド全文検索</a:t>
-            </a:r>
-            <a:endParaRPr lang="en-US" sz="1300" dirty="0"/>
+              <a:rPr lang="en-US" sz="1200" dirty="0">
+                <a:solidFill>
+                  <a:srgbClr val="333333"/>
+                </a:solidFill>
+                <a:latin typeface="Meiryo" pitchFamily="34" charset="0"/>
+                <a:ea typeface="Meiryo" pitchFamily="34" charset="-122"/>
+                <a:cs typeface="Meiryo" pitchFamily="34" charset="-120"/>
+              </a:rPr>
+              <a:t>クライアントサイド全文検索（5 種対応）</a:t>
+            </a:r>
+            <a:endParaRPr lang="en-US" sz="1200" dirty="0"/>
           </a:p>
           <a:p>
             <a:pPr marL="342900" indent="-342900">
               <a:spcAft>
-                <a:spcPts val="800"/>
+                <a:spcPts val="400"/>
               </a:spcAft>
               <a:buSzPct val="100000"/>
               <a:buChar char="■"/>
             </a:pPr>
             <a:r>
-              <a:rPr lang="en-US" sz="1300" dirty="0">
-                <a:solidFill>
-                  <a:srgbClr val="333333"/>
-                </a:solidFill>
-                <a:latin typeface="Meiryo" pitchFamily="34" charset="0"/>
-                <a:ea typeface="Meiryo" pitchFamily="34" charset="-122"/>
-                <a:cs typeface="Meiryo" pitchFamily="34" charset="-120"/>
-              </a:rPr>
-              <a:t>arxiv 新着の自動発見 → GitHub Issue 化</a:t>
-            </a:r>
-            <a:endParaRPr lang="en-US" sz="1300" dirty="0"/>
+              <a:rPr lang="en-US" sz="1200" dirty="0">
+                <a:solidFill>
+                  <a:srgbClr val="333333"/>
+                </a:solidFill>
+                <a:latin typeface="Meiryo" pitchFamily="34" charset="0"/>
+                <a:ea typeface="Meiryo" pitchFamily="34" charset="-122"/>
+                <a:cs typeface="Meiryo" pitchFamily="34" charset="-120"/>
+              </a:rPr>
+              <a:t>YouTube Data API v3 → videos.json</a:t>
+            </a:r>
+            <a:endParaRPr lang="en-US" sz="1200" dirty="0"/>
           </a:p>
           <a:p>
             <a:pPr marL="342900" indent="-342900">
               <a:spcAft>
-                <a:spcPts val="800"/>
+                <a:spcPts val="400"/>
               </a:spcAft>
               <a:buSzPct val="100000"/>
               <a:buChar char="■"/>
             </a:pPr>
             <a:r>
-              <a:rPr lang="en-US" sz="1300" dirty="0">
-                <a:solidFill>
-                  <a:srgbClr val="333333"/>
-                </a:solidFill>
-                <a:latin typeface="Meiryo" pitchFamily="34" charset="0"/>
-                <a:ea typeface="Meiryo" pitchFamily="34" charset="-122"/>
-                <a:cs typeface="Meiryo" pitchFamily="34" charset="-120"/>
-              </a:rPr>
-              <a:t>Notion DB → Markdown 同期</a:t>
-            </a:r>
-            <a:endParaRPr lang="en-US" sz="1300" dirty="0"/>
+              <a:rPr lang="en-US" sz="1200" dirty="0">
+                <a:solidFill>
+                  <a:srgbClr val="333333"/>
+                </a:solidFill>
+                <a:latin typeface="Meiryo" pitchFamily="34" charset="0"/>
+                <a:ea typeface="Meiryo" pitchFamily="34" charset="-122"/>
+                <a:cs typeface="Meiryo" pitchFamily="34" charset="-120"/>
+              </a:rPr>
+              <a:t>note RSS → notes.json</a:t>
+            </a:r>
+            <a:endParaRPr lang="en-US" sz="1200" dirty="0"/>
           </a:p>
           <a:p>
             <a:pPr marL="342900" indent="-342900">
               <a:spcAft>
-                <a:spcPts val="800"/>
+                <a:spcPts val="400"/>
               </a:spcAft>
               <a:buSzPct val="100000"/>
               <a:buChar char="■"/>
             </a:pPr>
             <a:r>
-              <a:rPr lang="en-US" sz="1300" dirty="0">
-                <a:solidFill>
-                  <a:srgbClr val="333333"/>
-                </a:solidFill>
-                <a:latin typeface="Meiryo" pitchFamily="34" charset="0"/>
-                <a:ea typeface="Meiryo" pitchFamily="34" charset="-122"/>
-                <a:cs typeface="Meiryo" pitchFamily="34" charset="-120"/>
-              </a:rPr>
-              <a:t>X 共有ボタン</a:t>
-            </a:r>
-            <a:endParaRPr lang="en-US" sz="1300" dirty="0"/>
+              <a:rPr lang="en-US" sz="1200" dirty="0">
+                <a:solidFill>
+                  <a:srgbClr val="333333"/>
+                </a:solidFill>
+                <a:latin typeface="Meiryo" pitchFamily="34" charset="0"/>
+                <a:ea typeface="Meiryo" pitchFamily="34" charset="-122"/>
+                <a:cs typeface="Meiryo" pitchFamily="34" charset="-120"/>
+              </a:rPr>
+              <a:t>launchd で 1 時間ごと自動再ビルド</a:t>
+            </a:r>
+            <a:endParaRPr lang="en-US" sz="1200" dirty="0"/>
           </a:p>
           <a:p>
             <a:pPr marL="342900" indent="-342900">
               <a:spcAft>
-                <a:spcPts val="800"/>
+                <a:spcPts val="400"/>
               </a:spcAft>
               <a:buSzPct val="100000"/>
               <a:buChar char="■"/>
             </a:pPr>
             <a:r>
-              <a:rPr lang="en-US" sz="1300" dirty="0">
-                <a:solidFill>
-                  <a:srgbClr val="333333"/>
-                </a:solidFill>
-                <a:latin typeface="Meiryo" pitchFamily="34" charset="0"/>
-                <a:ea typeface="Meiryo" pitchFamily="34" charset="-122"/>
-                <a:cs typeface="Meiryo" pitchFamily="34" charset="-120"/>
-              </a:rPr>
-              <a:t>X / Bluesky への半自動投稿 (草稿生成)</a:t>
-            </a:r>
-            <a:endParaRPr lang="en-US" sz="1300" dirty="0"/>
+              <a:rPr lang="en-US" sz="1200" dirty="0">
+                <a:solidFill>
+                  <a:srgbClr val="333333"/>
+                </a:solidFill>
+                <a:latin typeface="Meiryo" pitchFamily="34" charset="0"/>
+                <a:ea typeface="Meiryo" pitchFamily="34" charset="-122"/>
+                <a:cs typeface="Meiryo" pitchFamily="34" charset="-120"/>
+              </a:rPr>
+              <a:t>X CTA カード（サイドバー）</a:t>
+            </a:r>
+            <a:endParaRPr lang="en-US" sz="1200" dirty="0"/>
+          </a:p>
+          <a:p>
+            <a:pPr marL="342900" indent="-342900">
+              <a:spcAft>
+                <a:spcPts val="400"/>
+              </a:spcAft>
+              <a:buSzPct val="100000"/>
+              <a:buChar char="■"/>
+            </a:pPr>
+            <a:r>
+              <a:rPr lang="en-US" sz="1200" dirty="0">
+                <a:solidFill>
+                  <a:srgbClr val="333333"/>
+                </a:solidFill>
+                <a:latin typeface="Meiryo" pitchFamily="34" charset="0"/>
+                <a:ea typeface="Meiryo" pitchFamily="34" charset="-122"/>
+                <a:cs typeface="Meiryo" pitchFamily="34" charset="-120"/>
+              </a:rPr>
+              <a:t>CPC SVG ダイナミクスアニメーション</a:t>
+            </a:r>
+            <a:endParaRPr lang="en-US" sz="1200" dirty="0"/>
+          </a:p>
+          <a:p>
+            <a:pPr marL="342900" indent="-342900">
+              <a:spcAft>
+                <a:spcPts val="400"/>
+              </a:spcAft>
+              <a:buSzPct val="100000"/>
+              <a:buChar char="■"/>
+            </a:pPr>
+            <a:r>
+              <a:rPr lang="en-US" sz="1200" dirty="0">
+                <a:solidFill>
+                  <a:srgbClr val="333333"/>
+                </a:solidFill>
+                <a:latin typeface="Meiryo" pitchFamily="34" charset="0"/>
+                <a:ea typeface="Meiryo" pitchFamily="34" charset="-122"/>
+                <a:cs typeface="Meiryo" pitchFamily="34" charset="-120"/>
+              </a:rPr>
+              <a:t>共有ボタン（X / Bluesky / コピー）</a:t>
+            </a:r>
+            <a:endParaRPr lang="en-US" sz="1200" dirty="0"/>
           </a:p>
         </p:txBody>
       </p:sp>
@@ -8329,7 +8977,7 @@
                 <a:ea typeface="Meiryo" pitchFamily="34" charset="-122"/>
                 <a:cs typeface="Meiryo" pitchFamily="34" charset="-120"/>
               </a:rPr>
-              <a:t>✗ やらないこと  (PoC スコープ外)</a:t>
+              <a:t>◯ 未実装 / 将来検討</a:t>
             </a:r>
             <a:endParaRPr lang="en-US" sz="1400" dirty="0"/>
           </a:p>
@@ -8358,149 +9006,191 @@
           <a:p>
             <a:pPr marL="342900" indent="-342900">
               <a:spcAft>
-                <a:spcPts val="800"/>
+                <a:spcPts val="400"/>
               </a:spcAft>
               <a:buSzPct val="100000"/>
               <a:buChar char="■"/>
             </a:pPr>
             <a:r>
-              <a:rPr lang="en-US" sz="1300" dirty="0">
-                <a:solidFill>
-                  <a:srgbClr val="333333"/>
-                </a:solidFill>
-                <a:latin typeface="Meiryo" pitchFamily="34" charset="0"/>
-                <a:ea typeface="Meiryo" pitchFamily="34" charset="-122"/>
-                <a:cs typeface="Meiryo" pitchFamily="34" charset="-120"/>
-              </a:rPr>
-              <a:t>認証・ユーザー管理</a:t>
-            </a:r>
-            <a:endParaRPr lang="en-US" sz="1300" dirty="0"/>
+              <a:rPr lang="en-US" sz="1200" dirty="0">
+                <a:solidFill>
+                  <a:srgbClr val="333333"/>
+                </a:solidFill>
+                <a:latin typeface="Meiryo" pitchFamily="34" charset="0"/>
+                <a:ea typeface="Meiryo" pitchFamily="34" charset="-122"/>
+                <a:cs typeface="Meiryo" pitchFamily="34" charset="-120"/>
+              </a:rPr>
+              <a:t>Notion DB → Markdown 同期（将来）</a:t>
+            </a:r>
+            <a:endParaRPr lang="en-US" sz="1200" dirty="0"/>
           </a:p>
           <a:p>
             <a:pPr marL="342900" indent="-342900">
               <a:spcAft>
-                <a:spcPts val="800"/>
+                <a:spcPts val="400"/>
               </a:spcAft>
               <a:buSzPct val="100000"/>
               <a:buChar char="■"/>
             </a:pPr>
             <a:r>
-              <a:rPr lang="en-US" sz="1300" dirty="0">
-                <a:solidFill>
-                  <a:srgbClr val="333333"/>
-                </a:solidFill>
-                <a:latin typeface="Meiryo" pitchFamily="34" charset="0"/>
-                <a:ea typeface="Meiryo" pitchFamily="34" charset="-122"/>
-                <a:cs typeface="Meiryo" pitchFamily="34" charset="-120"/>
-              </a:rPr>
-              <a:t>全文翻訳の自動化</a:t>
-            </a:r>
-            <a:endParaRPr lang="en-US" sz="1300" dirty="0"/>
+              <a:rPr lang="en-US" sz="1200" dirty="0">
+                <a:solidFill>
+                  <a:srgbClr val="333333"/>
+                </a:solidFill>
+                <a:latin typeface="Meiryo" pitchFamily="34" charset="0"/>
+                <a:ea typeface="Meiryo" pitchFamily="34" charset="-122"/>
+                <a:cs typeface="Meiryo" pitchFamily="34" charset="-120"/>
+              </a:rPr>
+              <a:t>arXiv 自動発見・Issue 化（将来）</a:t>
+            </a:r>
+            <a:endParaRPr lang="en-US" sz="1200" dirty="0"/>
           </a:p>
           <a:p>
             <a:pPr marL="342900" indent="-342900">
               <a:spcAft>
-                <a:spcPts val="800"/>
+                <a:spcPts val="400"/>
               </a:spcAft>
               <a:buSzPct val="100000"/>
               <a:buChar char="■"/>
             </a:pPr>
             <a:r>
-              <a:rPr lang="en-US" sz="1300" dirty="0">
-                <a:solidFill>
-                  <a:srgbClr val="333333"/>
-                </a:solidFill>
-                <a:latin typeface="Meiryo" pitchFamily="34" charset="0"/>
-                <a:ea typeface="Meiryo" pitchFamily="34" charset="-122"/>
-                <a:cs typeface="Meiryo" pitchFamily="34" charset="-120"/>
-              </a:rPr>
-              <a:t>カスタムビジュアルデザイン</a:t>
-            </a:r>
-            <a:endParaRPr lang="en-US" sz="1300" dirty="0"/>
+              <a:rPr lang="en-US" sz="1200" dirty="0">
+                <a:solidFill>
+                  <a:srgbClr val="333333"/>
+                </a:solidFill>
+                <a:latin typeface="Meiryo" pitchFamily="34" charset="0"/>
+                <a:ea typeface="Meiryo" pitchFamily="34" charset="-122"/>
+                <a:cs typeface="Meiryo" pitchFamily="34" charset="-120"/>
+              </a:rPr>
+              <a:t>Issue Form での外部貢献受付</a:t>
+            </a:r>
+            <a:endParaRPr lang="en-US" sz="1200" dirty="0"/>
           </a:p>
           <a:p>
             <a:pPr marL="342900" indent="-342900">
               <a:spcAft>
-                <a:spcPts val="800"/>
+                <a:spcPts val="400"/>
               </a:spcAft>
               <a:buSzPct val="100000"/>
               <a:buChar char="■"/>
             </a:pPr>
             <a:r>
-              <a:rPr lang="en-US" sz="1300" dirty="0">
-                <a:solidFill>
-                  <a:srgbClr val="333333"/>
-                </a:solidFill>
-                <a:latin typeface="Meiryo" pitchFamily="34" charset="0"/>
-                <a:ea typeface="Meiryo" pitchFamily="34" charset="-122"/>
-                <a:cs typeface="Meiryo" pitchFamily="34" charset="-120"/>
-              </a:rPr>
-              <a:t>アクセス解析・SEO 最適化</a:t>
-            </a:r>
-            <a:endParaRPr lang="en-US" sz="1300" dirty="0"/>
+              <a:rPr lang="en-US" sz="1200" dirty="0">
+                <a:solidFill>
+                  <a:srgbClr val="333333"/>
+                </a:solidFill>
+                <a:latin typeface="Meiryo" pitchFamily="34" charset="0"/>
+                <a:ea typeface="Meiryo" pitchFamily="34" charset="-122"/>
+                <a:cs typeface="Meiryo" pitchFamily="34" charset="-120"/>
+              </a:rPr>
+              <a:t>Vercel / Cloudflare Pages デプロイ</a:t>
+            </a:r>
+            <a:endParaRPr lang="en-US" sz="1200" dirty="0"/>
           </a:p>
           <a:p>
             <a:pPr marL="342900" indent="-342900">
               <a:spcAft>
-                <a:spcPts val="800"/>
+                <a:spcPts val="400"/>
               </a:spcAft>
               <a:buSzPct val="100000"/>
               <a:buChar char="■"/>
             </a:pPr>
             <a:r>
-              <a:rPr lang="en-US" sz="1300" dirty="0">
-                <a:solidFill>
-                  <a:srgbClr val="333333"/>
-                </a:solidFill>
-                <a:latin typeface="Meiryo" pitchFamily="34" charset="0"/>
-                <a:ea typeface="Meiryo" pitchFamily="34" charset="-122"/>
-                <a:cs typeface="Meiryo" pitchFamily="34" charset="-120"/>
-              </a:rPr>
-              <a:t>自動テスト</a:t>
-            </a:r>
-            <a:endParaRPr lang="en-US" sz="1300" dirty="0"/>
+              <a:rPr lang="en-US" sz="1200" dirty="0">
+                <a:solidFill>
+                  <a:srgbClr val="333333"/>
+                </a:solidFill>
+                <a:latin typeface="Meiryo" pitchFamily="34" charset="0"/>
+                <a:ea typeface="Meiryo" pitchFamily="34" charset="-122"/>
+                <a:cs typeface="Meiryo" pitchFamily="34" charset="-120"/>
+              </a:rPr>
+              <a:t>アクセス解析（Cloudflare Web Analytics 等）</a:t>
+            </a:r>
+            <a:endParaRPr lang="en-US" sz="1200" dirty="0"/>
           </a:p>
           <a:p>
             <a:pPr marL="342900" indent="-342900">
               <a:spcAft>
-                <a:spcPts val="800"/>
+                <a:spcPts val="400"/>
               </a:spcAft>
               <a:buSzPct val="100000"/>
               <a:buChar char="■"/>
             </a:pPr>
             <a:r>
-              <a:rPr lang="en-US" sz="1300" dirty="0">
-                <a:solidFill>
-                  <a:srgbClr val="333333"/>
-                </a:solidFill>
-                <a:latin typeface="Meiryo" pitchFamily="34" charset="0"/>
-                <a:ea typeface="Meiryo" pitchFamily="34" charset="-122"/>
-                <a:cs typeface="Meiryo" pitchFamily="34" charset="-120"/>
-              </a:rPr>
-              <a:t>ニュースレター / X の完全自動配信</a:t>
-            </a:r>
-            <a:endParaRPr lang="en-US" sz="1300" dirty="0"/>
+              <a:rPr lang="en-US" sz="1200" dirty="0">
+                <a:solidFill>
+                  <a:srgbClr val="333333"/>
+                </a:solidFill>
+                <a:latin typeface="Meiryo" pitchFamily="34" charset="0"/>
+                <a:ea typeface="Meiryo" pitchFamily="34" charset="-122"/>
+                <a:cs typeface="Meiryo" pitchFamily="34" charset="-120"/>
+              </a:rPr>
+              <a:t>認証・ユーザー管理（不要の方針）</a:t>
+            </a:r>
+            <a:endParaRPr lang="en-US" sz="1200" dirty="0"/>
           </a:p>
           <a:p>
             <a:pPr marL="342900" indent="-342900">
               <a:spcAft>
-                <a:spcPts val="800"/>
+                <a:spcPts val="400"/>
               </a:spcAft>
               <a:buSzPct val="100000"/>
               <a:buChar char="■"/>
             </a:pPr>
             <a:r>
-              <a:rPr lang="en-US" sz="1300" dirty="0">
-                <a:solidFill>
-                  <a:srgbClr val="333333"/>
-                </a:solidFill>
-                <a:latin typeface="Meiryo" pitchFamily="34" charset="0"/>
-                <a:ea typeface="Meiryo" pitchFamily="34" charset="-122"/>
-                <a:cs typeface="Meiryo" pitchFamily="34" charset="-120"/>
-              </a:rPr>
-              <a:t>実コンテンツの大量投入 (Phase 後半)</a:t>
-            </a:r>
-            <a:endParaRPr lang="en-US" sz="1300" dirty="0"/>
+              <a:rPr lang="en-US" sz="1200" dirty="0">
+                <a:solidFill>
+                  <a:srgbClr val="333333"/>
+                </a:solidFill>
+                <a:latin typeface="Meiryo" pitchFamily="34" charset="0"/>
+                <a:ea typeface="Meiryo" pitchFamily="34" charset="-122"/>
+                <a:cs typeface="Meiryo" pitchFamily="34" charset="-120"/>
+              </a:rPr>
+              <a:t>全文翻訳の自動化</a:t>
+            </a:r>
+            <a:endParaRPr lang="en-US" sz="1200" dirty="0"/>
+          </a:p>
+          <a:p>
+            <a:pPr marL="342900" indent="-342900">
+              <a:spcAft>
+                <a:spcPts val="400"/>
+              </a:spcAft>
+              <a:buSzPct val="100000"/>
+              <a:buChar char="■"/>
+            </a:pPr>
+            <a:r>
+              <a:rPr lang="en-US" sz="1200" dirty="0">
+                <a:solidFill>
+                  <a:srgbClr val="333333"/>
+                </a:solidFill>
+                <a:latin typeface="Meiryo" pitchFamily="34" charset="0"/>
+                <a:ea typeface="Meiryo" pitchFamily="34" charset="-122"/>
+                <a:cs typeface="Meiryo" pitchFamily="34" charset="-120"/>
+              </a:rPr>
+              <a:t>Pagefind 高度検索（コレクション増加時）</a:t>
+            </a:r>
+            <a:endParaRPr lang="en-US" sz="1200" dirty="0"/>
+          </a:p>
+          <a:p>
+            <a:pPr marL="342900" indent="-342900">
+              <a:spcAft>
+                <a:spcPts val="400"/>
+              </a:spcAft>
+              <a:buSzPct val="100000"/>
+              <a:buChar char="■"/>
+            </a:pPr>
+            <a:r>
+              <a:rPr lang="en-US" sz="1200" dirty="0">
+                <a:solidFill>
+                  <a:srgbClr val="333333"/>
+                </a:solidFill>
+                <a:latin typeface="Meiryo" pitchFamily="34" charset="0"/>
+                <a:ea typeface="Meiryo" pitchFamily="34" charset="-122"/>
+                <a:cs typeface="Meiryo" pitchFamily="34" charset="-120"/>
+              </a:rPr>
+              <a:t>X タイムライン埋め込み（X 側仕様で断念）</a:t>
+            </a:r>
+            <a:endParaRPr lang="en-US" sz="1200" dirty="0"/>
           </a:p>
         </p:txBody>
       </p:sp>
@@ -8652,7 +9342,7 @@
           </p:nvPr>
         </p:nvGraphicFramePr>
         <p:xfrm>
-          <a:off x="548640" y="1051560"/>
+          <a:off x="548640" y="1005840"/>
           <a:ext cx="8046720" cy="914400"/>
         </p:xfrm>
         <a:graphic>
@@ -8661,10 +9351,10 @@
               <a:tblPr/>
               <a:tblGrid>
                 <a:gridCol w="1371600"/>
-                <a:gridCol w="3200400"/>
-                <a:gridCol w="3474720"/>
+                <a:gridCol w="3017520"/>
+                <a:gridCol w="3657600"/>
               </a:tblGrid>
-              <a:tr h="411480">
+              <a:tr h="347472">
                 <a:tc>
                   <a:txBody>
                     <a:bodyPr/>
@@ -8674,7 +9364,7 @@
                         <a:buNone/>
                       </a:pPr>
                       <a:r>
-                        <a:rPr lang="en-US" sz="1100" b="1" dirty="0">
+                        <a:rPr lang="en-US" sz="1000" b="1" dirty="0">
                           <a:solidFill>
                             <a:srgbClr val="FFFFFF"/>
                           </a:solidFill>
@@ -8684,7 +9374,7 @@
                         </a:rPr>
                         <a:t>レイヤー</a:t>
                       </a:r>
-                      <a:endParaRPr lang="en-US" sz="1100" dirty="0">
+                      <a:endParaRPr lang="en-US" sz="1000" dirty="0">
                         <a:latin typeface="Meiryo" charset="0"/>
                         <a:ea typeface="Meiryo" charset="0"/>
                         <a:cs typeface="Meiryo" charset="0"/>
@@ -8742,7 +9432,7 @@
                         <a:buNone/>
                       </a:pPr>
                       <a:r>
-                        <a:rPr lang="en-US" sz="1100" b="1" dirty="0">
+                        <a:rPr lang="en-US" sz="1000" b="1" dirty="0">
                           <a:solidFill>
                             <a:srgbClr val="FFFFFF"/>
                           </a:solidFill>
@@ -8752,7 +9442,7 @@
                         </a:rPr>
                         <a:t>採用技術</a:t>
                       </a:r>
-                      <a:endParaRPr lang="en-US" sz="1100" dirty="0">
+                      <a:endParaRPr lang="en-US" sz="1000" dirty="0">
                         <a:latin typeface="Meiryo" charset="0"/>
                         <a:ea typeface="Meiryo" charset="0"/>
                         <a:cs typeface="Meiryo" charset="0"/>
@@ -8810,7 +9500,7 @@
                         <a:buNone/>
                       </a:pPr>
                       <a:r>
-                        <a:rPr lang="en-US" sz="1100" b="1" dirty="0">
+                        <a:rPr lang="en-US" sz="1000" b="1" dirty="0">
                           <a:solidFill>
                             <a:srgbClr val="FFFFFF"/>
                           </a:solidFill>
@@ -8818,9 +9508,9 @@
                           <a:ea typeface="Meiryo" pitchFamily="34" charset="-122"/>
                           <a:cs typeface="Meiryo" pitchFamily="34" charset="-120"/>
                         </a:rPr>
-                        <a:t>選定理由</a:t>
+                        <a:t>選定理由 / 現状</a:t>
                       </a:r>
-                      <a:endParaRPr lang="en-US" sz="1100" dirty="0">
+                      <a:endParaRPr lang="en-US" sz="1000" dirty="0">
                         <a:latin typeface="Meiryo" charset="0"/>
                         <a:ea typeface="Meiryo" charset="0"/>
                         <a:cs typeface="Meiryo" charset="0"/>
@@ -8870,7 +9560,7 @@
                   </a:tcPr>
                 </a:tc>
               </a:tr>
-              <a:tr h="411480">
+              <a:tr h="347472">
                 <a:tc>
                   <a:txBody>
                     <a:bodyPr/>
@@ -8880,7 +9570,7 @@
                         <a:buNone/>
                       </a:pPr>
                       <a:r>
-                        <a:rPr lang="en-US" sz="1100" dirty="0">
+                        <a:rPr lang="en-US" sz="1000" dirty="0">
                           <a:solidFill>
                             <a:srgbClr val="333333"/>
                           </a:solidFill>
@@ -8890,7 +9580,7 @@
                         </a:rPr>
                         <a:t>サイト</a:t>
                       </a:r>
-                      <a:endParaRPr lang="en-US" sz="1100" dirty="0">
+                      <a:endParaRPr lang="en-US" sz="1000" dirty="0">
                         <a:latin typeface="Meiryo" charset="0"/>
                         <a:ea typeface="Meiryo" charset="0"/>
                         <a:cs typeface="Meiryo" charset="0"/>
@@ -8948,7 +9638,7 @@
                         <a:buNone/>
                       </a:pPr>
                       <a:r>
-                        <a:rPr lang="en-US" sz="1100" dirty="0">
+                        <a:rPr lang="en-US" sz="1000" dirty="0">
                           <a:solidFill>
                             <a:srgbClr val="333333"/>
                           </a:solidFill>
@@ -8958,7 +9648,7 @@
                         </a:rPr>
                         <a:t>Astro 5 (SSG) + Tailwind CSS 3</a:t>
                       </a:r>
-                      <a:endParaRPr lang="en-US" sz="1100" dirty="0">
+                      <a:endParaRPr lang="en-US" sz="1000" dirty="0">
                         <a:latin typeface="Meiryo" charset="0"/>
                         <a:ea typeface="Meiryo" charset="0"/>
                         <a:cs typeface="Meiryo" charset="0"/>
@@ -9016,7 +9706,7 @@
                         <a:buNone/>
                       </a:pPr>
                       <a:r>
-                        <a:rPr lang="en-US" sz="1100" dirty="0">
+                        <a:rPr lang="en-US" sz="1000" dirty="0">
                           <a:solidFill>
                             <a:srgbClr val="333333"/>
                           </a:solidFill>
@@ -9026,7 +9716,7 @@
                         </a:rPr>
                         <a:t>高速・SEO 良・i18n 標準対応</a:t>
                       </a:r>
-                      <a:endParaRPr lang="en-US" sz="1100" dirty="0">
+                      <a:endParaRPr lang="en-US" sz="1000" dirty="0">
                         <a:latin typeface="Meiryo" charset="0"/>
                         <a:ea typeface="Meiryo" charset="0"/>
                         <a:cs typeface="Meiryo" charset="0"/>
@@ -9076,7 +9766,7 @@
                   </a:tcPr>
                 </a:tc>
               </a:tr>
-              <a:tr h="411480">
+              <a:tr h="347472">
                 <a:tc>
                   <a:txBody>
                     <a:bodyPr/>
@@ -9086,7 +9776,7 @@
                         <a:buNone/>
                       </a:pPr>
                       <a:r>
-                        <a:rPr lang="en-US" sz="1100" dirty="0">
+                        <a:rPr lang="en-US" sz="1000" dirty="0">
                           <a:solidFill>
                             <a:srgbClr val="333333"/>
                           </a:solidFill>
@@ -9096,7 +9786,7 @@
                         </a:rPr>
                         <a:t>コンテンツ</a:t>
                       </a:r>
-                      <a:endParaRPr lang="en-US" sz="1100" dirty="0">
+                      <a:endParaRPr lang="en-US" sz="1000" dirty="0">
                         <a:latin typeface="Meiryo" charset="0"/>
                         <a:ea typeface="Meiryo" charset="0"/>
                         <a:cs typeface="Meiryo" charset="0"/>
@@ -9154,7 +9844,7 @@
                         <a:buNone/>
                       </a:pPr>
                       <a:r>
-                        <a:rPr lang="en-US" sz="1100" dirty="0">
+                        <a:rPr lang="en-US" sz="1000" dirty="0">
                           <a:solidFill>
                             <a:srgbClr val="333333"/>
                           </a:solidFill>
@@ -9162,9 +9852,9 @@
                           <a:ea typeface="Meiryo" pitchFamily="34" charset="-122"/>
                           <a:cs typeface="Meiryo" pitchFamily="34" charset="-120"/>
                         </a:rPr>
-                        <a:t>Markdown + Astro Content Collections (glob loader)</a:t>
+                        <a:t>Markdown + Astro Content Collections</a:t>
                       </a:r>
-                      <a:endParaRPr lang="en-US" sz="1100" dirty="0">
+                      <a:endParaRPr lang="en-US" sz="1000" dirty="0">
                         <a:latin typeface="Meiryo" charset="0"/>
                         <a:ea typeface="Meiryo" charset="0"/>
                         <a:cs typeface="Meiryo" charset="0"/>
@@ -9222,7 +9912,7 @@
                         <a:buNone/>
                       </a:pPr>
                       <a:r>
-                        <a:rPr lang="en-US" sz="1100" dirty="0">
+                        <a:rPr lang="en-US" sz="1000" dirty="0">
                           <a:solidFill>
                             <a:srgbClr val="333333"/>
                           </a:solidFill>
@@ -9230,9 +9920,9 @@
                           <a:ea typeface="Meiryo" pitchFamily="34" charset="-122"/>
                           <a:cs typeface="Meiryo" pitchFamily="34" charset="-120"/>
                         </a:rPr>
-                        <a:t>ベンダーロックなし、git 管理</a:t>
+                        <a:t>papers / labs / events を git 管理</a:t>
                       </a:r>
-                      <a:endParaRPr lang="en-US" sz="1100" dirty="0">
+                      <a:endParaRPr lang="en-US" sz="1000" dirty="0">
                         <a:latin typeface="Meiryo" charset="0"/>
                         <a:ea typeface="Meiryo" charset="0"/>
                         <a:cs typeface="Meiryo" charset="0"/>
@@ -9282,7 +9972,7 @@
                   </a:tcPr>
                 </a:tc>
               </a:tr>
-              <a:tr h="411480">
+              <a:tr h="347472">
                 <a:tc>
                   <a:txBody>
                     <a:bodyPr/>
@@ -9292,7 +9982,7 @@
                         <a:buNone/>
                       </a:pPr>
                       <a:r>
-                        <a:rPr lang="en-US" sz="1100" dirty="0">
+                        <a:rPr lang="en-US" sz="1000" dirty="0">
                           <a:solidFill>
                             <a:srgbClr val="333333"/>
                           </a:solidFill>
@@ -9300,9 +9990,9 @@
                           <a:ea typeface="Meiryo" pitchFamily="34" charset="-122"/>
                           <a:cs typeface="Meiryo" pitchFamily="34" charset="-120"/>
                         </a:rPr>
-                        <a:t>i18n</a:t>
+                        <a:t>外部取り込み</a:t>
                       </a:r>
-                      <a:endParaRPr lang="en-US" sz="1100" dirty="0">
+                      <a:endParaRPr lang="en-US" sz="1000" dirty="0">
                         <a:latin typeface="Meiryo" charset="0"/>
                         <a:ea typeface="Meiryo" charset="0"/>
                         <a:cs typeface="Meiryo" charset="0"/>
@@ -9360,7 +10050,7 @@
                         <a:buNone/>
                       </a:pPr>
                       <a:r>
-                        <a:rPr lang="en-US" sz="1100" dirty="0">
+                        <a:rPr lang="en-US" sz="1000" dirty="0">
                           <a:solidFill>
                             <a:srgbClr val="333333"/>
                           </a:solidFill>
@@ -9368,9 +10058,9 @@
                           <a:ea typeface="Meiryo" pitchFamily="34" charset="-122"/>
                           <a:cs typeface="Meiryo" pitchFamily="34" charset="-120"/>
                         </a:rPr>
-                        <a:t>Astro 標準 i18n (en / ja)</a:t>
+                        <a:t>Node + fetch (YouTube API v3 / note RSS)</a:t>
                       </a:r>
-                      <a:endParaRPr lang="en-US" sz="1100" dirty="0">
+                      <a:endParaRPr lang="en-US" sz="1000" dirty="0">
                         <a:latin typeface="Meiryo" charset="0"/>
                         <a:ea typeface="Meiryo" charset="0"/>
                         <a:cs typeface="Meiryo" charset="0"/>
@@ -9428,7 +10118,7 @@
                         <a:buNone/>
                       </a:pPr>
                       <a:r>
-                        <a:rPr lang="en-US" sz="1100" dirty="0">
+                        <a:rPr lang="en-US" sz="1000" dirty="0">
                           <a:solidFill>
                             <a:srgbClr val="333333"/>
                           </a:solidFill>
@@ -9436,9 +10126,9 @@
                           <a:ea typeface="Meiryo" pitchFamily="34" charset="-122"/>
                           <a:cs typeface="Meiryo" pitchFamily="34" charset="-120"/>
                         </a:rPr>
-                        <a:t>prefixDefaultLocale で両言語明示</a:t>
+                        <a:t>src/data/videos.json と notes.json に保存</a:t>
                       </a:r>
-                      <a:endParaRPr lang="en-US" sz="1100" dirty="0">
+                      <a:endParaRPr lang="en-US" sz="1000" dirty="0">
                         <a:latin typeface="Meiryo" charset="0"/>
                         <a:ea typeface="Meiryo" charset="0"/>
                         <a:cs typeface="Meiryo" charset="0"/>
@@ -9488,7 +10178,7 @@
                   </a:tcPr>
                 </a:tc>
               </a:tr>
-              <a:tr h="411480">
+              <a:tr h="347472">
                 <a:tc>
                   <a:txBody>
                     <a:bodyPr/>
@@ -9498,7 +10188,7 @@
                         <a:buNone/>
                       </a:pPr>
                       <a:r>
-                        <a:rPr lang="en-US" sz="1100" dirty="0">
+                        <a:rPr lang="en-US" sz="1000" dirty="0">
                           <a:solidFill>
                             <a:srgbClr val="333333"/>
                           </a:solidFill>
@@ -9506,9 +10196,9 @@
                           <a:ea typeface="Meiryo" pitchFamily="34" charset="-122"/>
                           <a:cs typeface="Meiryo" pitchFamily="34" charset="-120"/>
                         </a:rPr>
-                        <a:t>編集 UI</a:t>
+                        <a:t>i18n</a:t>
                       </a:r>
-                      <a:endParaRPr lang="en-US" sz="1100" dirty="0">
+                      <a:endParaRPr lang="en-US" sz="1000" dirty="0">
                         <a:latin typeface="Meiryo" charset="0"/>
                         <a:ea typeface="Meiryo" charset="0"/>
                         <a:cs typeface="Meiryo" charset="0"/>
@@ -9566,7 +10256,7 @@
                         <a:buNone/>
                       </a:pPr>
                       <a:r>
-                        <a:rPr lang="en-US" sz="1100" dirty="0">
+                        <a:rPr lang="en-US" sz="1000" dirty="0">
                           <a:solidFill>
                             <a:srgbClr val="333333"/>
                           </a:solidFill>
@@ -9574,9 +10264,9 @@
                           <a:ea typeface="Meiryo" pitchFamily="34" charset="-122"/>
                           <a:cs typeface="Meiryo" pitchFamily="34" charset="-120"/>
                         </a:rPr>
-                        <a:t>Notion DB → sync スクリプト</a:t>
+                        <a:t>Astro 標準 i18n (en / ja)</a:t>
                       </a:r>
-                      <a:endParaRPr lang="en-US" sz="1100" dirty="0">
+                      <a:endParaRPr lang="en-US" sz="1000" dirty="0">
                         <a:latin typeface="Meiryo" charset="0"/>
                         <a:ea typeface="Meiryo" charset="0"/>
                         <a:cs typeface="Meiryo" charset="0"/>
@@ -9634,7 +10324,7 @@
                         <a:buNone/>
                       </a:pPr>
                       <a:r>
-                        <a:rPr lang="en-US" sz="1100" dirty="0">
+                        <a:rPr lang="en-US" sz="1000" dirty="0">
                           <a:solidFill>
                             <a:srgbClr val="333333"/>
                           </a:solidFill>
@@ -9642,9 +10332,9 @@
                           <a:ea typeface="Meiryo" pitchFamily="34" charset="-122"/>
                           <a:cs typeface="Meiryo" pitchFamily="34" charset="-120"/>
                         </a:rPr>
-                        <a:t>編集摩擦最小、multi-select で typed</a:t>
+                        <a:t>prefixDefaultLocale: true</a:t>
                       </a:r>
-                      <a:endParaRPr lang="en-US" sz="1100" dirty="0">
+                      <a:endParaRPr lang="en-US" sz="1000" dirty="0">
                         <a:latin typeface="Meiryo" charset="0"/>
                         <a:ea typeface="Meiryo" charset="0"/>
                         <a:cs typeface="Meiryo" charset="0"/>
@@ -9694,7 +10384,7 @@
                   </a:tcPr>
                 </a:tc>
               </a:tr>
-              <a:tr h="411480">
+              <a:tr h="347472">
                 <a:tc>
                   <a:txBody>
                     <a:bodyPr/>
@@ -9704,7 +10394,7 @@
                         <a:buNone/>
                       </a:pPr>
                       <a:r>
-                        <a:rPr lang="en-US" sz="1100" dirty="0">
+                        <a:rPr lang="en-US" sz="1000" dirty="0">
                           <a:solidFill>
                             <a:srgbClr val="333333"/>
                           </a:solidFill>
@@ -9712,9 +10402,9 @@
                           <a:ea typeface="Meiryo" pitchFamily="34" charset="-122"/>
                           <a:cs typeface="Meiryo" pitchFamily="34" charset="-120"/>
                         </a:rPr>
-                        <a:t>ホスティング</a:t>
+                        <a:t>自動化</a:t>
                       </a:r>
-                      <a:endParaRPr lang="en-US" sz="1100" dirty="0">
+                      <a:endParaRPr lang="en-US" sz="1000" dirty="0">
                         <a:latin typeface="Meiryo" charset="0"/>
                         <a:ea typeface="Meiryo" charset="0"/>
                         <a:cs typeface="Meiryo" charset="0"/>
@@ -9772,7 +10462,7 @@
                         <a:buNone/>
                       </a:pPr>
                       <a:r>
-                        <a:rPr lang="en-US" sz="1100" dirty="0">
+                        <a:rPr lang="en-US" sz="1000" dirty="0">
                           <a:solidFill>
                             <a:srgbClr val="333333"/>
                           </a:solidFill>
@@ -9780,9 +10470,9 @@
                           <a:ea typeface="Meiryo" pitchFamily="34" charset="-122"/>
                           <a:cs typeface="Meiryo" pitchFamily="34" charset="-120"/>
                         </a:rPr>
-                        <a:t>Vercel (無料枠)</a:t>
+                        <a:t>macOS launchd (1 時間 cron)</a:t>
                       </a:r>
-                      <a:endParaRPr lang="en-US" sz="1100" dirty="0">
+                      <a:endParaRPr lang="en-US" sz="1000" dirty="0">
                         <a:latin typeface="Meiryo" charset="0"/>
                         <a:ea typeface="Meiryo" charset="0"/>
                         <a:cs typeface="Meiryo" charset="0"/>
@@ -9840,7 +10530,7 @@
                         <a:buNone/>
                       </a:pPr>
                       <a:r>
-                        <a:rPr lang="en-US" sz="1100" dirty="0">
+                        <a:rPr lang="en-US" sz="1000" dirty="0">
                           <a:solidFill>
                             <a:srgbClr val="333333"/>
                           </a:solidFill>
@@ -9848,9 +10538,9 @@
                           <a:ea typeface="Meiryo" pitchFamily="34" charset="-122"/>
                           <a:cs typeface="Meiryo" pitchFamily="34" charset="-120"/>
                         </a:rPr>
-                        <a:t>Astro 公式 preset、ゼロ設定で自動デプロイ</a:t>
+                        <a:t>fetch + astro build を定期実行</a:t>
                       </a:r>
-                      <a:endParaRPr lang="en-US" sz="1100" dirty="0">
+                      <a:endParaRPr lang="en-US" sz="1000" dirty="0">
                         <a:latin typeface="Meiryo" charset="0"/>
                         <a:ea typeface="Meiryo" charset="0"/>
                         <a:cs typeface="Meiryo" charset="0"/>
@@ -9900,7 +10590,7 @@
                   </a:tcPr>
                 </a:tc>
               </a:tr>
-              <a:tr h="411480">
+              <a:tr h="347472">
                 <a:tc>
                   <a:txBody>
                     <a:bodyPr/>
@@ -9910,7 +10600,7 @@
                         <a:buNone/>
                       </a:pPr>
                       <a:r>
-                        <a:rPr lang="en-US" sz="1100" dirty="0">
+                        <a:rPr lang="en-US" sz="1000" dirty="0">
                           <a:solidFill>
                             <a:srgbClr val="333333"/>
                           </a:solidFill>
@@ -9918,9 +10608,9 @@
                           <a:ea typeface="Meiryo" pitchFamily="34" charset="-122"/>
                           <a:cs typeface="Meiryo" pitchFamily="34" charset="-120"/>
                         </a:rPr>
-                        <a:t>自動化</a:t>
+                        <a:t>可視化</a:t>
                       </a:r>
-                      <a:endParaRPr lang="en-US" sz="1100" dirty="0">
+                      <a:endParaRPr lang="en-US" sz="1000" dirty="0">
                         <a:latin typeface="Meiryo" charset="0"/>
                         <a:ea typeface="Meiryo" charset="0"/>
                         <a:cs typeface="Meiryo" charset="0"/>
@@ -9978,7 +10668,7 @@
                         <a:buNone/>
                       </a:pPr>
                       <a:r>
-                        <a:rPr lang="en-US" sz="1100" dirty="0">
+                        <a:rPr lang="en-US" sz="1000" dirty="0">
                           <a:solidFill>
                             <a:srgbClr val="333333"/>
                           </a:solidFill>
@@ -9986,9 +10676,9 @@
                           <a:ea typeface="Meiryo" pitchFamily="34" charset="-122"/>
                           <a:cs typeface="Meiryo" pitchFamily="34" charset="-120"/>
                         </a:rPr>
-                        <a:t>Python 3.11 + GitHub Actions cron</a:t>
+                        <a:t>Pure SVG + SMIL + CSS</a:t>
                       </a:r>
-                      <a:endParaRPr lang="en-US" sz="1100" dirty="0">
+                      <a:endParaRPr lang="en-US" sz="1000" dirty="0">
                         <a:latin typeface="Meiryo" charset="0"/>
                         <a:ea typeface="Meiryo" charset="0"/>
                         <a:cs typeface="Meiryo" charset="0"/>
@@ -10046,7 +10736,7 @@
                         <a:buNone/>
                       </a:pPr>
                       <a:r>
-                        <a:rPr lang="en-US" sz="1100" dirty="0">
+                        <a:rPr lang="en-US" sz="1000" dirty="0">
                           <a:solidFill>
                             <a:srgbClr val="333333"/>
                           </a:solidFill>
@@ -10054,9 +10744,9 @@
                           <a:ea typeface="Meiryo" pitchFamily="34" charset="-122"/>
                           <a:cs typeface="Meiryo" pitchFamily="34" charset="-120"/>
                         </a:rPr>
-                        <a:t>Issue / コミット を Action に集約</a:t>
+                        <a:t>CPC ダイナミクスのヒーロー、依存ゼロ</a:t>
                       </a:r>
-                      <a:endParaRPr lang="en-US" sz="1100" dirty="0">
+                      <a:endParaRPr lang="en-US" sz="1000" dirty="0">
                         <a:latin typeface="Meiryo" charset="0"/>
                         <a:ea typeface="Meiryo" charset="0"/>
                         <a:cs typeface="Meiryo" charset="0"/>
@@ -10106,7 +10796,7 @@
                   </a:tcPr>
                 </a:tc>
               </a:tr>
-              <a:tr h="411480">
+              <a:tr h="347472">
                 <a:tc>
                   <a:txBody>
                     <a:bodyPr/>
@@ -10116,7 +10806,7 @@
                         <a:buNone/>
                       </a:pPr>
                       <a:r>
-                        <a:rPr lang="en-US" sz="1100" dirty="0">
+                        <a:rPr lang="en-US" sz="1000" dirty="0">
                           <a:solidFill>
                             <a:srgbClr val="333333"/>
                           </a:solidFill>
@@ -10124,9 +10814,9 @@
                           <a:ea typeface="Meiryo" pitchFamily="34" charset="-122"/>
                           <a:cs typeface="Meiryo" pitchFamily="34" charset="-120"/>
                         </a:rPr>
-                        <a:t>検索</a:t>
+                        <a:t>ホスティング</a:t>
                       </a:r>
-                      <a:endParaRPr lang="en-US" sz="1100" dirty="0">
+                      <a:endParaRPr lang="en-US" sz="1000" dirty="0">
                         <a:latin typeface="Meiryo" charset="0"/>
                         <a:ea typeface="Meiryo" charset="0"/>
                         <a:cs typeface="Meiryo" charset="0"/>
@@ -10184,7 +10874,7 @@
                         <a:buNone/>
                       </a:pPr>
                       <a:r>
-                        <a:rPr lang="en-US" sz="1100" dirty="0">
+                        <a:rPr lang="en-US" sz="1000" dirty="0">
                           <a:solidFill>
                             <a:srgbClr val="333333"/>
                           </a:solidFill>
@@ -10192,9 +10882,9 @@
                           <a:ea typeface="Meiryo" pitchFamily="34" charset="-122"/>
                           <a:cs typeface="Meiryo" pitchFamily="34" charset="-120"/>
                         </a:rPr>
-                        <a:t>クライアントサイド全文検索 (PoC)</a:t>
+                        <a:t>GitHub Private (将来 Vercel)</a:t>
                       </a:r>
-                      <a:endParaRPr lang="en-US" sz="1100" dirty="0">
+                      <a:endParaRPr lang="en-US" sz="1000" dirty="0">
                         <a:latin typeface="Meiryo" charset="0"/>
                         <a:ea typeface="Meiryo" charset="0"/>
                         <a:cs typeface="Meiryo" charset="0"/>
@@ -10252,7 +10942,7 @@
                         <a:buNone/>
                       </a:pPr>
                       <a:r>
-                        <a:rPr lang="en-US" sz="1100" dirty="0">
+                        <a:rPr lang="en-US" sz="1000" dirty="0">
                           <a:solidFill>
                             <a:srgbClr val="333333"/>
                           </a:solidFill>
@@ -10260,9 +10950,421 @@
                           <a:ea typeface="Meiryo" pitchFamily="34" charset="-122"/>
                           <a:cs typeface="Meiryo" pitchFamily="34" charset="-120"/>
                         </a:rPr>
-                        <a:t>&lt;100 件は十分。後で Pagefind に置換</a:t>
+                        <a:t>現状はローカルビルド + 手動配布</a:t>
                       </a:r>
-                      <a:endParaRPr lang="en-US" sz="1100" dirty="0">
+                      <a:endParaRPr lang="en-US" sz="1000" dirty="0">
+                        <a:latin typeface="Meiryo" charset="0"/>
+                        <a:ea typeface="Meiryo" charset="0"/>
+                        <a:cs typeface="Meiryo" charset="0"/>
+                      </a:endParaRPr>
+                    </a:p>
+                  </a:txBody>
+                  <a:tcPr marL="91440" marR="91440" marT="45720" marB="45720" anchor="ctr">
+                    <a:lnL w="6350" cap="flat" cmpd="sng" algn="ctr">
+                      <a:solidFill>
+                        <a:srgbClr val="DDDDDD"/>
+                      </a:solidFill>
+                      <a:prstDash val="solid"/>
+                      <a:round/>
+                      <a:headEnd type="none" w="med" len="med"/>
+                      <a:tailEnd type="none" w="med" len="med"/>
+                    </a:lnL>
+                    <a:lnR w="6350" cap="flat" cmpd="sng" algn="ctr">
+                      <a:solidFill>
+                        <a:srgbClr val="DDDDDD"/>
+                      </a:solidFill>
+                      <a:prstDash val="solid"/>
+                      <a:round/>
+                      <a:headEnd type="none" w="med" len="med"/>
+                      <a:tailEnd type="none" w="med" len="med"/>
+                    </a:lnR>
+                    <a:lnT w="6350" cap="flat" cmpd="sng" algn="ctr">
+                      <a:solidFill>
+                        <a:srgbClr val="DDDDDD"/>
+                      </a:solidFill>
+                      <a:prstDash val="solid"/>
+                      <a:round/>
+                      <a:headEnd type="none" w="med" len="med"/>
+                      <a:tailEnd type="none" w="med" len="med"/>
+                    </a:lnT>
+                    <a:lnB w="6350" cap="flat" cmpd="sng" algn="ctr">
+                      <a:solidFill>
+                        <a:srgbClr val="DDDDDD"/>
+                      </a:solidFill>
+                      <a:prstDash val="solid"/>
+                      <a:round/>
+                      <a:headEnd type="none" w="med" len="med"/>
+                      <a:tailEnd type="none" w="med" len="med"/>
+                    </a:lnB>
+                    <a:solidFill>
+                      <a:srgbClr val="FFFFFF"/>
+                    </a:solidFill>
+                  </a:tcPr>
+                </a:tc>
+              </a:tr>
+              <a:tr h="347472">
+                <a:tc>
+                  <a:txBody>
+                    <a:bodyPr/>
+                    <a:lstStyle/>
+                    <a:p>
+                      <a:pPr algn="l" indent="0" marL="0">
+                        <a:buNone/>
+                      </a:pPr>
+                      <a:r>
+                        <a:rPr lang="en-US" sz="1000" dirty="0">
+                          <a:solidFill>
+                            <a:srgbClr val="333333"/>
+                          </a:solidFill>
+                          <a:latin typeface="Meiryo" pitchFamily="34" charset="0"/>
+                          <a:ea typeface="Meiryo" pitchFamily="34" charset="-122"/>
+                          <a:cs typeface="Meiryo" pitchFamily="34" charset="-120"/>
+                        </a:rPr>
+                        <a:t>検索</a:t>
+                      </a:r>
+                      <a:endParaRPr lang="en-US" sz="1000" dirty="0">
+                        <a:latin typeface="Meiryo" charset="0"/>
+                        <a:ea typeface="Meiryo" charset="0"/>
+                        <a:cs typeface="Meiryo" charset="0"/>
+                      </a:endParaRPr>
+                    </a:p>
+                  </a:txBody>
+                  <a:tcPr marL="91440" marR="91440" marT="45720" marB="45720" anchor="ctr">
+                    <a:lnL w="6350" cap="flat" cmpd="sng" algn="ctr">
+                      <a:solidFill>
+                        <a:srgbClr val="DDDDDD"/>
+                      </a:solidFill>
+                      <a:prstDash val="solid"/>
+                      <a:round/>
+                      <a:headEnd type="none" w="med" len="med"/>
+                      <a:tailEnd type="none" w="med" len="med"/>
+                    </a:lnL>
+                    <a:lnR w="6350" cap="flat" cmpd="sng" algn="ctr">
+                      <a:solidFill>
+                        <a:srgbClr val="DDDDDD"/>
+                      </a:solidFill>
+                      <a:prstDash val="solid"/>
+                      <a:round/>
+                      <a:headEnd type="none" w="med" len="med"/>
+                      <a:tailEnd type="none" w="med" len="med"/>
+                    </a:lnR>
+                    <a:lnT w="6350" cap="flat" cmpd="sng" algn="ctr">
+                      <a:solidFill>
+                        <a:srgbClr val="DDDDDD"/>
+                      </a:solidFill>
+                      <a:prstDash val="solid"/>
+                      <a:round/>
+                      <a:headEnd type="none" w="med" len="med"/>
+                      <a:tailEnd type="none" w="med" len="med"/>
+                    </a:lnT>
+                    <a:lnB w="6350" cap="flat" cmpd="sng" algn="ctr">
+                      <a:solidFill>
+                        <a:srgbClr val="DDDDDD"/>
+                      </a:solidFill>
+                      <a:prstDash val="solid"/>
+                      <a:round/>
+                      <a:headEnd type="none" w="med" len="med"/>
+                      <a:tailEnd type="none" w="med" len="med"/>
+                    </a:lnB>
+                    <a:solidFill>
+                      <a:srgbClr val="F8F8F8"/>
+                    </a:solidFill>
+                  </a:tcPr>
+                </a:tc>
+                <a:tc>
+                  <a:txBody>
+                    <a:bodyPr/>
+                    <a:lstStyle/>
+                    <a:p>
+                      <a:pPr algn="l" indent="0" marL="0">
+                        <a:buNone/>
+                      </a:pPr>
+                      <a:r>
+                        <a:rPr lang="en-US" sz="1000" dirty="0">
+                          <a:solidFill>
+                            <a:srgbClr val="333333"/>
+                          </a:solidFill>
+                          <a:latin typeface="Meiryo" pitchFamily="34" charset="0"/>
+                          <a:ea typeface="Meiryo" pitchFamily="34" charset="-122"/>
+                          <a:cs typeface="Meiryo" pitchFamily="34" charset="-120"/>
+                        </a:rPr>
+                        <a:t>クライアントサイド全文検索</a:t>
+                      </a:r>
+                      <a:endParaRPr lang="en-US" sz="1000" dirty="0">
+                        <a:latin typeface="Meiryo" charset="0"/>
+                        <a:ea typeface="Meiryo" charset="0"/>
+                        <a:cs typeface="Meiryo" charset="0"/>
+                      </a:endParaRPr>
+                    </a:p>
+                  </a:txBody>
+                  <a:tcPr marL="91440" marR="91440" marT="45720" marB="45720" anchor="ctr">
+                    <a:lnL w="6350" cap="flat" cmpd="sng" algn="ctr">
+                      <a:solidFill>
+                        <a:srgbClr val="DDDDDD"/>
+                      </a:solidFill>
+                      <a:prstDash val="solid"/>
+                      <a:round/>
+                      <a:headEnd type="none" w="med" len="med"/>
+                      <a:tailEnd type="none" w="med" len="med"/>
+                    </a:lnL>
+                    <a:lnR w="6350" cap="flat" cmpd="sng" algn="ctr">
+                      <a:solidFill>
+                        <a:srgbClr val="DDDDDD"/>
+                      </a:solidFill>
+                      <a:prstDash val="solid"/>
+                      <a:round/>
+                      <a:headEnd type="none" w="med" len="med"/>
+                      <a:tailEnd type="none" w="med" len="med"/>
+                    </a:lnR>
+                    <a:lnT w="6350" cap="flat" cmpd="sng" algn="ctr">
+                      <a:solidFill>
+                        <a:srgbClr val="DDDDDD"/>
+                      </a:solidFill>
+                      <a:prstDash val="solid"/>
+                      <a:round/>
+                      <a:headEnd type="none" w="med" len="med"/>
+                      <a:tailEnd type="none" w="med" len="med"/>
+                    </a:lnT>
+                    <a:lnB w="6350" cap="flat" cmpd="sng" algn="ctr">
+                      <a:solidFill>
+                        <a:srgbClr val="DDDDDD"/>
+                      </a:solidFill>
+                      <a:prstDash val="solid"/>
+                      <a:round/>
+                      <a:headEnd type="none" w="med" len="med"/>
+                      <a:tailEnd type="none" w="med" len="med"/>
+                    </a:lnB>
+                    <a:solidFill>
+                      <a:srgbClr val="F8F8F8"/>
+                    </a:solidFill>
+                  </a:tcPr>
+                </a:tc>
+                <a:tc>
+                  <a:txBody>
+                    <a:bodyPr/>
+                    <a:lstStyle/>
+                    <a:p>
+                      <a:pPr algn="l" indent="0" marL="0">
+                        <a:buNone/>
+                      </a:pPr>
+                      <a:r>
+                        <a:rPr lang="en-US" sz="1000" dirty="0">
+                          <a:solidFill>
+                            <a:srgbClr val="333333"/>
+                          </a:solidFill>
+                          <a:latin typeface="Meiryo" pitchFamily="34" charset="0"/>
+                          <a:ea typeface="Meiryo" pitchFamily="34" charset="-122"/>
+                          <a:cs typeface="Meiryo" pitchFamily="34" charset="-120"/>
+                        </a:rPr>
+                        <a:t>5 種対応、&lt; 100 件で十分動作</a:t>
+                      </a:r>
+                      <a:endParaRPr lang="en-US" sz="1000" dirty="0">
+                        <a:latin typeface="Meiryo" charset="0"/>
+                        <a:ea typeface="Meiryo" charset="0"/>
+                        <a:cs typeface="Meiryo" charset="0"/>
+                      </a:endParaRPr>
+                    </a:p>
+                  </a:txBody>
+                  <a:tcPr marL="91440" marR="91440" marT="45720" marB="45720" anchor="ctr">
+                    <a:lnL w="6350" cap="flat" cmpd="sng" algn="ctr">
+                      <a:solidFill>
+                        <a:srgbClr val="DDDDDD"/>
+                      </a:solidFill>
+                      <a:prstDash val="solid"/>
+                      <a:round/>
+                      <a:headEnd type="none" w="med" len="med"/>
+                      <a:tailEnd type="none" w="med" len="med"/>
+                    </a:lnL>
+                    <a:lnR w="6350" cap="flat" cmpd="sng" algn="ctr">
+                      <a:solidFill>
+                        <a:srgbClr val="DDDDDD"/>
+                      </a:solidFill>
+                      <a:prstDash val="solid"/>
+                      <a:round/>
+                      <a:headEnd type="none" w="med" len="med"/>
+                      <a:tailEnd type="none" w="med" len="med"/>
+                    </a:lnR>
+                    <a:lnT w="6350" cap="flat" cmpd="sng" algn="ctr">
+                      <a:solidFill>
+                        <a:srgbClr val="DDDDDD"/>
+                      </a:solidFill>
+                      <a:prstDash val="solid"/>
+                      <a:round/>
+                      <a:headEnd type="none" w="med" len="med"/>
+                      <a:tailEnd type="none" w="med" len="med"/>
+                    </a:lnT>
+                    <a:lnB w="6350" cap="flat" cmpd="sng" algn="ctr">
+                      <a:solidFill>
+                        <a:srgbClr val="DDDDDD"/>
+                      </a:solidFill>
+                      <a:prstDash val="solid"/>
+                      <a:round/>
+                      <a:headEnd type="none" w="med" len="med"/>
+                      <a:tailEnd type="none" w="med" len="med"/>
+                    </a:lnB>
+                    <a:solidFill>
+                      <a:srgbClr val="F8F8F8"/>
+                    </a:solidFill>
+                  </a:tcPr>
+                </a:tc>
+              </a:tr>
+              <a:tr h="347472">
+                <a:tc>
+                  <a:txBody>
+                    <a:bodyPr/>
+                    <a:lstStyle/>
+                    <a:p>
+                      <a:pPr algn="l" indent="0" marL="0">
+                        <a:buNone/>
+                      </a:pPr>
+                      <a:r>
+                        <a:rPr lang="en-US" sz="1000" dirty="0">
+                          <a:solidFill>
+                            <a:srgbClr val="333333"/>
+                          </a:solidFill>
+                          <a:latin typeface="Meiryo" pitchFamily="34" charset="0"/>
+                          <a:ea typeface="Meiryo" pitchFamily="34" charset="-122"/>
+                          <a:cs typeface="Meiryo" pitchFamily="34" charset="-120"/>
+                        </a:rPr>
+                        <a:t>ライセンス</a:t>
+                      </a:r>
+                      <a:endParaRPr lang="en-US" sz="1000" dirty="0">
+                        <a:latin typeface="Meiryo" charset="0"/>
+                        <a:ea typeface="Meiryo" charset="0"/>
+                        <a:cs typeface="Meiryo" charset="0"/>
+                      </a:endParaRPr>
+                    </a:p>
+                  </a:txBody>
+                  <a:tcPr marL="91440" marR="91440" marT="45720" marB="45720" anchor="ctr">
+                    <a:lnL w="6350" cap="flat" cmpd="sng" algn="ctr">
+                      <a:solidFill>
+                        <a:srgbClr val="DDDDDD"/>
+                      </a:solidFill>
+                      <a:prstDash val="solid"/>
+                      <a:round/>
+                      <a:headEnd type="none" w="med" len="med"/>
+                      <a:tailEnd type="none" w="med" len="med"/>
+                    </a:lnL>
+                    <a:lnR w="6350" cap="flat" cmpd="sng" algn="ctr">
+                      <a:solidFill>
+                        <a:srgbClr val="DDDDDD"/>
+                      </a:solidFill>
+                      <a:prstDash val="solid"/>
+                      <a:round/>
+                      <a:headEnd type="none" w="med" len="med"/>
+                      <a:tailEnd type="none" w="med" len="med"/>
+                    </a:lnR>
+                    <a:lnT w="6350" cap="flat" cmpd="sng" algn="ctr">
+                      <a:solidFill>
+                        <a:srgbClr val="DDDDDD"/>
+                      </a:solidFill>
+                      <a:prstDash val="solid"/>
+                      <a:round/>
+                      <a:headEnd type="none" w="med" len="med"/>
+                      <a:tailEnd type="none" w="med" len="med"/>
+                    </a:lnT>
+                    <a:lnB w="6350" cap="flat" cmpd="sng" algn="ctr">
+                      <a:solidFill>
+                        <a:srgbClr val="DDDDDD"/>
+                      </a:solidFill>
+                      <a:prstDash val="solid"/>
+                      <a:round/>
+                      <a:headEnd type="none" w="med" len="med"/>
+                      <a:tailEnd type="none" w="med" len="med"/>
+                    </a:lnB>
+                    <a:solidFill>
+                      <a:srgbClr val="FFFFFF"/>
+                    </a:solidFill>
+                  </a:tcPr>
+                </a:tc>
+                <a:tc>
+                  <a:txBody>
+                    <a:bodyPr/>
+                    <a:lstStyle/>
+                    <a:p>
+                      <a:pPr algn="l" indent="0" marL="0">
+                        <a:buNone/>
+                      </a:pPr>
+                      <a:r>
+                        <a:rPr lang="en-US" sz="1000" dirty="0">
+                          <a:solidFill>
+                            <a:srgbClr val="333333"/>
+                          </a:solidFill>
+                          <a:latin typeface="Meiryo" pitchFamily="34" charset="0"/>
+                          <a:ea typeface="Meiryo" pitchFamily="34" charset="-122"/>
+                          <a:cs typeface="Meiryo" pitchFamily="34" charset="-120"/>
+                        </a:rPr>
+                        <a:t>CC BY-NC 4.0</a:t>
+                      </a:r>
+                      <a:endParaRPr lang="en-US" sz="1000" dirty="0">
+                        <a:latin typeface="Meiryo" charset="0"/>
+                        <a:ea typeface="Meiryo" charset="0"/>
+                        <a:cs typeface="Meiryo" charset="0"/>
+                      </a:endParaRPr>
+                    </a:p>
+                  </a:txBody>
+                  <a:tcPr marL="91440" marR="91440" marT="45720" marB="45720" anchor="ctr">
+                    <a:lnL w="6350" cap="flat" cmpd="sng" algn="ctr">
+                      <a:solidFill>
+                        <a:srgbClr val="DDDDDD"/>
+                      </a:solidFill>
+                      <a:prstDash val="solid"/>
+                      <a:round/>
+                      <a:headEnd type="none" w="med" len="med"/>
+                      <a:tailEnd type="none" w="med" len="med"/>
+                    </a:lnL>
+                    <a:lnR w="6350" cap="flat" cmpd="sng" algn="ctr">
+                      <a:solidFill>
+                        <a:srgbClr val="DDDDDD"/>
+                      </a:solidFill>
+                      <a:prstDash val="solid"/>
+                      <a:round/>
+                      <a:headEnd type="none" w="med" len="med"/>
+                      <a:tailEnd type="none" w="med" len="med"/>
+                    </a:lnR>
+                    <a:lnT w="6350" cap="flat" cmpd="sng" algn="ctr">
+                      <a:solidFill>
+                        <a:srgbClr val="DDDDDD"/>
+                      </a:solidFill>
+                      <a:prstDash val="solid"/>
+                      <a:round/>
+                      <a:headEnd type="none" w="med" len="med"/>
+                      <a:tailEnd type="none" w="med" len="med"/>
+                    </a:lnT>
+                    <a:lnB w="6350" cap="flat" cmpd="sng" algn="ctr">
+                      <a:solidFill>
+                        <a:srgbClr val="DDDDDD"/>
+                      </a:solidFill>
+                      <a:prstDash val="solid"/>
+                      <a:round/>
+                      <a:headEnd type="none" w="med" len="med"/>
+                      <a:tailEnd type="none" w="med" len="med"/>
+                    </a:lnB>
+                    <a:solidFill>
+                      <a:srgbClr val="FFFFFF"/>
+                    </a:solidFill>
+                  </a:tcPr>
+                </a:tc>
+                <a:tc>
+                  <a:txBody>
+                    <a:bodyPr/>
+                    <a:lstStyle/>
+                    <a:p>
+                      <a:pPr algn="l" indent="0" marL="0">
+                        <a:buNone/>
+                      </a:pPr>
+                      <a:r>
+                        <a:rPr lang="en-US" sz="1000" dirty="0">
+                          <a:solidFill>
+                            <a:srgbClr val="333333"/>
+                          </a:solidFill>
+                          <a:latin typeface="Meiryo" pitchFamily="34" charset="0"/>
+                          <a:ea typeface="Meiryo" pitchFamily="34" charset="-122"/>
+                          <a:cs typeface="Meiryo" pitchFamily="34" charset="-120"/>
+                        </a:rPr>
+                        <a:t>非営利での利用・改変・再配布を許可</a:t>
+                      </a:r>
+                      <a:endParaRPr lang="en-US" sz="1000" dirty="0">
                         <a:latin typeface="Meiryo" charset="0"/>
                         <a:ea typeface="Meiryo" charset="0"/>
                         <a:cs typeface="Meiryo" charset="0"/>
@@ -10381,7 +11483,7 @@
                 <a:ea typeface="Meiryo" pitchFamily="34" charset="-122"/>
                 <a:cs typeface="Meiryo" pitchFamily="34" charset="-120"/>
               </a:rPr>
-              <a:t>§3  データモデル ─ 3 つの Content Collection</a:t>
+              <a:t>§3  データモデル ─ 5 つの一次データ</a:t>
             </a:r>
             <a:endParaRPr lang="en-US" sz="2600" dirty="0"/>
           </a:p>
@@ -10457,8 +11559,8 @@
         </p:nvSpPr>
         <p:spPr>
           <a:xfrm>
-            <a:off x="548640" y="960120"/>
-            <a:ext cx="8046720" cy="365760"/>
+            <a:off x="548640" y="914400"/>
+            <a:ext cx="8046720" cy="457200"/>
           </a:xfrm>
           <a:prstGeom prst="rect">
             <a:avLst/>
@@ -10474,7 +11576,7 @@
               <a:buNone/>
             </a:pPr>
             <a:r>
-              <a:rPr lang="en-US" sz="1200" i="1" dirty="0">
+              <a:rPr lang="en-US" sz="1100" i="1" dirty="0">
                 <a:solidFill>
                   <a:srgbClr val="888888"/>
                 </a:solidFill>
@@ -10482,7 +11584,46 @@
                 <a:ea typeface="Meiryo" pitchFamily="34" charset="-122"/>
                 <a:cs typeface="Meiryo" pitchFamily="34" charset="-120"/>
               </a:rPr>
-              <a:t>英語が一次データ、日本語は補助フィールド (summary_ja / name_ja / description_ja)。全フィールドが Zod スキーマで型検証される。</a:t>
+              <a:t>Content Collections（手動編集）と src/data/*.json（外部取り込み）の 2 系統。前者は Zod スキーマで型検証、後者は fetch スクリプトが書き込む。</a:t>
+            </a:r>
+            <a:endParaRPr lang="en-US" sz="1100" dirty="0"/>
+          </a:p>
+        </p:txBody>
+      </p:sp>
+      <p:sp>
+        <p:nvSpPr>
+          <p:cNvPr id="6" name="Text 4"/>
+          <p:cNvSpPr/>
+          <p:nvPr/>
+        </p:nvSpPr>
+        <p:spPr>
+          <a:xfrm>
+            <a:off x="548640" y="1417320"/>
+            <a:ext cx="8046720" cy="274320"/>
+          </a:xfrm>
+          <a:prstGeom prst="rect">
+            <a:avLst/>
+          </a:prstGeom>
+          <a:noFill/>
+          <a:ln/>
+        </p:spPr>
+        <p:txBody>
+          <a:bodyPr wrap="square" rtlCol="0" anchor="ctr"/>
+          <a:lstStyle/>
+          <a:p>
+            <a:pPr indent="0" marL="0">
+              <a:buNone/>
+            </a:pPr>
+            <a:r>
+              <a:rPr lang="en-US" sz="1200" b="1" dirty="0">
+                <a:solidFill>
+                  <a:srgbClr val="2B579A"/>
+                </a:solidFill>
+                <a:latin typeface="Meiryo" pitchFamily="34" charset="0"/>
+                <a:ea typeface="Meiryo" pitchFamily="34" charset="-122"/>
+                <a:cs typeface="Meiryo" pitchFamily="34" charset="-120"/>
+              </a:rPr>
+              <a:t>Content Collections（content/*.md・手動編集）</a:t>
             </a:r>
             <a:endParaRPr lang="en-US" sz="1200" dirty="0"/>
           </a:p>
@@ -10490,18 +11631,18 @@
       </p:sp>
       <p:sp>
         <p:nvSpPr>
-          <p:cNvPr id="6" name="Shape 4"/>
-          <p:cNvSpPr/>
-          <p:nvPr/>
-        </p:nvSpPr>
-        <p:spPr>
-          <a:xfrm>
-            <a:off x="457200" y="1463040"/>
-            <a:ext cx="2606040" cy="502920"/>
+          <p:cNvPr id="7" name="Shape 5"/>
+          <p:cNvSpPr/>
+          <p:nvPr/>
+        </p:nvSpPr>
+        <p:spPr>
+          <a:xfrm>
+            <a:off x="457200" y="1737360"/>
+            <a:ext cx="2606040" cy="365760"/>
           </a:xfrm>
           <a:prstGeom prst="roundRect">
             <a:avLst>
-              <a:gd name="adj" fmla="val 10909"/>
+              <a:gd name="adj" fmla="val 15000"/>
             </a:avLst>
           </a:prstGeom>
           <a:solidFill>
@@ -10517,14 +11658,14 @@
       </p:sp>
       <p:sp>
         <p:nvSpPr>
-          <p:cNvPr id="7" name="Text 5"/>
-          <p:cNvSpPr/>
-          <p:nvPr/>
-        </p:nvSpPr>
-        <p:spPr>
-          <a:xfrm>
-            <a:off x="457200" y="1463040"/>
-            <a:ext cx="2606040" cy="502920"/>
+          <p:cNvPr id="8" name="Text 6"/>
+          <p:cNvSpPr/>
+          <p:nvPr/>
+        </p:nvSpPr>
+        <p:spPr>
+          <a:xfrm>
+            <a:off x="457200" y="1737360"/>
+            <a:ext cx="2606040" cy="365760"/>
           </a:xfrm>
           <a:prstGeom prst="rect">
             <a:avLst/>
@@ -10540,7 +11681,7 @@
               <a:buNone/>
             </a:pPr>
             <a:r>
-              <a:rPr lang="en-US" sz="1400" b="1" dirty="0">
+              <a:rPr lang="en-US" sz="1200" b="1" dirty="0">
                 <a:solidFill>
                   <a:srgbClr val="FFFFFF"/>
                 </a:solidFill>
@@ -10548,17 +11689,13 @@
                 <a:ea typeface="Meiryo" pitchFamily="34" charset="-122"/>
                 <a:cs typeface="Meiryo" pitchFamily="34" charset="-120"/>
               </a:rPr>
-              <a:t>papers
-</a:t>
-            </a:r>
-            <a:endParaRPr lang="en-US" sz="1400" dirty="0"/>
-          </a:p>
-          <a:p>
+              <a:t>papers  </a:t>
+            </a:r>
             <a:pPr algn="ctr" indent="0" marL="0">
               <a:buNone/>
             </a:pPr>
             <a:r>
-              <a:rPr lang="en-US" sz="1000" dirty="0">
+              <a:rPr lang="en-US" sz="900" dirty="0">
                 <a:solidFill>
                   <a:srgbClr val="E8EEF7"/>
                 </a:solidFill>
@@ -10568,20 +11705,20 @@
               </a:rPr>
               <a:t>論文</a:t>
             </a:r>
-            <a:endParaRPr lang="en-US" sz="1400" dirty="0"/>
+            <a:endParaRPr lang="en-US" sz="1200" dirty="0"/>
           </a:p>
         </p:txBody>
       </p:sp>
       <p:sp>
         <p:nvSpPr>
-          <p:cNvPr id="8" name="Shape 6"/>
-          <p:cNvSpPr/>
-          <p:nvPr/>
-        </p:nvSpPr>
-        <p:spPr>
-          <a:xfrm>
-            <a:off x="457200" y="1965960"/>
-            <a:ext cx="2606040" cy="3291840"/>
+          <p:cNvPr id="9" name="Shape 7"/>
+          <p:cNvSpPr/>
+          <p:nvPr/>
+        </p:nvSpPr>
+        <p:spPr>
+          <a:xfrm>
+            <a:off x="457200" y="2103120"/>
+            <a:ext cx="2606040" cy="1280160"/>
           </a:xfrm>
           <a:prstGeom prst="rect">
             <a:avLst/>
@@ -10599,14 +11736,14 @@
       </p:sp>
       <p:sp>
         <p:nvSpPr>
-          <p:cNvPr id="9" name="Text 7"/>
-          <p:cNvSpPr/>
-          <p:nvPr/>
-        </p:nvSpPr>
-        <p:spPr>
-          <a:xfrm>
-            <a:off x="640080" y="2103120"/>
-            <a:ext cx="2240280" cy="3017520"/>
+          <p:cNvPr id="10" name="Text 8"/>
+          <p:cNvSpPr/>
+          <p:nvPr/>
+        </p:nvSpPr>
+        <p:spPr>
+          <a:xfrm>
+            <a:off x="594360" y="2194560"/>
+            <a:ext cx="2331720" cy="1188720"/>
           </a:xfrm>
           <a:prstGeom prst="rect">
             <a:avLst/>
@@ -10620,12 +11757,12 @@
           <a:p>
             <a:pPr indent="0" marL="0">
               <a:spcAft>
-                <a:spcPts val="400"/>
+                <a:spcPts val="200"/>
               </a:spcAft>
               <a:buNone/>
             </a:pPr>
             <a:r>
-              <a:rPr lang="en-US" sz="1100" dirty="0">
+              <a:rPr lang="en-US" sz="900" dirty="0">
                 <a:solidFill>
                   <a:srgbClr val="333333"/>
                 </a:solidFill>
@@ -10635,17 +11772,17 @@
               </a:rPr>
               <a:t>title</a:t>
             </a:r>
-            <a:endParaRPr lang="en-US" sz="1100" dirty="0"/>
+            <a:endParaRPr lang="en-US" sz="900" dirty="0"/>
           </a:p>
           <a:p>
             <a:pPr indent="0" marL="0">
               <a:spcAft>
-                <a:spcPts val="400"/>
+                <a:spcPts val="200"/>
               </a:spcAft>
               <a:buNone/>
             </a:pPr>
             <a:r>
-              <a:rPr lang="en-US" sz="1100" dirty="0">
+              <a:rPr lang="en-US" sz="900" dirty="0">
                 <a:solidFill>
                   <a:srgbClr val="333333"/>
                 </a:solidFill>
@@ -10655,17 +11792,17 @@
               </a:rPr>
               <a:t>authors[]</a:t>
             </a:r>
-            <a:endParaRPr lang="en-US" sz="1100" dirty="0"/>
+            <a:endParaRPr lang="en-US" sz="900" dirty="0"/>
           </a:p>
           <a:p>
             <a:pPr indent="0" marL="0">
               <a:spcAft>
-                <a:spcPts val="400"/>
+                <a:spcPts val="200"/>
               </a:spcAft>
               <a:buNone/>
             </a:pPr>
             <a:r>
-              <a:rPr lang="en-US" sz="1100" dirty="0">
+              <a:rPr lang="en-US" sz="900" dirty="0">
                 <a:solidFill>
                   <a:srgbClr val="333333"/>
                 </a:solidFill>
@@ -10675,17 +11812,17 @@
               </a:rPr>
               <a:t>year</a:t>
             </a:r>
-            <a:endParaRPr lang="en-US" sz="1100" dirty="0"/>
+            <a:endParaRPr lang="en-US" sz="900" dirty="0"/>
           </a:p>
           <a:p>
             <a:pPr indent="0" marL="0">
               <a:spcAft>
-                <a:spcPts val="400"/>
+                <a:spcPts val="200"/>
               </a:spcAft>
               <a:buNone/>
             </a:pPr>
             <a:r>
-              <a:rPr lang="en-US" sz="1100" dirty="0">
+              <a:rPr lang="en-US" sz="900" dirty="0">
                 <a:solidFill>
                   <a:srgbClr val="333333"/>
                 </a:solidFill>
@@ -10695,17 +11832,17 @@
               </a:rPr>
               <a:t>venue</a:t>
             </a:r>
-            <a:endParaRPr lang="en-US" sz="1100" dirty="0"/>
+            <a:endParaRPr lang="en-US" sz="900" dirty="0"/>
           </a:p>
           <a:p>
             <a:pPr indent="0" marL="0">
               <a:spcAft>
-                <a:spcPts val="400"/>
+                <a:spcPts val="200"/>
               </a:spcAft>
               <a:buNone/>
             </a:pPr>
             <a:r>
-              <a:rPr lang="en-US" sz="1100" dirty="0">
+              <a:rPr lang="en-US" sz="900" dirty="0">
                 <a:solidFill>
                   <a:srgbClr val="333333"/>
                 </a:solidFill>
@@ -10715,17 +11852,17 @@
               </a:rPr>
               <a:t>arxiv_id?</a:t>
             </a:r>
-            <a:endParaRPr lang="en-US" sz="1100" dirty="0"/>
+            <a:endParaRPr lang="en-US" sz="900" dirty="0"/>
           </a:p>
           <a:p>
             <a:pPr indent="0" marL="0">
               <a:spcAft>
-                <a:spcPts val="400"/>
+                <a:spcPts val="200"/>
               </a:spcAft>
               <a:buNone/>
             </a:pPr>
             <a:r>
-              <a:rPr lang="en-US" sz="1100" dirty="0">
+              <a:rPr lang="en-US" sz="900" dirty="0">
                 <a:solidFill>
                   <a:srgbClr val="333333"/>
                 </a:solidFill>
@@ -10733,19 +11870,19 @@
                 <a:ea typeface="Menlo" pitchFamily="34" charset="-122"/>
                 <a:cs typeface="Menlo" pitchFamily="34" charset="-120"/>
               </a:rPr>
-              <a:t>doi?</a:t>
-            </a:r>
-            <a:endParaRPr lang="en-US" sz="1100" dirty="0"/>
+              <a:t>url</a:t>
+            </a:r>
+            <a:endParaRPr lang="en-US" sz="900" dirty="0"/>
           </a:p>
           <a:p>
             <a:pPr indent="0" marL="0">
               <a:spcAft>
-                <a:spcPts val="400"/>
+                <a:spcPts val="200"/>
               </a:spcAft>
               <a:buNone/>
             </a:pPr>
             <a:r>
-              <a:rPr lang="en-US" sz="1100" dirty="0">
+              <a:rPr lang="en-US" sz="900" dirty="0">
                 <a:solidFill>
                   <a:srgbClr val="333333"/>
                 </a:solidFill>
@@ -10753,19 +11890,19 @@
                 <a:ea typeface="Menlo" pitchFamily="34" charset="-122"/>
                 <a:cs typeface="Menlo" pitchFamily="34" charset="-120"/>
               </a:rPr>
-              <a:t>url</a:t>
-            </a:r>
-            <a:endParaRPr lang="en-US" sz="1100" dirty="0"/>
+              <a:t>abstract_en</a:t>
+            </a:r>
+            <a:endParaRPr lang="en-US" sz="900" dirty="0"/>
           </a:p>
           <a:p>
             <a:pPr indent="0" marL="0">
               <a:spcAft>
-                <a:spcPts val="400"/>
+                <a:spcPts val="200"/>
               </a:spcAft>
               <a:buNone/>
             </a:pPr>
             <a:r>
-              <a:rPr lang="en-US" sz="1100" dirty="0">
+              <a:rPr lang="en-US" sz="900" dirty="0">
                 <a:solidFill>
                   <a:srgbClr val="333333"/>
                 </a:solidFill>
@@ -10773,146 +11910,66 @@
                 <a:ea typeface="Menlo" pitchFamily="34" charset="-122"/>
                 <a:cs typeface="Menlo" pitchFamily="34" charset="-120"/>
               </a:rPr>
-              <a:t>abstract_en</a:t>
-            </a:r>
-            <a:endParaRPr lang="en-US" sz="1100" dirty="0"/>
+              <a:t>summary_ja?</a:t>
+            </a:r>
+            <a:endParaRPr lang="en-US" sz="900" dirty="0"/>
           </a:p>
           <a:p>
             <a:pPr indent="0" marL="0">
               <a:spcAft>
-                <a:spcPts val="400"/>
+                <a:spcPts val="200"/>
               </a:spcAft>
               <a:buNone/>
             </a:pPr>
             <a:r>
-              <a:rPr lang="en-US" sz="1100" dirty="0">
-                <a:solidFill>
-                  <a:srgbClr val="333333"/>
+              <a:rPr lang="en-US" sz="900" dirty="0">
+                <a:solidFill>
+                  <a:srgbClr val="C0392B"/>
                 </a:solidFill>
                 <a:latin typeface="Menlo" pitchFamily="34" charset="0"/>
                 <a:ea typeface="Menlo" pitchFamily="34" charset="-122"/>
                 <a:cs typeface="Menlo" pitchFamily="34" charset="-120"/>
               </a:rPr>
-              <a:t>summary_ja?</a:t>
-            </a:r>
-            <a:endParaRPr lang="en-US" sz="1100" dirty="0"/>
+              <a:t>schools[] ★</a:t>
+            </a:r>
+            <a:endParaRPr lang="en-US" sz="900" dirty="0"/>
           </a:p>
           <a:p>
             <a:pPr indent="0" marL="0">
               <a:spcAft>
-                <a:spcPts val="400"/>
+                <a:spcPts val="200"/>
               </a:spcAft>
               <a:buNone/>
             </a:pPr>
             <a:r>
-              <a:rPr lang="en-US" sz="1100" dirty="0">
-                <a:solidFill>
-                  <a:srgbClr val="C0392B"/>
+              <a:rPr lang="en-US" sz="900" dirty="0">
+                <a:solidFill>
+                  <a:srgbClr val="333333"/>
                 </a:solidFill>
                 <a:latin typeface="Menlo" pitchFamily="34" charset="0"/>
                 <a:ea typeface="Menlo" pitchFamily="34" charset="-122"/>
                 <a:cs typeface="Menlo" pitchFamily="34" charset="-120"/>
               </a:rPr>
-              <a:t>schools[] ★</a:t>
-            </a:r>
-            <a:endParaRPr lang="en-US" sz="1100" dirty="0"/>
-          </a:p>
-          <a:p>
-            <a:pPr indent="0" marL="0">
-              <a:spcAft>
-                <a:spcPts val="400"/>
-              </a:spcAft>
-              <a:buNone/>
-            </a:pPr>
-            <a:r>
-              <a:rPr lang="en-US" sz="1100" dirty="0">
-                <a:solidFill>
-                  <a:srgbClr val="333333"/>
-                </a:solidFill>
-                <a:latin typeface="Menlo" pitchFamily="34" charset="0"/>
-                <a:ea typeface="Menlo" pitchFamily="34" charset="-122"/>
-                <a:cs typeface="Menlo" pitchFamily="34" charset="-120"/>
-              </a:rPr>
               <a:t>methods[]?</a:t>
             </a:r>
-            <a:endParaRPr lang="en-US" sz="1100" dirty="0"/>
-          </a:p>
-          <a:p>
-            <a:pPr indent="0" marL="0">
-              <a:spcAft>
-                <a:spcPts val="400"/>
-              </a:spcAft>
-              <a:buNone/>
-            </a:pPr>
-            <a:r>
-              <a:rPr lang="en-US" sz="1100" dirty="0">
-                <a:solidFill>
-                  <a:srgbClr val="333333"/>
-                </a:solidFill>
-                <a:latin typeface="Menlo" pitchFamily="34" charset="0"/>
-                <a:ea typeface="Menlo" pitchFamily="34" charset="-122"/>
-                <a:cs typeface="Menlo" pitchFamily="34" charset="-120"/>
-              </a:rPr>
-              <a:t>date_added</a:t>
-            </a:r>
-            <a:endParaRPr lang="en-US" sz="1100" dirty="0"/>
-          </a:p>
-          <a:p>
-            <a:pPr indent="0" marL="0">
-              <a:spcAft>
-                <a:spcPts val="400"/>
-              </a:spcAft>
-              <a:buNone/>
-            </a:pPr>
-            <a:r>
-              <a:rPr lang="en-US" sz="1100" dirty="0">
-                <a:solidFill>
-                  <a:srgbClr val="333333"/>
-                </a:solidFill>
-                <a:latin typeface="Menlo" pitchFamily="34" charset="0"/>
-                <a:ea typeface="Menlo" pitchFamily="34" charset="-122"/>
-                <a:cs typeface="Menlo" pitchFamily="34" charset="-120"/>
-              </a:rPr>
-              <a:t>contributor?</a:t>
-            </a:r>
-            <a:endParaRPr lang="en-US" sz="1100" dirty="0"/>
-          </a:p>
-          <a:p>
-            <a:pPr indent="0" marL="0">
-              <a:spcAft>
-                <a:spcPts val="400"/>
-              </a:spcAft>
-              <a:buNone/>
-            </a:pPr>
-            <a:r>
-              <a:rPr lang="en-US" sz="1100" dirty="0">
-                <a:solidFill>
-                  <a:srgbClr val="333333"/>
-                </a:solidFill>
-                <a:latin typeface="Menlo" pitchFamily="34" charset="0"/>
-                <a:ea typeface="Menlo" pitchFamily="34" charset="-122"/>
-                <a:cs typeface="Menlo" pitchFamily="34" charset="-120"/>
-              </a:rPr>
-              <a:t>featured</a:t>
-            </a:r>
-            <a:endParaRPr lang="en-US" sz="1100" dirty="0"/>
+            <a:endParaRPr lang="en-US" sz="900" dirty="0"/>
           </a:p>
         </p:txBody>
       </p:sp>
       <p:sp>
         <p:nvSpPr>
-          <p:cNvPr id="10" name="Shape 8"/>
-          <p:cNvSpPr/>
-          <p:nvPr/>
-        </p:nvSpPr>
-        <p:spPr>
-          <a:xfrm>
-            <a:off x="3246120" y="1463040"/>
-            <a:ext cx="2606040" cy="502920"/>
+          <p:cNvPr id="11" name="Shape 9"/>
+          <p:cNvSpPr/>
+          <p:nvPr/>
+        </p:nvSpPr>
+        <p:spPr>
+          <a:xfrm>
+            <a:off x="3246120" y="1737360"/>
+            <a:ext cx="2606040" cy="365760"/>
           </a:xfrm>
           <a:prstGeom prst="roundRect">
             <a:avLst>
-              <a:gd name="adj" fmla="val 10909"/>
+              <a:gd name="adj" fmla="val 15000"/>
             </a:avLst>
           </a:prstGeom>
           <a:solidFill>
@@ -10928,14 +11985,14 @@
       </p:sp>
       <p:sp>
         <p:nvSpPr>
-          <p:cNvPr id="11" name="Text 9"/>
-          <p:cNvSpPr/>
-          <p:nvPr/>
-        </p:nvSpPr>
-        <p:spPr>
-          <a:xfrm>
-            <a:off x="3246120" y="1463040"/>
-            <a:ext cx="2606040" cy="502920"/>
+          <p:cNvPr id="12" name="Text 10"/>
+          <p:cNvSpPr/>
+          <p:nvPr/>
+        </p:nvSpPr>
+        <p:spPr>
+          <a:xfrm>
+            <a:off x="3246120" y="1737360"/>
+            <a:ext cx="2606040" cy="365760"/>
           </a:xfrm>
           <a:prstGeom prst="rect">
             <a:avLst/>
@@ -10951,7 +12008,7 @@
               <a:buNone/>
             </a:pPr>
             <a:r>
-              <a:rPr lang="en-US" sz="1400" b="1" dirty="0">
+              <a:rPr lang="en-US" sz="1200" b="1" dirty="0">
                 <a:solidFill>
                   <a:srgbClr val="FFFFFF"/>
                 </a:solidFill>
@@ -10959,17 +12016,13 @@
                 <a:ea typeface="Meiryo" pitchFamily="34" charset="-122"/>
                 <a:cs typeface="Meiryo" pitchFamily="34" charset="-120"/>
               </a:rPr>
-              <a:t>labs
-</a:t>
-            </a:r>
-            <a:endParaRPr lang="en-US" sz="1400" dirty="0"/>
-          </a:p>
-          <a:p>
+              <a:t>labs  </a:t>
+            </a:r>
             <a:pPr algn="ctr" indent="0" marL="0">
               <a:buNone/>
             </a:pPr>
             <a:r>
-              <a:rPr lang="en-US" sz="1000" dirty="0">
+              <a:rPr lang="en-US" sz="900" dirty="0">
                 <a:solidFill>
                   <a:srgbClr val="E8EEF7"/>
                 </a:solidFill>
@@ -10979,20 +12032,20 @@
               </a:rPr>
               <a:t>研究室</a:t>
             </a:r>
-            <a:endParaRPr lang="en-US" sz="1400" dirty="0"/>
+            <a:endParaRPr lang="en-US" sz="1200" dirty="0"/>
           </a:p>
         </p:txBody>
       </p:sp>
       <p:sp>
         <p:nvSpPr>
-          <p:cNvPr id="12" name="Shape 10"/>
-          <p:cNvSpPr/>
-          <p:nvPr/>
-        </p:nvSpPr>
-        <p:spPr>
-          <a:xfrm>
-            <a:off x="3246120" y="1965960"/>
-            <a:ext cx="2606040" cy="3291840"/>
+          <p:cNvPr id="13" name="Shape 11"/>
+          <p:cNvSpPr/>
+          <p:nvPr/>
+        </p:nvSpPr>
+        <p:spPr>
+          <a:xfrm>
+            <a:off x="3246120" y="2103120"/>
+            <a:ext cx="2606040" cy="1280160"/>
           </a:xfrm>
           <a:prstGeom prst="rect">
             <a:avLst/>
@@ -11010,14 +12063,14 @@
       </p:sp>
       <p:sp>
         <p:nvSpPr>
-          <p:cNvPr id="13" name="Text 11"/>
-          <p:cNvSpPr/>
-          <p:nvPr/>
-        </p:nvSpPr>
-        <p:spPr>
-          <a:xfrm>
-            <a:off x="3429000" y="2103120"/>
-            <a:ext cx="2240280" cy="3017520"/>
+          <p:cNvPr id="14" name="Text 12"/>
+          <p:cNvSpPr/>
+          <p:nvPr/>
+        </p:nvSpPr>
+        <p:spPr>
+          <a:xfrm>
+            <a:off x="3383280" y="2194560"/>
+            <a:ext cx="2331720" cy="1188720"/>
           </a:xfrm>
           <a:prstGeom prst="rect">
             <a:avLst/>
@@ -11031,12 +12084,12 @@
           <a:p>
             <a:pPr indent="0" marL="0">
               <a:spcAft>
-                <a:spcPts val="400"/>
+                <a:spcPts val="200"/>
               </a:spcAft>
               <a:buNone/>
             </a:pPr>
             <a:r>
-              <a:rPr lang="en-US" sz="1100" dirty="0">
+              <a:rPr lang="en-US" sz="900" dirty="0">
                 <a:solidFill>
                   <a:srgbClr val="333333"/>
                 </a:solidFill>
@@ -11046,17 +12099,17 @@
               </a:rPr>
               <a:t>name_en</a:t>
             </a:r>
-            <a:endParaRPr lang="en-US" sz="1100" dirty="0"/>
+            <a:endParaRPr lang="en-US" sz="900" dirty="0"/>
           </a:p>
           <a:p>
             <a:pPr indent="0" marL="0">
               <a:spcAft>
-                <a:spcPts val="400"/>
+                <a:spcPts val="200"/>
               </a:spcAft>
               <a:buNone/>
             </a:pPr>
             <a:r>
-              <a:rPr lang="en-US" sz="1100" dirty="0">
+              <a:rPr lang="en-US" sz="900" dirty="0">
                 <a:solidFill>
                   <a:srgbClr val="333333"/>
                 </a:solidFill>
@@ -11066,17 +12119,17 @@
               </a:rPr>
               <a:t>name_ja?</a:t>
             </a:r>
-            <a:endParaRPr lang="en-US" sz="1100" dirty="0"/>
+            <a:endParaRPr lang="en-US" sz="900" dirty="0"/>
           </a:p>
           <a:p>
             <a:pPr indent="0" marL="0">
               <a:spcAft>
-                <a:spcPts val="400"/>
+                <a:spcPts val="200"/>
               </a:spcAft>
               <a:buNone/>
             </a:pPr>
             <a:r>
-              <a:rPr lang="en-US" sz="1100" dirty="0">
+              <a:rPr lang="en-US" sz="900" dirty="0">
                 <a:solidFill>
                   <a:srgbClr val="333333"/>
                 </a:solidFill>
@@ -11086,17 +12139,17 @@
               </a:rPr>
               <a:t>pi</a:t>
             </a:r>
-            <a:endParaRPr lang="en-US" sz="1100" dirty="0"/>
+            <a:endParaRPr lang="en-US" sz="900" dirty="0"/>
           </a:p>
           <a:p>
             <a:pPr indent="0" marL="0">
               <a:spcAft>
-                <a:spcPts val="400"/>
+                <a:spcPts val="200"/>
               </a:spcAft>
               <a:buNone/>
             </a:pPr>
             <a:r>
-              <a:rPr lang="en-US" sz="1100" dirty="0">
+              <a:rPr lang="en-US" sz="900" dirty="0">
                 <a:solidFill>
                   <a:srgbClr val="333333"/>
                 </a:solidFill>
@@ -11106,17 +12159,17 @@
               </a:rPr>
               <a:t>institution</a:t>
             </a:r>
-            <a:endParaRPr lang="en-US" sz="1100" dirty="0"/>
+            <a:endParaRPr lang="en-US" sz="900" dirty="0"/>
           </a:p>
           <a:p>
             <a:pPr indent="0" marL="0">
               <a:spcAft>
-                <a:spcPts val="400"/>
+                <a:spcPts val="200"/>
               </a:spcAft>
               <a:buNone/>
             </a:pPr>
             <a:r>
-              <a:rPr lang="en-US" sz="1100" dirty="0">
+              <a:rPr lang="en-US" sz="900" dirty="0">
                 <a:solidFill>
                   <a:srgbClr val="333333"/>
                 </a:solidFill>
@@ -11126,17 +12179,17 @@
               </a:rPr>
               <a:t>country</a:t>
             </a:r>
-            <a:endParaRPr lang="en-US" sz="1100" dirty="0"/>
+            <a:endParaRPr lang="en-US" sz="900" dirty="0"/>
           </a:p>
           <a:p>
             <a:pPr indent="0" marL="0">
               <a:spcAft>
-                <a:spcPts val="400"/>
+                <a:spcPts val="200"/>
               </a:spcAft>
               <a:buNone/>
             </a:pPr>
             <a:r>
-              <a:rPr lang="en-US" sz="1100" dirty="0">
+              <a:rPr lang="en-US" sz="900" dirty="0">
                 <a:solidFill>
                   <a:srgbClr val="333333"/>
                 </a:solidFill>
@@ -11146,17 +12199,17 @@
               </a:rPr>
               <a:t>homepage</a:t>
             </a:r>
-            <a:endParaRPr lang="en-US" sz="1100" dirty="0"/>
+            <a:endParaRPr lang="en-US" sz="900" dirty="0"/>
           </a:p>
           <a:p>
             <a:pPr indent="0" marL="0">
               <a:spcAft>
-                <a:spcPts val="400"/>
+                <a:spcPts val="200"/>
               </a:spcAft>
               <a:buNone/>
             </a:pPr>
             <a:r>
-              <a:rPr lang="en-US" sz="1100" dirty="0">
+              <a:rPr lang="en-US" sz="900" dirty="0">
                 <a:solidFill>
                   <a:srgbClr val="333333"/>
                 </a:solidFill>
@@ -11166,17 +12219,17 @@
               </a:rPr>
               <a:t>description_en</a:t>
             </a:r>
-            <a:endParaRPr lang="en-US" sz="1100" dirty="0"/>
+            <a:endParaRPr lang="en-US" sz="900" dirty="0"/>
           </a:p>
           <a:p>
             <a:pPr indent="0" marL="0">
               <a:spcAft>
-                <a:spcPts val="400"/>
+                <a:spcPts val="200"/>
               </a:spcAft>
               <a:buNone/>
             </a:pPr>
             <a:r>
-              <a:rPr lang="en-US" sz="1100" dirty="0">
+              <a:rPr lang="en-US" sz="900" dirty="0">
                 <a:solidFill>
                   <a:srgbClr val="333333"/>
                 </a:solidFill>
@@ -11186,17 +12239,17 @@
               </a:rPr>
               <a:t>description_ja?</a:t>
             </a:r>
-            <a:endParaRPr lang="en-US" sz="1100" dirty="0"/>
+            <a:endParaRPr lang="en-US" sz="900" dirty="0"/>
           </a:p>
           <a:p>
             <a:pPr indent="0" marL="0">
               <a:spcAft>
-                <a:spcPts val="400"/>
+                <a:spcPts val="200"/>
               </a:spcAft>
               <a:buNone/>
             </a:pPr>
             <a:r>
-              <a:rPr lang="en-US" sz="1100" dirty="0">
+              <a:rPr lang="en-US" sz="900" dirty="0">
                 <a:solidFill>
                   <a:srgbClr val="333333"/>
                 </a:solidFill>
@@ -11206,44 +12259,24 @@
               </a:rPr>
               <a:t>focus_areas[]</a:t>
             </a:r>
-            <a:endParaRPr lang="en-US" sz="1100" dirty="0"/>
-          </a:p>
-          <a:p>
-            <a:pPr indent="0" marL="0">
-              <a:spcAft>
-                <a:spcPts val="400"/>
-              </a:spcAft>
-              <a:buNone/>
-            </a:pPr>
-            <a:r>
-              <a:rPr lang="en-US" sz="1100" dirty="0">
-                <a:solidFill>
-                  <a:srgbClr val="333333"/>
-                </a:solidFill>
-                <a:latin typeface="Menlo" pitchFamily="34" charset="0"/>
-                <a:ea typeface="Menlo" pitchFamily="34" charset="-122"/>
-                <a:cs typeface="Menlo" pitchFamily="34" charset="-120"/>
-              </a:rPr>
-              <a:t>date_added</a:t>
-            </a:r>
-            <a:endParaRPr lang="en-US" sz="1100" dirty="0"/>
+            <a:endParaRPr lang="en-US" sz="900" dirty="0"/>
           </a:p>
         </p:txBody>
       </p:sp>
       <p:sp>
         <p:nvSpPr>
-          <p:cNvPr id="14" name="Shape 12"/>
-          <p:cNvSpPr/>
-          <p:nvPr/>
-        </p:nvSpPr>
-        <p:spPr>
-          <a:xfrm>
-            <a:off x="6035040" y="1463040"/>
-            <a:ext cx="2606040" cy="502920"/>
+          <p:cNvPr id="15" name="Shape 13"/>
+          <p:cNvSpPr/>
+          <p:nvPr/>
+        </p:nvSpPr>
+        <p:spPr>
+          <a:xfrm>
+            <a:off x="6035040" y="1737360"/>
+            <a:ext cx="2606040" cy="365760"/>
           </a:xfrm>
           <a:prstGeom prst="roundRect">
             <a:avLst>
-              <a:gd name="adj" fmla="val 10909"/>
+              <a:gd name="adj" fmla="val 15000"/>
             </a:avLst>
           </a:prstGeom>
           <a:solidFill>
@@ -11259,14 +12292,14 @@
       </p:sp>
       <p:sp>
         <p:nvSpPr>
-          <p:cNvPr id="15" name="Text 13"/>
-          <p:cNvSpPr/>
-          <p:nvPr/>
-        </p:nvSpPr>
-        <p:spPr>
-          <a:xfrm>
-            <a:off x="6035040" y="1463040"/>
-            <a:ext cx="2606040" cy="502920"/>
+          <p:cNvPr id="16" name="Text 14"/>
+          <p:cNvSpPr/>
+          <p:nvPr/>
+        </p:nvSpPr>
+        <p:spPr>
+          <a:xfrm>
+            <a:off x="6035040" y="1737360"/>
+            <a:ext cx="2606040" cy="365760"/>
           </a:xfrm>
           <a:prstGeom prst="rect">
             <a:avLst/>
@@ -11282,7 +12315,7 @@
               <a:buNone/>
             </a:pPr>
             <a:r>
-              <a:rPr lang="en-US" sz="1400" b="1" dirty="0">
+              <a:rPr lang="en-US" sz="1200" b="1" dirty="0">
                 <a:solidFill>
                   <a:srgbClr val="FFFFFF"/>
                 </a:solidFill>
@@ -11290,17 +12323,13 @@
                 <a:ea typeface="Meiryo" pitchFamily="34" charset="-122"/>
                 <a:cs typeface="Meiryo" pitchFamily="34" charset="-120"/>
               </a:rPr>
-              <a:t>events
-</a:t>
-            </a:r>
-            <a:endParaRPr lang="en-US" sz="1400" dirty="0"/>
-          </a:p>
-          <a:p>
+              <a:t>events  </a:t>
+            </a:r>
             <a:pPr algn="ctr" indent="0" marL="0">
               <a:buNone/>
             </a:pPr>
             <a:r>
-              <a:rPr lang="en-US" sz="1000" dirty="0">
+              <a:rPr lang="en-US" sz="900" dirty="0">
                 <a:solidFill>
                   <a:srgbClr val="E8EEF7"/>
                 </a:solidFill>
@@ -11310,20 +12339,20 @@
               </a:rPr>
               <a:t>イベント</a:t>
             </a:r>
-            <a:endParaRPr lang="en-US" sz="1400" dirty="0"/>
+            <a:endParaRPr lang="en-US" sz="1200" dirty="0"/>
           </a:p>
         </p:txBody>
       </p:sp>
       <p:sp>
         <p:nvSpPr>
-          <p:cNvPr id="16" name="Shape 14"/>
-          <p:cNvSpPr/>
-          <p:nvPr/>
-        </p:nvSpPr>
-        <p:spPr>
-          <a:xfrm>
-            <a:off x="6035040" y="1965960"/>
-            <a:ext cx="2606040" cy="3291840"/>
+          <p:cNvPr id="17" name="Shape 15"/>
+          <p:cNvSpPr/>
+          <p:nvPr/>
+        </p:nvSpPr>
+        <p:spPr>
+          <a:xfrm>
+            <a:off x="6035040" y="2103120"/>
+            <a:ext cx="2606040" cy="1280160"/>
           </a:xfrm>
           <a:prstGeom prst="rect">
             <a:avLst/>
@@ -11341,14 +12370,14 @@
       </p:sp>
       <p:sp>
         <p:nvSpPr>
-          <p:cNvPr id="17" name="Text 15"/>
-          <p:cNvSpPr/>
-          <p:nvPr/>
-        </p:nvSpPr>
-        <p:spPr>
-          <a:xfrm>
-            <a:off x="6217920" y="2103120"/>
-            <a:ext cx="2240280" cy="3017520"/>
+          <p:cNvPr id="18" name="Text 16"/>
+          <p:cNvSpPr/>
+          <p:nvPr/>
+        </p:nvSpPr>
+        <p:spPr>
+          <a:xfrm>
+            <a:off x="6172200" y="2194560"/>
+            <a:ext cx="2331720" cy="1188720"/>
           </a:xfrm>
           <a:prstGeom prst="rect">
             <a:avLst/>
@@ -11362,12 +12391,12 @@
           <a:p>
             <a:pPr indent="0" marL="0">
               <a:spcAft>
-                <a:spcPts val="400"/>
+                <a:spcPts val="200"/>
               </a:spcAft>
               <a:buNone/>
             </a:pPr>
             <a:r>
-              <a:rPr lang="en-US" sz="1100" dirty="0">
+              <a:rPr lang="en-US" sz="900" dirty="0">
                 <a:solidFill>
                   <a:srgbClr val="333333"/>
                 </a:solidFill>
@@ -11377,17 +12406,17 @@
               </a:rPr>
               <a:t>title_en</a:t>
             </a:r>
-            <a:endParaRPr lang="en-US" sz="1100" dirty="0"/>
+            <a:endParaRPr lang="en-US" sz="900" dirty="0"/>
           </a:p>
           <a:p>
             <a:pPr indent="0" marL="0">
               <a:spcAft>
-                <a:spcPts val="400"/>
+                <a:spcPts val="200"/>
               </a:spcAft>
               <a:buNone/>
             </a:pPr>
             <a:r>
-              <a:rPr lang="en-US" sz="1100" dirty="0">
+              <a:rPr lang="en-US" sz="900" dirty="0">
                 <a:solidFill>
                   <a:srgbClr val="333333"/>
                 </a:solidFill>
@@ -11397,17 +12426,17 @@
               </a:rPr>
               <a:t>title_ja?</a:t>
             </a:r>
-            <a:endParaRPr lang="en-US" sz="1100" dirty="0"/>
+            <a:endParaRPr lang="en-US" sz="900" dirty="0"/>
           </a:p>
           <a:p>
             <a:pPr indent="0" marL="0">
               <a:spcAft>
-                <a:spcPts val="400"/>
+                <a:spcPts val="200"/>
               </a:spcAft>
               <a:buNone/>
             </a:pPr>
             <a:r>
-              <a:rPr lang="en-US" sz="1100" dirty="0">
+              <a:rPr lang="en-US" sz="900" dirty="0">
                 <a:solidFill>
                   <a:srgbClr val="C0392B"/>
                 </a:solidFill>
@@ -11417,17 +12446,17 @@
               </a:rPr>
               <a:t>type ★</a:t>
             </a:r>
-            <a:endParaRPr lang="en-US" sz="1100" dirty="0"/>
+            <a:endParaRPr lang="en-US" sz="900" dirty="0"/>
           </a:p>
           <a:p>
             <a:pPr indent="0" marL="0">
               <a:spcAft>
-                <a:spcPts val="400"/>
+                <a:spcPts val="200"/>
               </a:spcAft>
               <a:buNone/>
             </a:pPr>
             <a:r>
-              <a:rPr lang="en-US" sz="1100" dirty="0">
+              <a:rPr lang="en-US" sz="900" dirty="0">
                 <a:solidFill>
                   <a:srgbClr val="333333"/>
                 </a:solidFill>
@@ -11437,17 +12466,17 @@
               </a:rPr>
               <a:t>date_start</a:t>
             </a:r>
-            <a:endParaRPr lang="en-US" sz="1100" dirty="0"/>
+            <a:endParaRPr lang="en-US" sz="900" dirty="0"/>
           </a:p>
           <a:p>
             <a:pPr indent="0" marL="0">
               <a:spcAft>
-                <a:spcPts val="400"/>
+                <a:spcPts val="200"/>
               </a:spcAft>
               <a:buNone/>
             </a:pPr>
             <a:r>
-              <a:rPr lang="en-US" sz="1100" dirty="0">
+              <a:rPr lang="en-US" sz="900" dirty="0">
                 <a:solidFill>
                   <a:srgbClr val="333333"/>
                 </a:solidFill>
@@ -11457,17 +12486,17 @@
               </a:rPr>
               <a:t>date_end</a:t>
             </a:r>
-            <a:endParaRPr lang="en-US" sz="1100" dirty="0"/>
+            <a:endParaRPr lang="en-US" sz="900" dirty="0"/>
           </a:p>
           <a:p>
             <a:pPr indent="0" marL="0">
               <a:spcAft>
-                <a:spcPts val="400"/>
+                <a:spcPts val="200"/>
               </a:spcAft>
               <a:buNone/>
             </a:pPr>
             <a:r>
-              <a:rPr lang="en-US" sz="1100" dirty="0">
+              <a:rPr lang="en-US" sz="900" dirty="0">
                 <a:solidFill>
                   <a:srgbClr val="C0392B"/>
                 </a:solidFill>
@@ -11477,17 +12506,17 @@
               </a:rPr>
               <a:t>language ★</a:t>
             </a:r>
-            <a:endParaRPr lang="en-US" sz="1100" dirty="0"/>
+            <a:endParaRPr lang="en-US" sz="900" dirty="0"/>
           </a:p>
           <a:p>
             <a:pPr indent="0" marL="0">
               <a:spcAft>
-                <a:spcPts val="400"/>
+                <a:spcPts val="200"/>
               </a:spcAft>
               <a:buNone/>
             </a:pPr>
             <a:r>
-              <a:rPr lang="en-US" sz="1100" dirty="0">
+              <a:rPr lang="en-US" sz="900" dirty="0">
                 <a:solidFill>
                   <a:srgbClr val="333333"/>
                 </a:solidFill>
@@ -11497,17 +12526,17 @@
               </a:rPr>
               <a:t>location</a:t>
             </a:r>
-            <a:endParaRPr lang="en-US" sz="1100" dirty="0"/>
+            <a:endParaRPr lang="en-US" sz="900" dirty="0"/>
           </a:p>
           <a:p>
             <a:pPr indent="0" marL="0">
               <a:spcAft>
-                <a:spcPts val="400"/>
+                <a:spcPts val="200"/>
               </a:spcAft>
               <a:buNone/>
             </a:pPr>
             <a:r>
-              <a:rPr lang="en-US" sz="1100" dirty="0">
+              <a:rPr lang="en-US" sz="900" dirty="0">
                 <a:solidFill>
                   <a:srgbClr val="333333"/>
                 </a:solidFill>
@@ -11517,17 +12546,17 @@
               </a:rPr>
               <a:t>url</a:t>
             </a:r>
-            <a:endParaRPr lang="en-US" sz="1100" dirty="0"/>
+            <a:endParaRPr lang="en-US" sz="900" dirty="0"/>
           </a:p>
           <a:p>
             <a:pPr indent="0" marL="0">
               <a:spcAft>
-                <a:spcPts val="400"/>
+                <a:spcPts val="200"/>
               </a:spcAft>
               <a:buNone/>
             </a:pPr>
             <a:r>
-              <a:rPr lang="en-US" sz="1100" dirty="0">
+              <a:rPr lang="en-US" sz="900" dirty="0">
                 <a:solidFill>
                   <a:srgbClr val="333333"/>
                 </a:solidFill>
@@ -11537,17 +12566,180 @@
               </a:rPr>
               <a:t>description_en</a:t>
             </a:r>
-            <a:endParaRPr lang="en-US" sz="1100" dirty="0"/>
-          </a:p>
+            <a:endParaRPr lang="en-US" sz="900" dirty="0"/>
+          </a:p>
+        </p:txBody>
+      </p:sp>
+      <p:sp>
+        <p:nvSpPr>
+          <p:cNvPr id="19" name="Text 17"/>
+          <p:cNvSpPr/>
+          <p:nvPr/>
+        </p:nvSpPr>
+        <p:spPr>
+          <a:xfrm>
+            <a:off x="548640" y="3520440"/>
+            <a:ext cx="8046720" cy="274320"/>
+          </a:xfrm>
+          <a:prstGeom prst="rect">
+            <a:avLst/>
+          </a:prstGeom>
+          <a:noFill/>
+          <a:ln/>
+        </p:spPr>
+        <p:txBody>
+          <a:bodyPr wrap="square" rtlCol="0" anchor="ctr"/>
+          <a:lstStyle/>
           <a:p>
             <a:pPr indent="0" marL="0">
-              <a:spcAft>
-                <a:spcPts val="400"/>
-              </a:spcAft>
-              <a:buNone/>
-            </a:pPr>
-            <a:r>
-              <a:rPr lang="en-US" sz="1100" dirty="0">
+              <a:buNone/>
+            </a:pPr>
+            <a:r>
+              <a:rPr lang="en-US" sz="1200" b="1" dirty="0">
+                <a:solidFill>
+                  <a:srgbClr val="C0392B"/>
+                </a:solidFill>
+                <a:latin typeface="Meiryo" pitchFamily="34" charset="0"/>
+                <a:ea typeface="Meiryo" pitchFamily="34" charset="-122"/>
+                <a:cs typeface="Meiryo" pitchFamily="34" charset="-120"/>
+              </a:rPr>
+              <a:t>src/data/*.json（外部 API から自動取得）</a:t>
+            </a:r>
+            <a:endParaRPr lang="en-US" sz="1200" dirty="0"/>
+          </a:p>
+        </p:txBody>
+      </p:sp>
+      <p:sp>
+        <p:nvSpPr>
+          <p:cNvPr id="20" name="Shape 18"/>
+          <p:cNvSpPr/>
+          <p:nvPr/>
+        </p:nvSpPr>
+        <p:spPr>
+          <a:xfrm>
+            <a:off x="1371600" y="3840480"/>
+            <a:ext cx="2743200" cy="365760"/>
+          </a:xfrm>
+          <a:prstGeom prst="roundRect">
+            <a:avLst>
+              <a:gd name="adj" fmla="val 15000"/>
+            </a:avLst>
+          </a:prstGeom>
+          <a:solidFill>
+            <a:srgbClr val="C0392B"/>
+          </a:solidFill>
+          <a:ln w="12700">
+            <a:solidFill>
+              <a:srgbClr val="C0392B"/>
+            </a:solidFill>
+            <a:prstDash val="solid"/>
+          </a:ln>
+        </p:spPr>
+      </p:sp>
+      <p:sp>
+        <p:nvSpPr>
+          <p:cNvPr id="21" name="Text 19"/>
+          <p:cNvSpPr/>
+          <p:nvPr/>
+        </p:nvSpPr>
+        <p:spPr>
+          <a:xfrm>
+            <a:off x="1371600" y="3840480"/>
+            <a:ext cx="2743200" cy="365760"/>
+          </a:xfrm>
+          <a:prstGeom prst="rect">
+            <a:avLst/>
+          </a:prstGeom>
+          <a:noFill/>
+          <a:ln/>
+        </p:spPr>
+        <p:txBody>
+          <a:bodyPr wrap="square" rtlCol="0" anchor="ctr"/>
+          <a:lstStyle/>
+          <a:p>
+            <a:pPr algn="ctr" indent="0" marL="0">
+              <a:buNone/>
+            </a:pPr>
+            <a:r>
+              <a:rPr lang="en-US" sz="1200" b="1" dirty="0">
+                <a:solidFill>
+                  <a:srgbClr val="FFFFFF"/>
+                </a:solidFill>
+                <a:latin typeface="Meiryo" pitchFamily="34" charset="0"/>
+                <a:ea typeface="Meiryo" pitchFamily="34" charset="-122"/>
+                <a:cs typeface="Meiryo" pitchFamily="34" charset="-120"/>
+              </a:rPr>
+              <a:t>videos.json  </a:t>
+            </a:r>
+            <a:pPr algn="ctr" indent="0" marL="0">
+              <a:buNone/>
+            </a:pPr>
+            <a:r>
+              <a:rPr lang="en-US" sz="900" dirty="0">
+                <a:solidFill>
+                  <a:srgbClr val="FCE5E2"/>
+                </a:solidFill>
+                <a:latin typeface="Meiryo" pitchFamily="34" charset="0"/>
+                <a:ea typeface="Meiryo" pitchFamily="34" charset="-122"/>
+                <a:cs typeface="Meiryo" pitchFamily="34" charset="-120"/>
+              </a:rPr>
+              <a:t>YouTube Data API v3</a:t>
+            </a:r>
+            <a:endParaRPr lang="en-US" sz="1200" dirty="0"/>
+          </a:p>
+        </p:txBody>
+      </p:sp>
+      <p:sp>
+        <p:nvSpPr>
+          <p:cNvPr id="22" name="Shape 20"/>
+          <p:cNvSpPr/>
+          <p:nvPr/>
+        </p:nvSpPr>
+        <p:spPr>
+          <a:xfrm>
+            <a:off x="1371600" y="4206240"/>
+            <a:ext cx="2743200" cy="822960"/>
+          </a:xfrm>
+          <a:prstGeom prst="rect">
+            <a:avLst/>
+          </a:prstGeom>
+          <a:solidFill>
+            <a:srgbClr val="FAFAFA"/>
+          </a:solidFill>
+          <a:ln w="12700">
+            <a:solidFill>
+              <a:srgbClr val="DDDDDD"/>
+            </a:solidFill>
+            <a:prstDash val="solid"/>
+          </a:ln>
+        </p:spPr>
+      </p:sp>
+      <p:sp>
+        <p:nvSpPr>
+          <p:cNvPr id="23" name="Text 21"/>
+          <p:cNvSpPr/>
+          <p:nvPr/>
+        </p:nvSpPr>
+        <p:spPr>
+          <a:xfrm>
+            <a:off x="1508760" y="4297680"/>
+            <a:ext cx="2468880" cy="548640"/>
+          </a:xfrm>
+          <a:prstGeom prst="rect">
+            <a:avLst/>
+          </a:prstGeom>
+          <a:noFill/>
+          <a:ln/>
+        </p:spPr>
+        <p:txBody>
+          <a:bodyPr wrap="square" rtlCol="0" anchor="t"/>
+          <a:lstStyle/>
+          <a:p>
+            <a:pPr indent="0" marL="0">
+              <a:buNone/>
+            </a:pPr>
+            <a:r>
+              <a:rPr lang="en-US" sz="900" dirty="0">
                 <a:solidFill>
                   <a:srgbClr val="333333"/>
                 </a:solidFill>
@@ -11555,19 +12747,182 @@
                 <a:ea typeface="Menlo" pitchFamily="34" charset="-122"/>
                 <a:cs typeface="Menlo" pitchFamily="34" charset="-120"/>
               </a:rPr>
-              <a:t>description_ja?</a:t>
-            </a:r>
-            <a:endParaRPr lang="en-US" sz="1100" dirty="0"/>
-          </a:p>
+              <a:t>videoId · title · channelTitle · publishedAt · thumbnail · matchedQueries[]</a:t>
+            </a:r>
+            <a:endParaRPr lang="en-US" sz="900" dirty="0"/>
+          </a:p>
+        </p:txBody>
+      </p:sp>
+      <p:sp>
+        <p:nvSpPr>
+          <p:cNvPr id="24" name="Text 22"/>
+          <p:cNvSpPr/>
+          <p:nvPr/>
+        </p:nvSpPr>
+        <p:spPr>
+          <a:xfrm>
+            <a:off x="1508760" y="4800600"/>
+            <a:ext cx="2468880" cy="274320"/>
+          </a:xfrm>
+          <a:prstGeom prst="rect">
+            <a:avLst/>
+          </a:prstGeom>
+          <a:noFill/>
+          <a:ln/>
+        </p:spPr>
+        <p:txBody>
+          <a:bodyPr wrap="square" rtlCol="0" anchor="ctr"/>
+          <a:lstStyle/>
           <a:p>
             <a:pPr indent="0" marL="0">
-              <a:spcAft>
-                <a:spcPts val="400"/>
-              </a:spcAft>
-              <a:buNone/>
-            </a:pPr>
-            <a:r>
-              <a:rPr lang="en-US" sz="1100" dirty="0">
+              <a:buNone/>
+            </a:pPr>
+            <a:r>
+              <a:rPr lang="en-US" sz="800" i="1" dirty="0">
+                <a:solidFill>
+                  <a:srgbClr val="888888"/>
+                </a:solidFill>
+                <a:latin typeface="Meiryo" pitchFamily="34" charset="0"/>
+                <a:ea typeface="Meiryo" pitchFamily="34" charset="-122"/>
+                <a:cs typeface="Meiryo" pitchFamily="34" charset="-120"/>
+              </a:rPr>
+              <a:t>src: Collective Predictive Coding / 記号創発 / CPC仮説</a:t>
+            </a:r>
+            <a:endParaRPr lang="en-US" sz="800" dirty="0"/>
+          </a:p>
+        </p:txBody>
+      </p:sp>
+      <p:sp>
+        <p:nvSpPr>
+          <p:cNvPr id="25" name="Shape 23"/>
+          <p:cNvSpPr/>
+          <p:nvPr/>
+        </p:nvSpPr>
+        <p:spPr>
+          <a:xfrm>
+            <a:off x="5029200" y="3840480"/>
+            <a:ext cx="2743200" cy="365760"/>
+          </a:xfrm>
+          <a:prstGeom prst="roundRect">
+            <a:avLst>
+              <a:gd name="adj" fmla="val 15000"/>
+            </a:avLst>
+          </a:prstGeom>
+          <a:solidFill>
+            <a:srgbClr val="C0392B"/>
+          </a:solidFill>
+          <a:ln w="12700">
+            <a:solidFill>
+              <a:srgbClr val="C0392B"/>
+            </a:solidFill>
+            <a:prstDash val="solid"/>
+          </a:ln>
+        </p:spPr>
+      </p:sp>
+      <p:sp>
+        <p:nvSpPr>
+          <p:cNvPr id="26" name="Text 24"/>
+          <p:cNvSpPr/>
+          <p:nvPr/>
+        </p:nvSpPr>
+        <p:spPr>
+          <a:xfrm>
+            <a:off x="5029200" y="3840480"/>
+            <a:ext cx="2743200" cy="365760"/>
+          </a:xfrm>
+          <a:prstGeom prst="rect">
+            <a:avLst/>
+          </a:prstGeom>
+          <a:noFill/>
+          <a:ln/>
+        </p:spPr>
+        <p:txBody>
+          <a:bodyPr wrap="square" rtlCol="0" anchor="ctr"/>
+          <a:lstStyle/>
+          <a:p>
+            <a:pPr algn="ctr" indent="0" marL="0">
+              <a:buNone/>
+            </a:pPr>
+            <a:r>
+              <a:rPr lang="en-US" sz="1200" b="1" dirty="0">
+                <a:solidFill>
+                  <a:srgbClr val="FFFFFF"/>
+                </a:solidFill>
+                <a:latin typeface="Meiryo" pitchFamily="34" charset="0"/>
+                <a:ea typeface="Meiryo" pitchFamily="34" charset="-122"/>
+                <a:cs typeface="Meiryo" pitchFamily="34" charset="-120"/>
+              </a:rPr>
+              <a:t>notes.json  </a:t>
+            </a:r>
+            <a:pPr algn="ctr" indent="0" marL="0">
+              <a:buNone/>
+            </a:pPr>
+            <a:r>
+              <a:rPr lang="en-US" sz="900" dirty="0">
+                <a:solidFill>
+                  <a:srgbClr val="FCE5E2"/>
+                </a:solidFill>
+                <a:latin typeface="Meiryo" pitchFamily="34" charset="0"/>
+                <a:ea typeface="Meiryo" pitchFamily="34" charset="-122"/>
+                <a:cs typeface="Meiryo" pitchFamily="34" charset="-120"/>
+              </a:rPr>
+              <a:t>note.com RSS</a:t>
+            </a:r>
+            <a:endParaRPr lang="en-US" sz="1200" dirty="0"/>
+          </a:p>
+        </p:txBody>
+      </p:sp>
+      <p:sp>
+        <p:nvSpPr>
+          <p:cNvPr id="27" name="Shape 25"/>
+          <p:cNvSpPr/>
+          <p:nvPr/>
+        </p:nvSpPr>
+        <p:spPr>
+          <a:xfrm>
+            <a:off x="5029200" y="4206240"/>
+            <a:ext cx="2743200" cy="822960"/>
+          </a:xfrm>
+          <a:prstGeom prst="rect">
+            <a:avLst/>
+          </a:prstGeom>
+          <a:solidFill>
+            <a:srgbClr val="FAFAFA"/>
+          </a:solidFill>
+          <a:ln w="12700">
+            <a:solidFill>
+              <a:srgbClr val="DDDDDD"/>
+            </a:solidFill>
+            <a:prstDash val="solid"/>
+          </a:ln>
+        </p:spPr>
+      </p:sp>
+      <p:sp>
+        <p:nvSpPr>
+          <p:cNvPr id="28" name="Text 26"/>
+          <p:cNvSpPr/>
+          <p:nvPr/>
+        </p:nvSpPr>
+        <p:spPr>
+          <a:xfrm>
+            <a:off x="5166360" y="4297680"/>
+            <a:ext cx="2468880" cy="548640"/>
+          </a:xfrm>
+          <a:prstGeom prst="rect">
+            <a:avLst/>
+          </a:prstGeom>
+          <a:noFill/>
+          <a:ln/>
+        </p:spPr>
+        <p:txBody>
+          <a:bodyPr wrap="square" rtlCol="0" anchor="t"/>
+          <a:lstStyle/>
+          <a:p>
+            <a:pPr indent="0" marL="0">
+              <a:buNone/>
+            </a:pPr>
+            <a:r>
+              <a:rPr lang="en-US" sz="900" dirty="0">
                 <a:solidFill>
                   <a:srgbClr val="333333"/>
                 </a:solidFill>
@@ -11575,22 +12930,22 @@
                 <a:ea typeface="Menlo" pitchFamily="34" charset="-122"/>
                 <a:cs typeface="Menlo" pitchFamily="34" charset="-120"/>
               </a:rPr>
-              <a:t>date_added</a:t>
-            </a:r>
-            <a:endParaRPr lang="en-US" sz="1100" dirty="0"/>
+              <a:t>id · url · title · author · publishedAt · excerpt · thumbnail</a:t>
+            </a:r>
+            <a:endParaRPr lang="en-US" sz="900" dirty="0"/>
           </a:p>
         </p:txBody>
       </p:sp>
       <p:sp>
         <p:nvSpPr>
-          <p:cNvPr id="18" name="Text 16"/>
-          <p:cNvSpPr/>
-          <p:nvPr/>
-        </p:nvSpPr>
-        <p:spPr>
-          <a:xfrm>
-            <a:off x="548640" y="5394960"/>
-            <a:ext cx="8046720" cy="274320"/>
+          <p:cNvPr id="29" name="Text 27"/>
+          <p:cNvSpPr/>
+          <p:nvPr/>
+        </p:nvSpPr>
+        <p:spPr>
+          <a:xfrm>
+            <a:off x="5166360" y="4800600"/>
+            <a:ext cx="2468880" cy="274320"/>
           </a:xfrm>
           <a:prstGeom prst="rect">
             <a:avLst/>
@@ -11602,11 +12957,50 @@
           <a:bodyPr wrap="square" rtlCol="0" anchor="ctr"/>
           <a:lstStyle/>
           <a:p>
+            <a:pPr indent="0" marL="0">
+              <a:buNone/>
+            </a:pPr>
+            <a:r>
+              <a:rPr lang="en-US" sz="800" i="1" dirty="0">
+                <a:solidFill>
+                  <a:srgbClr val="888888"/>
+                </a:solidFill>
+                <a:latin typeface="Meiryo" pitchFamily="34" charset="0"/>
+                <a:ea typeface="Meiryo" pitchFamily="34" charset="-122"/>
+                <a:cs typeface="Meiryo" pitchFamily="34" charset="-120"/>
+              </a:rPr>
+              <a:t>src: note.com/symbol_emerg/rss</a:t>
+            </a:r>
+            <a:endParaRPr lang="en-US" sz="800" dirty="0"/>
+          </a:p>
+        </p:txBody>
+      </p:sp>
+      <p:sp>
+        <p:nvSpPr>
+          <p:cNvPr id="30" name="Text 28"/>
+          <p:cNvSpPr/>
+          <p:nvPr/>
+        </p:nvSpPr>
+        <p:spPr>
+          <a:xfrm>
+            <a:off x="548640" y="4777740"/>
+            <a:ext cx="8046720" cy="274320"/>
+          </a:xfrm>
+          <a:prstGeom prst="rect">
+            <a:avLst/>
+          </a:prstGeom>
+          <a:noFill/>
+          <a:ln/>
+        </p:spPr>
+        <p:txBody>
+          <a:bodyPr wrap="square" rtlCol="0" anchor="ctr"/>
+          <a:lstStyle/>
+          <a:p>
             <a:pPr algn="ctr" indent="0" marL="0">
               <a:buNone/>
             </a:pPr>
             <a:r>
-              <a:rPr lang="en-US" sz="1000" i="1" dirty="0">
+              <a:rPr lang="en-US" sz="900" i="1" dirty="0">
                 <a:solidFill>
                   <a:srgbClr val="888888"/>
                 </a:solidFill>
@@ -11616,7 +13010,7 @@
               </a:rPr>
               <a:t>?  = optional      ★ = enum 制約 (Zod で固定)</a:t>
             </a:r>
-            <a:endParaRPr lang="en-US" sz="1000" dirty="0"/>
+            <a:endParaRPr lang="en-US" sz="900" dirty="0"/>
           </a:p>
         </p:txBody>
       </p:sp>
@@ -11820,7 +13214,7 @@
               <a:buNone/>
             </a:pPr>
             <a:r>
-              <a:rPr lang="en-US" sz="1100" dirty="0">
+              <a:rPr lang="en-US" sz="1000" dirty="0">
                 <a:solidFill>
                   <a:srgbClr val="333333"/>
                 </a:solidFill>
@@ -11830,7 +13224,7 @@
               </a:rPr>
               <a:t>/                        → /en/ にリダイレクト</a:t>
             </a:r>
-            <a:endParaRPr lang="en-US" sz="1100" dirty="0"/>
+            <a:endParaRPr lang="en-US" sz="1000" dirty="0"/>
           </a:p>
           <a:p>
             <a:pPr indent="0" marL="0">
@@ -11840,7 +13234,7 @@
               <a:buNone/>
             </a:pPr>
             <a:r>
-              <a:rPr lang="en-US" sz="1100" dirty="0">
+              <a:rPr lang="en-US" sz="1000" dirty="0">
                 <a:solidFill>
                   <a:srgbClr val="333333"/>
                 </a:solidFill>
@@ -11848,9 +13242,9 @@
                 <a:ea typeface="Menlo" pitchFamily="34" charset="-122"/>
                 <a:cs typeface="Menlo" pitchFamily="34" charset="-120"/>
               </a:rPr>
-              <a:t>/en/                     トップ (英語)</a:t>
-            </a:r>
-            <a:endParaRPr lang="en-US" sz="1100" dirty="0"/>
+              <a:t>/en/                     ホーム（CPC SVG + X CTA サイドバー）</a:t>
+            </a:r>
+            <a:endParaRPr lang="en-US" sz="1000" dirty="0"/>
           </a:p>
           <a:p>
             <a:pPr indent="0" marL="0">
@@ -11860,7 +13254,7 @@
               <a:buNone/>
             </a:pPr>
             <a:r>
-              <a:rPr lang="en-US" sz="1100" dirty="0">
+              <a:rPr lang="en-US" sz="1000" dirty="0">
                 <a:solidFill>
                   <a:srgbClr val="333333"/>
                 </a:solidFill>
@@ -11868,9 +13262,9 @@
                 <a:ea typeface="Menlo" pitchFamily="34" charset="-122"/>
                 <a:cs typeface="Menlo" pitchFamily="34" charset="-120"/>
               </a:rPr>
-              <a:t>  /en/papers/            一覧</a:t>
-            </a:r>
-            <a:endParaRPr lang="en-US" sz="1100" dirty="0"/>
+              <a:t>  /en/papers/            一覧 + /en/papers/{slug}/</a:t>
+            </a:r>
+            <a:endParaRPr lang="en-US" sz="1000" dirty="0"/>
           </a:p>
           <a:p>
             <a:pPr indent="0" marL="0">
@@ -11880,7 +13274,7 @@
               <a:buNone/>
             </a:pPr>
             <a:r>
-              <a:rPr lang="en-US" sz="1100" dirty="0">
+              <a:rPr lang="en-US" sz="1000" dirty="0">
                 <a:solidFill>
                   <a:srgbClr val="333333"/>
                 </a:solidFill>
@@ -11888,9 +13282,9 @@
                 <a:ea typeface="Menlo" pitchFamily="34" charset="-122"/>
                 <a:cs typeface="Menlo" pitchFamily="34" charset="-120"/>
               </a:rPr>
-              <a:t>  /en/papers/{slug}/     詳細</a:t>
-            </a:r>
-            <a:endParaRPr lang="en-US" sz="1100" dirty="0"/>
+              <a:t>  /en/labs/              一覧 + /en/labs/{slug}/</a:t>
+            </a:r>
+            <a:endParaRPr lang="en-US" sz="1000" dirty="0"/>
           </a:p>
           <a:p>
             <a:pPr indent="0" marL="0">
@@ -11900,7 +13294,7 @@
               <a:buNone/>
             </a:pPr>
             <a:r>
-              <a:rPr lang="en-US" sz="1100" dirty="0">
+              <a:rPr lang="en-US" sz="1000" dirty="0">
                 <a:solidFill>
                   <a:srgbClr val="333333"/>
                 </a:solidFill>
@@ -11908,9 +13302,9 @@
                 <a:ea typeface="Menlo" pitchFamily="34" charset="-122"/>
                 <a:cs typeface="Menlo" pitchFamily="34" charset="-120"/>
               </a:rPr>
-              <a:t>  /en/labs/              一覧</a:t>
-            </a:r>
-            <a:endParaRPr lang="en-US" sz="1100" dirty="0"/>
+              <a:t>  /en/events/            一覧（Upcoming / Past）+ 詳細</a:t>
+            </a:r>
+            <a:endParaRPr lang="en-US" sz="1000" dirty="0"/>
           </a:p>
           <a:p>
             <a:pPr indent="0" marL="0">
@@ -11920,7 +13314,7 @@
               <a:buNone/>
             </a:pPr>
             <a:r>
-              <a:rPr lang="en-US" sz="1100" dirty="0">
+              <a:rPr lang="en-US" sz="1000" dirty="0">
                 <a:solidFill>
                   <a:srgbClr val="333333"/>
                 </a:solidFill>
@@ -11928,9 +13322,9 @@
                 <a:ea typeface="Menlo" pitchFamily="34" charset="-122"/>
                 <a:cs typeface="Menlo" pitchFamily="34" charset="-120"/>
               </a:rPr>
-              <a:t>  /en/labs/{slug}/       詳細</a:t>
-            </a:r>
-            <a:endParaRPr lang="en-US" sz="1100" dirty="0"/>
+              <a:t>  /en/videos/            一覧（YouTube から自動取得）</a:t>
+            </a:r>
+            <a:endParaRPr lang="en-US" sz="1000" dirty="0"/>
           </a:p>
           <a:p>
             <a:pPr indent="0" marL="0">
@@ -11940,7 +13334,7 @@
               <a:buNone/>
             </a:pPr>
             <a:r>
-              <a:rPr lang="en-US" sz="1100" dirty="0">
+              <a:rPr lang="en-US" sz="1000" dirty="0">
                 <a:solidFill>
                   <a:srgbClr val="333333"/>
                 </a:solidFill>
@@ -11948,9 +13342,9 @@
                 <a:ea typeface="Menlo" pitchFamily="34" charset="-122"/>
                 <a:cs typeface="Menlo" pitchFamily="34" charset="-120"/>
               </a:rPr>
-              <a:t>  /en/events/            一覧 (Upcoming / Past)</a:t>
-            </a:r>
-            <a:endParaRPr lang="en-US" sz="1100" dirty="0"/>
+              <a:t>  /en/articles/          一覧（note から自動取得）</a:t>
+            </a:r>
+            <a:endParaRPr lang="en-US" sz="1000" dirty="0"/>
           </a:p>
           <a:p>
             <a:pPr indent="0" marL="0">
@@ -11960,7 +13354,7 @@
               <a:buNone/>
             </a:pPr>
             <a:r>
-              <a:rPr lang="en-US" sz="1100" dirty="0">
+              <a:rPr lang="en-US" sz="1000" dirty="0">
                 <a:solidFill>
                   <a:srgbClr val="333333"/>
                 </a:solidFill>
@@ -11968,9 +13362,9 @@
                 <a:ea typeface="Menlo" pitchFamily="34" charset="-122"/>
                 <a:cs typeface="Menlo" pitchFamily="34" charset="-120"/>
               </a:rPr>
-              <a:t>  /en/events/{slug}/     詳細</a:t>
-            </a:r>
-            <a:endParaRPr lang="en-US" sz="1100" dirty="0"/>
+              <a:t>  /en/search/            全 5 種を横断する全文検索</a:t>
+            </a:r>
+            <a:endParaRPr lang="en-US" sz="1000" dirty="0"/>
           </a:p>
           <a:p>
             <a:pPr indent="0" marL="0">
@@ -11980,7 +13374,7 @@
               <a:buNone/>
             </a:pPr>
             <a:r>
-              <a:rPr lang="en-US" sz="1100" dirty="0">
+              <a:rPr lang="en-US" sz="1000" dirty="0">
                 <a:solidFill>
                   <a:srgbClr val="333333"/>
                 </a:solidFill>
@@ -11988,29 +13382,9 @@
                 <a:ea typeface="Menlo" pitchFamily="34" charset="-122"/>
                 <a:cs typeface="Menlo" pitchFamily="34" charset="-120"/>
               </a:rPr>
-              <a:t>  /en/search/            全文検索</a:t>
-            </a:r>
-            <a:endParaRPr lang="en-US" sz="1100" dirty="0"/>
-          </a:p>
-          <a:p>
-            <a:pPr indent="0" marL="0">
-              <a:spcAft>
-                <a:spcPts val="300"/>
-              </a:spcAft>
-              <a:buNone/>
-            </a:pPr>
-            <a:r>
-              <a:rPr lang="en-US" sz="1100" dirty="0">
-                <a:solidFill>
-                  <a:srgbClr val="333333"/>
-                </a:solidFill>
-                <a:latin typeface="Menlo" pitchFamily="34" charset="0"/>
-                <a:ea typeface="Menlo" pitchFamily="34" charset="-122"/>
-                <a:cs typeface="Menlo" pitchFamily="34" charset="-120"/>
-              </a:rPr>
               <a:t>/ja/  ...                同じ構造で日本語版</a:t>
             </a:r>
-            <a:endParaRPr lang="en-US" sz="1100" dirty="0"/>
+            <a:endParaRPr lang="en-US" sz="1000" dirty="0"/>
           </a:p>
         </p:txBody>
       </p:sp>
@@ -12062,7 +13436,7 @@
         <p:spPr>
           <a:xfrm>
             <a:off x="5852160" y="1371600"/>
-            <a:ext cx="2926080" cy="2926080"/>
+            <a:ext cx="2926080" cy="3200400"/>
           </a:xfrm>
           <a:prstGeom prst="rect">
             <a:avLst/>
@@ -12082,7 +13456,7 @@
               <a:buChar char="■"/>
             </a:pPr>
             <a:r>
-              <a:rPr lang="en-US" sz="1200" dirty="0">
+              <a:rPr lang="en-US" sz="1100" dirty="0">
                 <a:solidFill>
                   <a:srgbClr val="333333"/>
                 </a:solidFill>
@@ -12092,7 +13466,7 @@
               </a:rPr>
               <a:t>英語が一次、日本語は補助</a:t>
             </a:r>
-            <a:endParaRPr lang="en-US" sz="1200" dirty="0"/>
+            <a:endParaRPr lang="en-US" sz="1100" dirty="0"/>
           </a:p>
           <a:p>
             <a:pPr marL="342900" indent="-342900">
@@ -12103,7 +13477,7 @@
               <a:buChar char="■"/>
             </a:pPr>
             <a:r>
-              <a:rPr lang="en-US" sz="1200" dirty="0">
+              <a:rPr lang="en-US" sz="1100" dirty="0">
                 <a:solidFill>
                   <a:srgbClr val="333333"/>
                 </a:solidFill>
@@ -12113,7 +13487,7 @@
               </a:rPr>
               <a:t>summary_ja などが空なら英語版にフォールバック</a:t>
             </a:r>
-            <a:endParaRPr lang="en-US" sz="1200" dirty="0"/>
+            <a:endParaRPr lang="en-US" sz="1100" dirty="0"/>
           </a:p>
           <a:p>
             <a:pPr marL="342900" indent="-342900">
@@ -12124,7 +13498,7 @@
               <a:buChar char="■"/>
             </a:pPr>
             <a:r>
-              <a:rPr lang="en-US" sz="1200" dirty="0">
+              <a:rPr lang="en-US" sz="1100" dirty="0">
                 <a:solidFill>
                   <a:srgbClr val="333333"/>
                 </a:solidFill>
@@ -12134,7 +13508,7 @@
               </a:rPr>
               <a:t>「（英語のみ）」ラベルを薄く表示</a:t>
             </a:r>
-            <a:endParaRPr lang="en-US" sz="1200" dirty="0"/>
+            <a:endParaRPr lang="en-US" sz="1100" dirty="0"/>
           </a:p>
           <a:p>
             <a:pPr marL="342900" indent="-342900">
@@ -12145,7 +13519,7 @@
               <a:buChar char="■"/>
             </a:pPr>
             <a:r>
-              <a:rPr lang="en-US" sz="1200" dirty="0">
+              <a:rPr lang="en-US" sz="1100" dirty="0">
                 <a:solidFill>
                   <a:srgbClr val="333333"/>
                 </a:solidFill>
@@ -12155,7 +13529,7 @@
               </a:rPr>
               <a:t>Astro 標準 i18n (prefixDefaultLocale: true)</a:t>
             </a:r>
-            <a:endParaRPr lang="en-US" sz="1200" dirty="0"/>
+            <a:endParaRPr lang="en-US" sz="1100" dirty="0"/>
           </a:p>
           <a:p>
             <a:pPr marL="342900" indent="-342900">
@@ -12166,17 +13540,38 @@
               <a:buChar char="■"/>
             </a:pPr>
             <a:r>
-              <a:rPr lang="en-US" sz="1200" dirty="0">
-                <a:solidFill>
-                  <a:srgbClr val="333333"/>
-                </a:solidFill>
-                <a:latin typeface="Meiryo" pitchFamily="34" charset="0"/>
-                <a:ea typeface="Meiryo" pitchFamily="34" charset="-122"/>
-                <a:cs typeface="Meiryo" pitchFamily="34" charset="-120"/>
-              </a:rPr>
-              <a:t>ヘッダー右の EN / JA で同パスの別言語版に飛ぶ</a:t>
-            </a:r>
-            <a:endParaRPr lang="en-US" sz="1200" dirty="0"/>
+              <a:rPr lang="en-US" sz="1100" dirty="0">
+                <a:solidFill>
+                  <a:srgbClr val="333333"/>
+                </a:solidFill>
+                <a:latin typeface="Meiryo" pitchFamily="34" charset="0"/>
+                <a:ea typeface="Meiryo" pitchFamily="34" charset="-122"/>
+                <a:cs typeface="Meiryo" pitchFamily="34" charset="-120"/>
+              </a:rPr>
+              <a:t>ヘッダー右の EN / JA で同パスの別言語版へ</a:t>
+            </a:r>
+            <a:endParaRPr lang="en-US" sz="1100" dirty="0"/>
+          </a:p>
+          <a:p>
+            <a:pPr marL="342900" indent="-342900">
+              <a:spcAft>
+                <a:spcPts val="600"/>
+              </a:spcAft>
+              <a:buSzPct val="100000"/>
+              <a:buChar char="■"/>
+            </a:pPr>
+            <a:r>
+              <a:rPr lang="en-US" sz="1100" dirty="0">
+                <a:solidFill>
+                  <a:srgbClr val="333333"/>
+                </a:solidFill>
+                <a:latin typeface="Meiryo" pitchFamily="34" charset="0"/>
+                <a:ea typeface="Meiryo" pitchFamily="34" charset="-122"/>
+                <a:cs typeface="Meiryo" pitchFamily="34" charset="-120"/>
+              </a:rPr>
+              <a:t>ナビ: ホーム → 論文 → 研究室 → イベント → 動画 → 記事</a:t>
+            </a:r>
+            <a:endParaRPr lang="en-US" sz="1100" dirty="0"/>
           </a:p>
         </p:txBody>
       </p:sp>
@@ -12346,7 +13741,7 @@
                 <a:ea typeface="Meiryo" pitchFamily="34" charset="-122"/>
                 <a:cs typeface="Meiryo" pitchFamily="34" charset="-120"/>
               </a:rPr>
-              <a:t>全文検索 (PoC)</a:t>
+              <a:t>全文検索</a:t>
             </a:r>
             <a:endParaRPr lang="en-US" sz="1400" dirty="0"/>
           </a:p>
@@ -12375,13 +13770,13 @@
           <a:p>
             <a:pPr marL="342900" indent="-342900">
               <a:spcAft>
-                <a:spcPts val="600"/>
+                <a:spcPts val="500"/>
               </a:spcAft>
               <a:buSzPct val="100000"/>
               <a:buChar char="■"/>
             </a:pPr>
             <a:r>
-              <a:rPr lang="en-US" sz="1200" dirty="0">
+              <a:rPr lang="en-US" sz="1100" dirty="0">
                 <a:solidFill>
                   <a:srgbClr val="333333"/>
                 </a:solidFill>
@@ -12391,112 +13786,133 @@
               </a:rPr>
               <a:t>クライアントサイド substring 一致</a:t>
             </a:r>
-            <a:endParaRPr lang="en-US" sz="1200" dirty="0"/>
+            <a:endParaRPr lang="en-US" sz="1100" dirty="0"/>
           </a:p>
           <a:p>
             <a:pPr marL="342900" indent="-342900">
               <a:spcAft>
-                <a:spcPts val="600"/>
+                <a:spcPts val="500"/>
               </a:spcAft>
               <a:buSzPct val="100000"/>
               <a:buChar char="■"/>
             </a:pPr>
             <a:r>
-              <a:rPr lang="en-US" sz="1200" dirty="0">
-                <a:solidFill>
-                  <a:srgbClr val="333333"/>
-                </a:solidFill>
-                <a:latin typeface="Meiryo" pitchFamily="34" charset="0"/>
-                <a:ea typeface="Meiryo" pitchFamily="34" charset="-122"/>
-                <a:cs typeface="Meiryo" pitchFamily="34" charset="-120"/>
-              </a:rPr>
-              <a:t>対象: タイトル / 著者 / タグ / 要約 / 場所など</a:t>
-            </a:r>
-            <a:endParaRPr lang="en-US" sz="1200" dirty="0"/>
+              <a:rPr lang="en-US" sz="1100" dirty="0">
+                <a:solidFill>
+                  <a:srgbClr val="333333"/>
+                </a:solidFill>
+                <a:latin typeface="Meiryo" pitchFamily="34" charset="0"/>
+                <a:ea typeface="Meiryo" pitchFamily="34" charset="-122"/>
+                <a:cs typeface="Meiryo" pitchFamily="34" charset="-120"/>
+              </a:rPr>
+              <a:t>5 種すべて対応（papers / labs / events / videos / articles）</a:t>
+            </a:r>
+            <a:endParaRPr lang="en-US" sz="1100" dirty="0"/>
           </a:p>
           <a:p>
             <a:pPr marL="342900" indent="-342900">
               <a:spcAft>
-                <a:spcPts val="600"/>
+                <a:spcPts val="500"/>
               </a:spcAft>
               <a:buSzPct val="100000"/>
               <a:buChar char="■"/>
             </a:pPr>
             <a:r>
-              <a:rPr lang="en-US" sz="1200" dirty="0">
-                <a:solidFill>
-                  <a:srgbClr val="333333"/>
-                </a:solidFill>
-                <a:latin typeface="Meiryo" pitchFamily="34" charset="0"/>
-                <a:ea typeface="Meiryo" pitchFamily="34" charset="-122"/>
-                <a:cs typeface="Meiryo" pitchFamily="34" charset="-120"/>
-              </a:rPr>
-              <a:t>Type フィルター (All / Papers / Labs / Events)</a:t>
-            </a:r>
-            <a:endParaRPr lang="en-US" sz="1200" dirty="0"/>
+              <a:rPr lang="en-US" sz="1100" dirty="0">
+                <a:solidFill>
+                  <a:srgbClr val="333333"/>
+                </a:solidFill>
+                <a:latin typeface="Meiryo" pitchFamily="34" charset="0"/>
+                <a:ea typeface="Meiryo" pitchFamily="34" charset="-122"/>
+                <a:cs typeface="Meiryo" pitchFamily="34" charset="-120"/>
+              </a:rPr>
+              <a:t>タイトル / 著者 / タグ / 要約 / 場所 / 抜粋を対象</a:t>
+            </a:r>
+            <a:endParaRPr lang="en-US" sz="1100" dirty="0"/>
           </a:p>
           <a:p>
             <a:pPr marL="342900" indent="-342900">
               <a:spcAft>
-                <a:spcPts val="600"/>
+                <a:spcPts val="500"/>
               </a:spcAft>
               <a:buSzPct val="100000"/>
               <a:buChar char="■"/>
             </a:pPr>
             <a:r>
-              <a:rPr lang="en-US" sz="1200" dirty="0">
-                <a:solidFill>
-                  <a:srgbClr val="333333"/>
-                </a:solidFill>
-                <a:latin typeface="Meiryo" pitchFamily="34" charset="0"/>
-                <a:ea typeface="Meiryo" pitchFamily="34" charset="-122"/>
-                <a:cs typeface="Meiryo" pitchFamily="34" charset="-120"/>
-              </a:rPr>
-              <a:t>?q= 付き URL で共有 / ブックマーク可能</a:t>
-            </a:r>
-            <a:endParaRPr lang="en-US" sz="1200" dirty="0"/>
+              <a:rPr lang="en-US" sz="1100" dirty="0">
+                <a:solidFill>
+                  <a:srgbClr val="333333"/>
+                </a:solidFill>
+                <a:latin typeface="Meiryo" pitchFamily="34" charset="0"/>
+                <a:ea typeface="Meiryo" pitchFamily="34" charset="-122"/>
+                <a:cs typeface="Meiryo" pitchFamily="34" charset="-120"/>
+              </a:rPr>
+              <a:t>フィルター: All / Papers / Labs / Events / Videos / Articles</a:t>
+            </a:r>
+            <a:endParaRPr lang="en-US" sz="1100" dirty="0"/>
           </a:p>
           <a:p>
             <a:pPr marL="342900" indent="-342900">
               <a:spcAft>
-                <a:spcPts val="600"/>
+                <a:spcPts val="500"/>
               </a:spcAft>
               <a:buSzPct val="100000"/>
               <a:buChar char="■"/>
             </a:pPr>
             <a:r>
-              <a:rPr lang="en-US" sz="1200" dirty="0">
-                <a:solidFill>
-                  <a:srgbClr val="333333"/>
-                </a:solidFill>
-                <a:latin typeface="Meiryo" pitchFamily="34" charset="0"/>
-                <a:ea typeface="Meiryo" pitchFamily="34" charset="-122"/>
-                <a:cs typeface="Meiryo" pitchFamily="34" charset="-120"/>
-              </a:rPr>
-              <a:t>日本語も substring で動作</a:t>
-            </a:r>
-            <a:endParaRPr lang="en-US" sz="1200" dirty="0"/>
+              <a:rPr lang="en-US" sz="1100" dirty="0">
+                <a:solidFill>
+                  <a:srgbClr val="333333"/>
+                </a:solidFill>
+                <a:latin typeface="Meiryo" pitchFamily="34" charset="0"/>
+                <a:ea typeface="Meiryo" pitchFamily="34" charset="-122"/>
+                <a:cs typeface="Meiryo" pitchFamily="34" charset="-120"/>
+              </a:rPr>
+              <a:t>?q= 付き URL で共有 / ブックマーク可能</a:t>
+            </a:r>
+            <a:endParaRPr lang="en-US" sz="1100" dirty="0"/>
           </a:p>
           <a:p>
             <a:pPr marL="342900" indent="-342900">
               <a:spcAft>
-                <a:spcPts val="600"/>
+                <a:spcPts val="500"/>
               </a:spcAft>
               <a:buSzPct val="100000"/>
               <a:buChar char="■"/>
             </a:pPr>
             <a:r>
-              <a:rPr lang="en-US" sz="1200" dirty="0">
-                <a:solidFill>
-                  <a:srgbClr val="333333"/>
-                </a:solidFill>
-                <a:latin typeface="Meiryo" pitchFamily="34" charset="0"/>
-                <a:ea typeface="Meiryo" pitchFamily="34" charset="-122"/>
-                <a:cs typeface="Meiryo" pitchFamily="34" charset="-120"/>
-              </a:rPr>
-              <a:t>100 件超えたら Pagefind に置換予定</a:t>
-            </a:r>
-            <a:endParaRPr lang="en-US" sz="1200" dirty="0"/>
+              <a:rPr lang="en-US" sz="1100" dirty="0">
+                <a:solidFill>
+                  <a:srgbClr val="333333"/>
+                </a:solidFill>
+                <a:latin typeface="Meiryo" pitchFamily="34" charset="0"/>
+                <a:ea typeface="Meiryo" pitchFamily="34" charset="-122"/>
+                <a:cs typeface="Meiryo" pitchFamily="34" charset="-120"/>
+              </a:rPr>
+              <a:t>日本語も substring で動作（normalize 済み）</a:t>
+            </a:r>
+            <a:endParaRPr lang="en-US" sz="1100" dirty="0"/>
+          </a:p>
+          <a:p>
+            <a:pPr marL="342900" indent="-342900">
+              <a:spcAft>
+                <a:spcPts val="500"/>
+              </a:spcAft>
+              <a:buSzPct val="100000"/>
+              <a:buChar char="■"/>
+            </a:pPr>
+            <a:r>
+              <a:rPr lang="en-US" sz="1100" dirty="0">
+                <a:solidFill>
+                  <a:srgbClr val="333333"/>
+                </a:solidFill>
+                <a:latin typeface="Meiryo" pitchFamily="34" charset="0"/>
+                <a:ea typeface="Meiryo" pitchFamily="34" charset="-122"/>
+                <a:cs typeface="Meiryo" pitchFamily="34" charset="-120"/>
+              </a:rPr>
+              <a:t>件数増加時は Pagefind に置換可能</a:t>
+            </a:r>
+            <a:endParaRPr lang="en-US" sz="1100" dirty="0"/>
           </a:p>
         </p:txBody>
       </p:sp>
@@ -12533,7 +13949,7 @@
                 <a:ea typeface="Meiryo" pitchFamily="34" charset="-122"/>
                 <a:cs typeface="Meiryo" pitchFamily="34" charset="-120"/>
               </a:rPr>
-              <a:t>共有ボタン (詳細ページ)</a:t>
+              <a:t>共有 / 外部誘導</a:t>
             </a:r>
             <a:endParaRPr lang="en-US" sz="1400" dirty="0"/>
           </a:p>
@@ -12562,107 +13978,149 @@
           <a:p>
             <a:pPr marL="342900" indent="-342900">
               <a:spcAft>
-                <a:spcPts val="600"/>
+                <a:spcPts val="500"/>
               </a:spcAft>
               <a:buSzPct val="100000"/>
               <a:buChar char="■"/>
             </a:pPr>
             <a:r>
-              <a:rPr lang="en-US" sz="1200" dirty="0">
-                <a:solidFill>
-                  <a:srgbClr val="333333"/>
-                </a:solidFill>
-                <a:latin typeface="Meiryo" pitchFamily="34" charset="0"/>
-                <a:ea typeface="Meiryo" pitchFamily="34" charset="-122"/>
-                <a:cs typeface="Meiryo" pitchFamily="34" charset="-120"/>
-              </a:rPr>
-              <a:t>X (twitter intent URL)</a:t>
-            </a:r>
-            <a:endParaRPr lang="en-US" sz="1200" dirty="0"/>
+              <a:rPr lang="en-US" sz="1100" dirty="0">
+                <a:solidFill>
+                  <a:srgbClr val="333333"/>
+                </a:solidFill>
+                <a:latin typeface="Meiryo" pitchFamily="34" charset="0"/>
+                <a:ea typeface="Meiryo" pitchFamily="34" charset="-122"/>
+                <a:cs typeface="Meiryo" pitchFamily="34" charset="-120"/>
+              </a:rPr>
+              <a:t>詳細ページに X / Bluesky 共有ボタン</a:t>
+            </a:r>
+            <a:endParaRPr lang="en-US" sz="1100" dirty="0"/>
           </a:p>
           <a:p>
             <a:pPr marL="342900" indent="-342900">
               <a:spcAft>
-                <a:spcPts val="600"/>
+                <a:spcPts val="500"/>
               </a:spcAft>
               <a:buSzPct val="100000"/>
               <a:buChar char="■"/>
             </a:pPr>
             <a:r>
-              <a:rPr lang="en-US" sz="1200" dirty="0">
-                <a:solidFill>
-                  <a:srgbClr val="333333"/>
-                </a:solidFill>
-                <a:latin typeface="Meiryo" pitchFamily="34" charset="0"/>
-                <a:ea typeface="Meiryo" pitchFamily="34" charset="-122"/>
-                <a:cs typeface="Meiryo" pitchFamily="34" charset="-120"/>
-              </a:rPr>
-              <a:t>Bluesky (compose intent URL)</a:t>
-            </a:r>
-            <a:endParaRPr lang="en-US" sz="1200" dirty="0"/>
+              <a:rPr lang="en-US" sz="1100" dirty="0">
+                <a:solidFill>
+                  <a:srgbClr val="333333"/>
+                </a:solidFill>
+                <a:latin typeface="Meiryo" pitchFamily="34" charset="0"/>
+                <a:ea typeface="Meiryo" pitchFamily="34" charset="-122"/>
+                <a:cs typeface="Meiryo" pitchFamily="34" charset="-120"/>
+              </a:rPr>
+              <a:t>リンクをコピー（Clipboard API + フォールバック）</a:t>
+            </a:r>
+            <a:endParaRPr lang="en-US" sz="1100" dirty="0"/>
           </a:p>
           <a:p>
             <a:pPr marL="342900" indent="-342900">
               <a:spcAft>
-                <a:spcPts val="600"/>
+                <a:spcPts val="500"/>
               </a:spcAft>
               <a:buSzPct val="100000"/>
               <a:buChar char="■"/>
             </a:pPr>
             <a:r>
-              <a:rPr lang="en-US" sz="1200" dirty="0">
-                <a:solidFill>
-                  <a:srgbClr val="333333"/>
-                </a:solidFill>
-                <a:latin typeface="Meiryo" pitchFamily="34" charset="0"/>
-                <a:ea typeface="Meiryo" pitchFamily="34" charset="-122"/>
-                <a:cs typeface="Meiryo" pitchFamily="34" charset="-120"/>
-              </a:rPr>
-              <a:t>リンクをコピー (Clipboard API + フォールバック)</a:t>
-            </a:r>
-            <a:endParaRPr lang="en-US" sz="1200" dirty="0"/>
+              <a:rPr lang="en-US" sz="1100" dirty="0">
+                <a:solidFill>
+                  <a:srgbClr val="333333"/>
+                </a:solidFill>
+                <a:latin typeface="Meiryo" pitchFamily="34" charset="0"/>
+                <a:ea typeface="Meiryo" pitchFamily="34" charset="-122"/>
+                <a:cs typeface="Meiryo" pitchFamily="34" charset="-120"/>
+              </a:rPr>
+              <a:t>ホーム右サイドバーに X CTA カード</a:t>
+            </a:r>
+            <a:endParaRPr lang="en-US" sz="1100" dirty="0"/>
           </a:p>
           <a:p>
             <a:pPr marL="342900" indent="-342900">
               <a:spcAft>
-                <a:spcPts val="600"/>
+                <a:spcPts val="500"/>
               </a:spcAft>
               <a:buSzPct val="100000"/>
               <a:buChar char="■"/>
             </a:pPr>
             <a:r>
-              <a:rPr lang="en-US" sz="1200" dirty="0">
-                <a:solidFill>
-                  <a:srgbClr val="333333"/>
-                </a:solidFill>
-                <a:latin typeface="Meiryo" pitchFamily="34" charset="0"/>
-                <a:ea typeface="Meiryo" pitchFamily="34" charset="-122"/>
-                <a:cs typeface="Meiryo" pitchFamily="34" charset="-120"/>
-              </a:rPr>
-              <a:t>認証不要 / バックエンド不要</a:t>
-            </a:r>
-            <a:endParaRPr lang="en-US" sz="1200" dirty="0"/>
+              <a:rPr lang="en-US" sz="1100" dirty="0">
+                <a:solidFill>
+                  <a:srgbClr val="333333"/>
+                </a:solidFill>
+                <a:latin typeface="Meiryo" pitchFamily="34" charset="0"/>
+                <a:ea typeface="Meiryo" pitchFamily="34" charset="-122"/>
+                <a:cs typeface="Meiryo" pitchFamily="34" charset="-120"/>
+              </a:rPr>
+              <a:t>  → タイムライン埋め込みは X 仕様で不安定なため断念</a:t>
+            </a:r>
+            <a:endParaRPr lang="en-US" sz="1100" dirty="0"/>
           </a:p>
           <a:p>
             <a:pPr marL="342900" indent="-342900">
               <a:spcAft>
-                <a:spcPts val="600"/>
+                <a:spcPts val="500"/>
               </a:spcAft>
               <a:buSzPct val="100000"/>
               <a:buChar char="■"/>
             </a:pPr>
             <a:r>
-              <a:rPr lang="en-US" sz="1200" dirty="0">
-                <a:solidFill>
-                  <a:srgbClr val="333333"/>
-                </a:solidFill>
-                <a:latin typeface="Meiryo" pitchFamily="34" charset="0"/>
-                <a:ea typeface="Meiryo" pitchFamily="34" charset="-122"/>
-                <a:cs typeface="Meiryo" pitchFamily="34" charset="-120"/>
-              </a:rPr>
-              <a:t>プリフィル文: タイトル + 著者 + 年 + via @cpchub</a:t>
-            </a:r>
-            <a:endParaRPr lang="en-US" sz="1200" dirty="0"/>
+              <a:rPr lang="en-US" sz="1100" dirty="0">
+                <a:solidFill>
+                  <a:srgbClr val="333333"/>
+                </a:solidFill>
+                <a:latin typeface="Meiryo" pitchFamily="34" charset="0"/>
+                <a:ea typeface="Meiryo" pitchFamily="34" charset="-122"/>
+                <a:cs typeface="Meiryo" pitchFamily="34" charset="-120"/>
+              </a:rPr>
+              <a:t>  → 直接 X で見るボタンを優先</a:t>
+            </a:r>
+            <a:endParaRPr lang="en-US" sz="1100" dirty="0"/>
+          </a:p>
+          <a:p>
+            <a:pPr marL="342900" indent="-342900">
+              <a:spcAft>
+                <a:spcPts val="500"/>
+              </a:spcAft>
+              <a:buSzPct val="100000"/>
+              <a:buChar char="■"/>
+            </a:pPr>
+            <a:r>
+              <a:rPr lang="en-US" sz="1100" dirty="0">
+                <a:solidFill>
+                  <a:srgbClr val="333333"/>
+                </a:solidFill>
+                <a:latin typeface="Meiryo" pitchFamily="34" charset="0"/>
+                <a:ea typeface="Meiryo" pitchFamily="34" charset="-122"/>
+                <a:cs typeface="Meiryo" pitchFamily="34" charset="-120"/>
+              </a:rPr>
+              <a:t>動画カード → YouTube 元動画へ</a:t>
+            </a:r>
+            <a:endParaRPr lang="en-US" sz="1100" dirty="0"/>
+          </a:p>
+          <a:p>
+            <a:pPr marL="342900" indent="-342900">
+              <a:spcAft>
+                <a:spcPts val="500"/>
+              </a:spcAft>
+              <a:buSzPct val="100000"/>
+              <a:buChar char="■"/>
+            </a:pPr>
+            <a:r>
+              <a:rPr lang="en-US" sz="1100" dirty="0">
+                <a:solidFill>
+                  <a:srgbClr val="333333"/>
+                </a:solidFill>
+                <a:latin typeface="Meiryo" pitchFamily="34" charset="0"/>
+                <a:ea typeface="Meiryo" pitchFamily="34" charset="-122"/>
+                <a:cs typeface="Meiryo" pitchFamily="34" charset="-120"/>
+              </a:rPr>
+              <a:t>記事カード → note 元記事へ</a:t>
+            </a:r>
+            <a:endParaRPr lang="en-US" sz="1100" dirty="0"/>
           </a:p>
         </p:txBody>
       </p:sp>
@@ -12691,7 +14149,7 @@
               <a:buNone/>
             </a:pPr>
             <a:r>
-              <a:rPr lang="en-US" sz="1200" i="1" dirty="0">
+              <a:rPr lang="en-US" sz="1100" i="1" dirty="0">
                 <a:solidFill>
                   <a:srgbClr val="2B579A"/>
                 </a:solidFill>
@@ -12699,9 +14157,9 @@
                 <a:ea typeface="Meiryo" pitchFamily="34" charset="-122"/>
                 <a:cs typeface="Meiryo" pitchFamily="34" charset="-120"/>
               </a:rPr>
-              <a:t>→ 訪問者起点の拡散 (共有ボタン) と運営起点の拡散 (X 自動投稿) を分離</a:t>
-            </a:r>
-            <a:endParaRPr lang="en-US" sz="1200" dirty="0"/>
+              <a:t>認証もバックエンドも持たず、外部に誘導することで運用負荷を最小化</a:t>
+            </a:r>
+            <a:endParaRPr lang="en-US" sz="1100" dirty="0"/>
           </a:p>
         </p:txBody>
       </p:sp>
